--- a/src/module03/content/Expressoes-Statements-e-Metodos.pptx
+++ b/src/module03/content/Expressoes-Statements-e-Metodos.pptx
@@ -4,6 +4,9 @@
   <p:sldMasterIdLst>
     <p:sldMasterId id="2147483648" r:id="rId1"/>
   </p:sldMasterIdLst>
+  <p:notesMasterIdLst>
+    <p:notesMasterId r:id="rId41"/>
+  </p:notesMasterIdLst>
   <p:sldIdLst>
     <p:sldId id="256" r:id="rId2"/>
     <p:sldId id="257" r:id="rId3"/>
@@ -45,10 +48,7 @@
     <p:sldId id="293" r:id="rId39"/>
     <p:sldId id="294" r:id="rId40"/>
   </p:sldIdLst>
-  <p:notesMasterIdLst>
-    <p:notesMasterId r:id="rId41"/>
-  </p:notesMasterIdLst>
-  <p:sldSz cx="9144000" cy="5143500"/>
+  <p:sldSz cx="9144000" cy="5143500" type="screen16x9"/>
   <p:notesSz cx="5143500" cy="9144000"/>
   <p:defaultTextStyle>
     <a:lvl1pPr marL="0" algn="l" defTabSz="914400" rtl="0" eaLnBrk="1" latinLnBrk="0" hangingPunct="1">
@@ -142,6 +142,11 @@
       </a:defRPr>
     </a:lvl9pPr>
   </p:defaultTextStyle>
+  <p:extLst>
+    <p:ext uri="{EFAFB233-063F-42B5-8137-9DF3F51BA10A}">
+      <p15:sldGuideLst xmlns:p15="http://schemas.microsoft.com/office/powerpoint/2012/main"/>
+    </p:ext>
+  </p:extLst>
 </p:presentation>
 </file>
 
@@ -167,234 +172,10 @@
           <a:chExt cx="0" cy="0"/>
         </a:xfrm>
       </p:grpSpPr>
-      <p:sp>
-        <p:nvSpPr>
-          <p:cNvPr id="2" name="Header Placeholder 1"/>
-          <p:cNvSpPr>
-            <a:spLocks noGrp="1"/>
-          </p:cNvSpPr>
-          <p:nvPr>
-            <p:ph type="hdr" sz="quarter"/>
-          </p:nvPr>
-        </p:nvSpPr>
-        <p:spPr>
-          <a:xfrm>
-            <a:off x="0" y="0"/>
-            <a:ext cx="2971800" cy="458788"/>
-          </a:xfrm>
-          <a:prstGeom prst="rect">
-            <a:avLst/>
-          </a:prstGeom>
-        </p:spPr>
-        <p:txBody>
-          <a:bodyPr vert="horz" lIns="91440" tIns="45720" rIns="91440" bIns="45720" rtlCol="0"/>
-          <a:lstStyle>
-            <a:lvl1pPr algn="l">
-              <a:defRPr sz="1200"/>
-            </a:lvl1pPr>
-          </a:lstStyle>
-          <a:p>
-            <a:endParaRPr lang="en-US"/>
-          </a:p>
-        </p:txBody>
-      </p:sp>
-      <p:sp>
-        <p:nvSpPr>
-          <p:cNvPr id="3" name="Date Placeholder 2"/>
-          <p:cNvSpPr>
-            <a:spLocks noGrp="1"/>
-          </p:cNvSpPr>
-          <p:nvPr>
-            <p:ph type="dt" idx="1"/>
-          </p:nvPr>
-        </p:nvSpPr>
-        <p:spPr>
-          <a:xfrm>
-            <a:off x="3884613" y="0"/>
-            <a:ext cx="2971800" cy="458788"/>
-          </a:xfrm>
-          <a:prstGeom prst="rect">
-            <a:avLst/>
-          </a:prstGeom>
-        </p:spPr>
-        <p:txBody>
-          <a:bodyPr vert="horz" lIns="91440" tIns="45720" rIns="91440" bIns="45720" rtlCol="0"/>
-          <a:lstStyle>
-            <a:lvl1pPr algn="r">
-              <a:defRPr sz="1200"/>
-            </a:lvl1pPr>
-          </a:lstStyle>
-          <a:p>
-            <a:fld id="{5282F153-3F37-0F45-9E97-73ACFA13230C}" type="datetimeFigureOut">
-              <a:rPr lang="en-US"/>
-              <a:t>7/23/19</a:t>
-            </a:fld>
-            <a:endParaRPr lang="en-US"/>
-          </a:p>
-        </p:txBody>
-      </p:sp>
-      <p:sp>
-        <p:nvSpPr>
-          <p:cNvPr id="4" name="Slide Image Placeholder 3"/>
-          <p:cNvSpPr>
-            <a:spLocks noGrp="1" noRot="1" noChangeAspect="1"/>
-          </p:cNvSpPr>
-          <p:nvPr>
-            <p:ph type="sldImg" idx="2"/>
-          </p:nvPr>
-        </p:nvSpPr>
-        <p:spPr>
-          <a:xfrm>
-            <a:off x="685800" y="1143000"/>
-            <a:ext cx="5486400" cy="3086100"/>
-          </a:xfrm>
-          <a:prstGeom prst="rect">
-            <a:avLst/>
-          </a:prstGeom>
-          <a:noFill/>
-          <a:ln w="12700">
-            <a:solidFill>
-              <a:prstClr val="black"/>
-            </a:solidFill>
-          </a:ln>
-        </p:spPr>
-        <p:txBody>
-          <a:bodyPr vert="horz" lIns="91440" tIns="45720" rIns="91440" bIns="45720" rtlCol="0" anchor="ctr"/>
-          <a:lstStyle/>
-          <a:p>
-            <a:endParaRPr lang="en-US"/>
-          </a:p>
-        </p:txBody>
-      </p:sp>
-      <p:sp>
-        <p:nvSpPr>
-          <p:cNvPr id="5" name="Notes Placeholder 4"/>
-          <p:cNvSpPr>
-            <a:spLocks noGrp="1"/>
-          </p:cNvSpPr>
-          <p:nvPr>
-            <p:ph type="body" sz="quarter" idx="3"/>
-          </p:nvPr>
-        </p:nvSpPr>
-        <p:spPr>
-          <a:xfrm>
-            <a:off x="685800" y="4400550"/>
-            <a:ext cx="5486400" cy="3600450"/>
-          </a:xfrm>
-          <a:prstGeom prst="rect">
-            <a:avLst/>
-          </a:prstGeom>
-        </p:spPr>
-        <p:txBody>
-          <a:bodyPr vert="horz" lIns="91440" tIns="45720" rIns="91440" bIns="45720" rtlCol="0"/>
-          <a:lstStyle/>
-          <a:p>
-            <a:pPr lvl="0"/>
-            <a:r>
-              <a:rPr lang="en-US"/>
-              <a:t>Click to edit Master text styles</a:t>
-            </a:r>
-          </a:p>
-          <a:p>
-            <a:pPr lvl="1"/>
-            <a:r>
-              <a:rPr lang="en-US"/>
-              <a:t>Second level</a:t>
-            </a:r>
-          </a:p>
-          <a:p>
-            <a:pPr lvl="2"/>
-            <a:r>
-              <a:rPr lang="en-US"/>
-              <a:t>Third level</a:t>
-            </a:r>
-          </a:p>
-          <a:p>
-            <a:pPr lvl="3"/>
-            <a:r>
-              <a:rPr lang="en-US"/>
-              <a:t>Fourth level</a:t>
-            </a:r>
-          </a:p>
-          <a:p>
-            <a:pPr lvl="4"/>
-            <a:r>
-              <a:rPr lang="en-US"/>
-              <a:t>Fifth level</a:t>
-            </a:r>
-          </a:p>
-        </p:txBody>
-      </p:sp>
-      <p:sp>
-        <p:nvSpPr>
-          <p:cNvPr id="6" name="Footer Placeholder 5"/>
-          <p:cNvSpPr>
-            <a:spLocks noGrp="1"/>
-          </p:cNvSpPr>
-          <p:nvPr>
-            <p:ph type="ftr" sz="quarter" idx="4"/>
-          </p:nvPr>
-        </p:nvSpPr>
-        <p:spPr>
-          <a:xfrm>
-            <a:off x="0" y="8685213"/>
-            <a:ext cx="2971800" cy="458787"/>
-          </a:xfrm>
-          <a:prstGeom prst="rect">
-            <a:avLst/>
-          </a:prstGeom>
-        </p:spPr>
-        <p:txBody>
-          <a:bodyPr vert="horz" lIns="91440" tIns="45720" rIns="91440" bIns="45720" rtlCol="0" anchor="b"/>
-          <a:lstStyle>
-            <a:lvl1pPr algn="l">
-              <a:defRPr sz="1200"/>
-            </a:lvl1pPr>
-          </a:lstStyle>
-          <a:p>
-            <a:endParaRPr lang="en-US"/>
-          </a:p>
-        </p:txBody>
-      </p:sp>
-      <p:sp>
-        <p:nvSpPr>
-          <p:cNvPr id="7" name="Slide Number Placeholder 6"/>
-          <p:cNvSpPr>
-            <a:spLocks noGrp="1"/>
-          </p:cNvSpPr>
-          <p:nvPr>
-            <p:ph type="sldNum" sz="quarter" idx="5"/>
-          </p:nvPr>
-        </p:nvSpPr>
-        <p:spPr>
-          <a:xfrm>
-            <a:off x="3884613" y="8685213"/>
-            <a:ext cx="2971800" cy="458787"/>
-          </a:xfrm>
-          <a:prstGeom prst="rect">
-            <a:avLst/>
-          </a:prstGeom>
-        </p:spPr>
-        <p:txBody>
-          <a:bodyPr vert="horz" lIns="91440" tIns="45720" rIns="91440" bIns="45720" rtlCol="0" anchor="b"/>
-          <a:lstStyle>
-            <a:lvl1pPr algn="r">
-              <a:defRPr sz="1200"/>
-            </a:lvl1pPr>
-          </a:lstStyle>
-          <a:p>
-            <a:fld id="{CE5E9CC1-C706-0F49-92D6-E571CC5EEA8F}" type="slidenum">
-              <a:rPr lang="en-US"/>
-              <a:t>‹#›</a:t>
-            </a:fld>
-            <a:endParaRPr lang="en-US"/>
-          </a:p>
-        </p:txBody>
-      </p:sp>
     </p:spTree>
     <p:extLst>
       <p:ext uri="{BB962C8B-B14F-4D97-AF65-F5344CB8AC3E}">
-        <p14:creationId xmlns:p14="http://schemas.microsoft.com/office/powerpoint/2010/main" val="1024086991"/>
+        <p14:creationId xmlns:p14="http://schemas.microsoft.com/office/powerpoint/2010/main" val="4192616222"/>
       </p:ext>
     </p:extLst>
   </p:cSld>
@@ -538,10 +319,6 @@
           <a:bodyPr/>
           <a:lstStyle/>
           <a:p>
-            <a:r>
-              <a:rPr lang="en-US" dirty="0"/>
-              <a:t/>
-            </a:r>
             <a:endParaRPr lang="en-US" dirty="0"/>
           </a:p>
         </p:txBody>
@@ -626,10 +403,6 @@
           <a:bodyPr/>
           <a:lstStyle/>
           <a:p>
-            <a:r>
-              <a:rPr lang="en-US" dirty="0"/>
-              <a:t/>
-            </a:r>
             <a:endParaRPr lang="en-US" dirty="0"/>
           </a:p>
         </p:txBody>
@@ -714,10 +487,6 @@
           <a:bodyPr/>
           <a:lstStyle/>
           <a:p>
-            <a:r>
-              <a:rPr lang="en-US" dirty="0"/>
-              <a:t/>
-            </a:r>
             <a:endParaRPr lang="en-US" dirty="0"/>
           </a:p>
         </p:txBody>
@@ -802,10 +571,6 @@
           <a:bodyPr/>
           <a:lstStyle/>
           <a:p>
-            <a:r>
-              <a:rPr lang="en-US" dirty="0"/>
-              <a:t/>
-            </a:r>
             <a:endParaRPr lang="en-US" dirty="0"/>
           </a:p>
         </p:txBody>
@@ -890,10 +655,6 @@
           <a:bodyPr/>
           <a:lstStyle/>
           <a:p>
-            <a:r>
-              <a:rPr lang="en-US" dirty="0"/>
-              <a:t/>
-            </a:r>
             <a:endParaRPr lang="en-US" dirty="0"/>
           </a:p>
         </p:txBody>
@@ -978,10 +739,6 @@
           <a:bodyPr/>
           <a:lstStyle/>
           <a:p>
-            <a:r>
-              <a:rPr lang="en-US" dirty="0"/>
-              <a:t/>
-            </a:r>
             <a:endParaRPr lang="en-US" dirty="0"/>
           </a:p>
         </p:txBody>
@@ -1066,10 +823,6 @@
           <a:bodyPr/>
           <a:lstStyle/>
           <a:p>
-            <a:r>
-              <a:rPr lang="en-US" dirty="0"/>
-              <a:t/>
-            </a:r>
             <a:endParaRPr lang="en-US" dirty="0"/>
           </a:p>
         </p:txBody>
@@ -1154,10 +907,6 @@
           <a:bodyPr/>
           <a:lstStyle/>
           <a:p>
-            <a:r>
-              <a:rPr lang="en-US" dirty="0"/>
-              <a:t/>
-            </a:r>
             <a:endParaRPr lang="en-US" dirty="0"/>
           </a:p>
         </p:txBody>
@@ -1242,10 +991,6 @@
           <a:bodyPr/>
           <a:lstStyle/>
           <a:p>
-            <a:r>
-              <a:rPr lang="en-US" dirty="0"/>
-              <a:t/>
-            </a:r>
             <a:endParaRPr lang="en-US" dirty="0"/>
           </a:p>
         </p:txBody>
@@ -1330,10 +1075,6 @@
           <a:bodyPr/>
           <a:lstStyle/>
           <a:p>
-            <a:r>
-              <a:rPr lang="en-US" dirty="0"/>
-              <a:t/>
-            </a:r>
             <a:endParaRPr lang="en-US" dirty="0"/>
           </a:p>
         </p:txBody>
@@ -1418,10 +1159,6 @@
           <a:bodyPr/>
           <a:lstStyle/>
           <a:p>
-            <a:r>
-              <a:rPr lang="en-US" dirty="0"/>
-              <a:t/>
-            </a:r>
             <a:endParaRPr lang="en-US" dirty="0"/>
           </a:p>
         </p:txBody>
@@ -1506,10 +1243,6 @@
           <a:bodyPr/>
           <a:lstStyle/>
           <a:p>
-            <a:r>
-              <a:rPr lang="en-US" dirty="0"/>
-              <a:t/>
-            </a:r>
             <a:endParaRPr lang="en-US" dirty="0"/>
           </a:p>
         </p:txBody>
@@ -1594,10 +1327,6 @@
           <a:bodyPr/>
           <a:lstStyle/>
           <a:p>
-            <a:r>
-              <a:rPr lang="en-US" dirty="0"/>
-              <a:t/>
-            </a:r>
             <a:endParaRPr lang="en-US" dirty="0"/>
           </a:p>
         </p:txBody>
@@ -1682,10 +1411,6 @@
           <a:bodyPr/>
           <a:lstStyle/>
           <a:p>
-            <a:r>
-              <a:rPr lang="en-US" dirty="0"/>
-              <a:t/>
-            </a:r>
             <a:endParaRPr lang="en-US" dirty="0"/>
           </a:p>
         </p:txBody>
@@ -1770,10 +1495,6 @@
           <a:bodyPr/>
           <a:lstStyle/>
           <a:p>
-            <a:r>
-              <a:rPr lang="en-US" dirty="0"/>
-              <a:t/>
-            </a:r>
             <a:endParaRPr lang="en-US" dirty="0"/>
           </a:p>
         </p:txBody>
@@ -1858,10 +1579,6 @@
           <a:bodyPr/>
           <a:lstStyle/>
           <a:p>
-            <a:r>
-              <a:rPr lang="en-US" dirty="0"/>
-              <a:t/>
-            </a:r>
             <a:endParaRPr lang="en-US" dirty="0"/>
           </a:p>
         </p:txBody>
@@ -1946,10 +1663,6 @@
           <a:bodyPr/>
           <a:lstStyle/>
           <a:p>
-            <a:r>
-              <a:rPr lang="en-US" dirty="0"/>
-              <a:t/>
-            </a:r>
             <a:endParaRPr lang="en-US" dirty="0"/>
           </a:p>
         </p:txBody>
@@ -2034,10 +1747,6 @@
           <a:bodyPr/>
           <a:lstStyle/>
           <a:p>
-            <a:r>
-              <a:rPr lang="en-US" dirty="0"/>
-              <a:t/>
-            </a:r>
             <a:endParaRPr lang="en-US" dirty="0"/>
           </a:p>
         </p:txBody>
@@ -2122,10 +1831,6 @@
           <a:bodyPr/>
           <a:lstStyle/>
           <a:p>
-            <a:r>
-              <a:rPr lang="en-US" dirty="0"/>
-              <a:t/>
-            </a:r>
             <a:endParaRPr lang="en-US" dirty="0"/>
           </a:p>
         </p:txBody>
@@ -2210,10 +1915,6 @@
           <a:bodyPr/>
           <a:lstStyle/>
           <a:p>
-            <a:r>
-              <a:rPr lang="en-US" dirty="0"/>
-              <a:t/>
-            </a:r>
             <a:endParaRPr lang="en-US" dirty="0"/>
           </a:p>
         </p:txBody>
@@ -2298,10 +1999,6 @@
           <a:bodyPr/>
           <a:lstStyle/>
           <a:p>
-            <a:r>
-              <a:rPr lang="en-US" dirty="0"/>
-              <a:t/>
-            </a:r>
             <a:endParaRPr lang="en-US" dirty="0"/>
           </a:p>
         </p:txBody>
@@ -2386,10 +2083,6 @@
           <a:bodyPr/>
           <a:lstStyle/>
           <a:p>
-            <a:r>
-              <a:rPr lang="en-US" dirty="0"/>
-              <a:t/>
-            </a:r>
             <a:endParaRPr lang="en-US" dirty="0"/>
           </a:p>
         </p:txBody>
@@ -2474,10 +2167,6 @@
           <a:bodyPr/>
           <a:lstStyle/>
           <a:p>
-            <a:r>
-              <a:rPr lang="en-US" dirty="0"/>
-              <a:t/>
-            </a:r>
             <a:endParaRPr lang="en-US" dirty="0"/>
           </a:p>
         </p:txBody>
@@ -2562,10 +2251,6 @@
           <a:bodyPr/>
           <a:lstStyle/>
           <a:p>
-            <a:r>
-              <a:rPr lang="en-US" dirty="0"/>
-              <a:t/>
-            </a:r>
             <a:endParaRPr lang="en-US" dirty="0"/>
           </a:p>
         </p:txBody>
@@ -2650,10 +2335,6 @@
           <a:bodyPr/>
           <a:lstStyle/>
           <a:p>
-            <a:r>
-              <a:rPr lang="en-US" dirty="0"/>
-              <a:t/>
-            </a:r>
             <a:endParaRPr lang="en-US" dirty="0"/>
           </a:p>
         </p:txBody>
@@ -2738,10 +2419,6 @@
           <a:bodyPr/>
           <a:lstStyle/>
           <a:p>
-            <a:r>
-              <a:rPr lang="en-US" dirty="0"/>
-              <a:t/>
-            </a:r>
             <a:endParaRPr lang="en-US" dirty="0"/>
           </a:p>
         </p:txBody>
@@ -2826,10 +2503,6 @@
           <a:bodyPr/>
           <a:lstStyle/>
           <a:p>
-            <a:r>
-              <a:rPr lang="en-US" dirty="0"/>
-              <a:t/>
-            </a:r>
             <a:endParaRPr lang="en-US" dirty="0"/>
           </a:p>
         </p:txBody>
@@ -2914,10 +2587,6 @@
           <a:bodyPr/>
           <a:lstStyle/>
           <a:p>
-            <a:r>
-              <a:rPr lang="en-US" dirty="0"/>
-              <a:t/>
-            </a:r>
             <a:endParaRPr lang="en-US" dirty="0"/>
           </a:p>
         </p:txBody>
@@ -3002,10 +2671,6 @@
           <a:bodyPr/>
           <a:lstStyle/>
           <a:p>
-            <a:r>
-              <a:rPr lang="en-US" dirty="0"/>
-              <a:t/>
-            </a:r>
             <a:endParaRPr lang="en-US" dirty="0"/>
           </a:p>
         </p:txBody>
@@ -3090,10 +2755,6 @@
           <a:bodyPr/>
           <a:lstStyle/>
           <a:p>
-            <a:r>
-              <a:rPr lang="en-US" dirty="0"/>
-              <a:t/>
-            </a:r>
             <a:endParaRPr lang="en-US" dirty="0"/>
           </a:p>
         </p:txBody>
@@ -3178,10 +2839,6 @@
           <a:bodyPr/>
           <a:lstStyle/>
           <a:p>
-            <a:r>
-              <a:rPr lang="en-US" dirty="0"/>
-              <a:t/>
-            </a:r>
             <a:endParaRPr lang="en-US" dirty="0"/>
           </a:p>
         </p:txBody>
@@ -3266,10 +2923,6 @@
           <a:bodyPr/>
           <a:lstStyle/>
           <a:p>
-            <a:r>
-              <a:rPr lang="en-US" dirty="0"/>
-              <a:t/>
-            </a:r>
             <a:endParaRPr lang="en-US" dirty="0"/>
           </a:p>
         </p:txBody>
@@ -3354,10 +3007,6 @@
           <a:bodyPr/>
           <a:lstStyle/>
           <a:p>
-            <a:r>
-              <a:rPr lang="en-US" dirty="0"/>
-              <a:t/>
-            </a:r>
             <a:endParaRPr lang="en-US" dirty="0"/>
           </a:p>
         </p:txBody>
@@ -3442,10 +3091,6 @@
           <a:bodyPr/>
           <a:lstStyle/>
           <a:p>
-            <a:r>
-              <a:rPr lang="en-US" dirty="0"/>
-              <a:t/>
-            </a:r>
             <a:endParaRPr lang="en-US" dirty="0"/>
           </a:p>
         </p:txBody>
@@ -3530,10 +3175,6 @@
           <a:bodyPr/>
           <a:lstStyle/>
           <a:p>
-            <a:r>
-              <a:rPr lang="en-US" dirty="0"/>
-              <a:t/>
-            </a:r>
             <a:endParaRPr lang="en-US" dirty="0"/>
           </a:p>
         </p:txBody>
@@ -3618,10 +3259,6 @@
           <a:bodyPr/>
           <a:lstStyle/>
           <a:p>
-            <a:r>
-              <a:rPr lang="en-US" dirty="0"/>
-              <a:t/>
-            </a:r>
             <a:endParaRPr lang="en-US" dirty="0"/>
           </a:p>
         </p:txBody>
@@ -3706,10 +3343,6 @@
           <a:bodyPr/>
           <a:lstStyle/>
           <a:p>
-            <a:r>
-              <a:rPr lang="en-US" dirty="0"/>
-              <a:t/>
-            </a:r>
             <a:endParaRPr lang="en-US" dirty="0"/>
           </a:p>
         </p:txBody>
@@ -3794,10 +3427,6 @@
           <a:bodyPr/>
           <a:lstStyle/>
           <a:p>
-            <a:r>
-              <a:rPr lang="en-US" dirty="0"/>
-              <a:t/>
-            </a:r>
             <a:endParaRPr lang="en-US" dirty="0"/>
           </a:p>
         </p:txBody>
@@ -3882,10 +3511,6 @@
           <a:bodyPr/>
           <a:lstStyle/>
           <a:p>
-            <a:r>
-              <a:rPr lang="en-US" dirty="0"/>
-              <a:t/>
-            </a:r>
             <a:endParaRPr lang="en-US" dirty="0"/>
           </a:p>
         </p:txBody>
@@ -3959,6 +3584,11 @@
 <file path=ppt/slideMasters/slideMaster1.xml><?xml version="1.0" encoding="utf-8"?>
 <p:sldMaster xmlns:a="http://schemas.openxmlformats.org/drawingml/2006/main" xmlns:r="http://schemas.openxmlformats.org/officeDocument/2006/relationships" xmlns:p="http://schemas.openxmlformats.org/presentationml/2006/main">
   <p:cSld>
+    <p:bg>
+      <p:bgRef idx="1001">
+        <a:schemeClr val="bg1"/>
+      </p:bgRef>
+    </p:bg>
     <p:spTree>
       <p:nvGrpSpPr>
         <p:cNvPr id="1" name=""/>
@@ -4241,6 +3871,7 @@
         <a:solidFill>
           <a:srgbClr val="0A1A12"/>
         </a:solidFill>
+        <a:effectLst/>
       </p:bgPr>
     </p:bg>
     <p:spTree>
@@ -4409,11 +4040,11 @@
           <a:bodyPr wrap="square" rtlCol="0" anchor="ctr"/>
           <a:lstStyle/>
           <a:p>
-            <a:pPr indent="0" marL="0">
-              <a:buNone/>
-            </a:pPr>
-            <a:r>
-              <a:rPr lang="en-US" sz="1400" b="1" spc="1000" kern="0" dirty="0">
+            <a:pPr marL="0" indent="0">
+              <a:buNone/>
+            </a:pPr>
+            <a:r>
+              <a:rPr lang="en-US" sz="1400" b="1" kern="0" spc="1000" dirty="0">
                 <a:solidFill>
                   <a:srgbClr val="16A34A"/>
                 </a:solidFill>
@@ -4448,7 +4079,7 @@
           <a:bodyPr wrap="square" rtlCol="0" anchor="ctr"/>
           <a:lstStyle/>
           <a:p>
-            <a:pPr indent="0" marL="0">
+            <a:pPr marL="0" indent="0">
               <a:buNone/>
             </a:pPr>
             <a:r>
@@ -4487,7 +4118,7 @@
           <a:bodyPr wrap="square" rtlCol="0" anchor="ctr"/>
           <a:lstStyle/>
           <a:p>
-            <a:pPr indent="0" marL="0">
+            <a:pPr marL="0" indent="0">
               <a:buNone/>
             </a:pPr>
             <a:r>
@@ -4526,7 +4157,7 @@
           <a:bodyPr wrap="square" rtlCol="0" anchor="ctr"/>
           <a:lstStyle/>
           <a:p>
-            <a:pPr indent="0" marL="0">
+            <a:pPr marL="0" indent="0">
               <a:buNone/>
             </a:pPr>
             <a:r>
@@ -4590,7 +4221,7 @@
           <a:bodyPr wrap="square" rtlCol="0" anchor="ctr"/>
           <a:lstStyle/>
           <a:p>
-            <a:pPr indent="0" marL="0">
+            <a:pPr marL="0" indent="0">
               <a:buNone/>
             </a:pPr>
             <a:r>
@@ -4629,7 +4260,7 @@
           <a:bodyPr wrap="square" rtlCol="0" anchor="ctr"/>
           <a:lstStyle/>
           <a:p>
-            <a:pPr indent="0" marL="0">
+            <a:pPr marL="0" indent="0">
               <a:buNone/>
             </a:pPr>
             <a:r>
@@ -4695,7 +4326,7 @@
           <a:bodyPr wrap="square" lIns="0" tIns="0" rIns="0" bIns="0" rtlCol="0" anchor="ctr"/>
           <a:lstStyle/>
           <a:p>
-            <a:pPr algn="ctr" indent="0" marL="0">
+            <a:pPr marL="0" indent="0" algn="ctr">
               <a:buNone/>
             </a:pPr>
             <a:r>
@@ -4761,7 +4392,7 @@
           <a:bodyPr wrap="square" lIns="0" tIns="0" rIns="0" bIns="0" rtlCol="0" anchor="ctr"/>
           <a:lstStyle/>
           <a:p>
-            <a:pPr algn="ctr" indent="0" marL="0">
+            <a:pPr marL="0" indent="0" algn="ctr">
               <a:buNone/>
             </a:pPr>
             <a:r>
@@ -4827,7 +4458,7 @@
           <a:bodyPr wrap="square" lIns="0" tIns="0" rIns="0" bIns="0" rtlCol="0" anchor="ctr"/>
           <a:lstStyle/>
           <a:p>
-            <a:pPr algn="ctr" indent="0" marL="0">
+            <a:pPr marL="0" indent="0" algn="ctr">
               <a:buNone/>
             </a:pPr>
             <a:r>
@@ -4893,7 +4524,7 @@
           <a:bodyPr wrap="square" lIns="0" tIns="0" rIns="0" bIns="0" rtlCol="0" anchor="ctr"/>
           <a:lstStyle/>
           <a:p>
-            <a:pPr algn="ctr" indent="0" marL="0">
+            <a:pPr marL="0" indent="0" algn="ctr">
               <a:buNone/>
             </a:pPr>
             <a:r>
@@ -4959,7 +4590,7 @@
           <a:bodyPr wrap="square" lIns="0" tIns="0" rIns="0" bIns="0" rtlCol="0" anchor="ctr"/>
           <a:lstStyle/>
           <a:p>
-            <a:pPr algn="ctr" indent="0" marL="0">
+            <a:pPr marL="0" indent="0" algn="ctr">
               <a:buNone/>
             </a:pPr>
             <a:r>
@@ -5025,7 +4656,7 @@
           <a:bodyPr wrap="square" lIns="0" tIns="0" rIns="0" bIns="0" rtlCol="0" anchor="ctr"/>
           <a:lstStyle/>
           <a:p>
-            <a:pPr algn="ctr" indent="0" marL="0">
+            <a:pPr marL="0" indent="0" algn="ctr">
               <a:buNone/>
             </a:pPr>
             <a:r>
@@ -5091,7 +4722,7 @@
           <a:bodyPr wrap="square" lIns="0" tIns="0" rIns="0" bIns="0" rtlCol="0" anchor="ctr"/>
           <a:lstStyle/>
           <a:p>
-            <a:pPr algn="ctr" indent="0" marL="0">
+            <a:pPr marL="0" indent="0" algn="ctr">
               <a:buNone/>
             </a:pPr>
             <a:r>
@@ -5157,7 +4788,7 @@
           <a:bodyPr wrap="square" lIns="0" tIns="0" rIns="0" bIns="0" rtlCol="0" anchor="ctr"/>
           <a:lstStyle/>
           <a:p>
-            <a:pPr algn="ctr" indent="0" marL="0">
+            <a:pPr marL="0" indent="0" algn="ctr">
               <a:buNone/>
             </a:pPr>
             <a:r>
@@ -5223,7 +4854,7 @@
           <a:bodyPr wrap="square" lIns="0" tIns="0" rIns="0" bIns="0" rtlCol="0" anchor="ctr"/>
           <a:lstStyle/>
           <a:p>
-            <a:pPr algn="ctr" indent="0" marL="0">
+            <a:pPr marL="0" indent="0" algn="ctr">
               <a:buNone/>
             </a:pPr>
             <a:r>
@@ -5289,7 +4920,7 @@
           <a:bodyPr wrap="square" lIns="0" tIns="0" rIns="0" bIns="0" rtlCol="0" anchor="ctr"/>
           <a:lstStyle/>
           <a:p>
-            <a:pPr algn="ctr" indent="0" marL="0">
+            <a:pPr marL="0" indent="0" algn="ctr">
               <a:buNone/>
             </a:pPr>
             <a:r>
@@ -5323,6 +4954,7 @@
         <a:solidFill>
           <a:srgbClr val="F0FDF4"/>
         </a:solidFill>
+        <a:effectLst/>
       </p:bgPr>
     </p:bg>
     <p:spTree>
@@ -5410,7 +5042,7 @@
           <a:bodyPr wrap="square" lIns="0" tIns="0" rIns="0" bIns="0" rtlCol="0" anchor="ctr"/>
           <a:lstStyle/>
           <a:p>
-            <a:pPr indent="0" marL="0">
+            <a:pPr marL="0" indent="0">
               <a:buNone/>
             </a:pPr>
             <a:r>
@@ -5449,7 +5081,7 @@
           <a:bodyPr wrap="square" lIns="0" tIns="0" rIns="0" bIns="0" rtlCol="0" anchor="ctr"/>
           <a:lstStyle/>
           <a:p>
-            <a:pPr indent="0" marL="0">
+            <a:pPr marL="0" indent="0">
               <a:buNone/>
             </a:pPr>
             <a:r>
@@ -5491,7 +5123,7 @@
             <a:prstDash val="solid"/>
           </a:ln>
           <a:effectLst>
-            <a:outerShdw sx="100000" sy="100000" kx="0" ky="0" algn="bl" rotWithShape="0" blurRad="76200" dist="25400" dir="8100000">
+            <a:outerShdw blurRad="76200" dist="25400" dir="8100000" algn="bl" rotWithShape="0">
               <a:srgbClr val="000000">
                 <a:alpha val="18000"/>
               </a:srgbClr>
@@ -5545,7 +5177,7 @@
           <a:bodyPr wrap="square" lIns="0" tIns="0" rIns="0" bIns="0" rtlCol="0" anchor="t"/>
           <a:lstStyle/>
           <a:p>
-            <a:pPr indent="0" marL="0">
+            <a:pPr marL="0" indent="0">
               <a:buNone/>
             </a:pPr>
             <a:r>
@@ -5562,7 +5194,7 @@
             <a:endParaRPr lang="en-US" sz="1250" dirty="0"/>
           </a:p>
           <a:p>
-            <a:pPr indent="0" marL="0">
+            <a:pPr marL="0" indent="0">
               <a:buNone/>
             </a:pPr>
             <a:r>
@@ -5579,13 +5211,13 @@
             <a:endParaRPr lang="en-US" sz="1250" dirty="0"/>
           </a:p>
           <a:p>
-            <a:pPr indent="0" marL="0">
+            <a:pPr marL="0" indent="0">
               <a:buNone/>
             </a:pPr>
             <a:endParaRPr lang="en-US" sz="1250" dirty="0"/>
           </a:p>
           <a:p>
-            <a:pPr indent="0" marL="0">
+            <a:pPr marL="0" indent="0">
               <a:buNone/>
             </a:pPr>
             <a:r>
@@ -5602,7 +5234,7 @@
             <a:endParaRPr lang="en-US" sz="1250" dirty="0"/>
           </a:p>
           <a:p>
-            <a:pPr indent="0" marL="0">
+            <a:pPr marL="0" indent="0">
               <a:buNone/>
             </a:pPr>
             <a:r>
@@ -5619,7 +5251,7 @@
             <a:endParaRPr lang="en-US" sz="1250" dirty="0"/>
           </a:p>
           <a:p>
-            <a:pPr indent="0" marL="0">
+            <a:pPr marL="0" indent="0">
               <a:buNone/>
             </a:pPr>
             <a:r>
@@ -5636,7 +5268,7 @@
             <a:endParaRPr lang="en-US" sz="1250" dirty="0"/>
           </a:p>
           <a:p>
-            <a:pPr indent="0" marL="0">
+            <a:pPr marL="0" indent="0">
               <a:buNone/>
             </a:pPr>
             <a:r>
@@ -5653,13 +5285,13 @@
             <a:endParaRPr lang="en-US" sz="1250" dirty="0"/>
           </a:p>
           <a:p>
-            <a:pPr indent="0" marL="0">
+            <a:pPr marL="0" indent="0">
               <a:buNone/>
             </a:pPr>
             <a:endParaRPr lang="en-US" sz="1250" dirty="0"/>
           </a:p>
           <a:p>
-            <a:pPr indent="0" marL="0">
+            <a:pPr marL="0" indent="0">
               <a:buNone/>
             </a:pPr>
             <a:r>
@@ -5676,7 +5308,7 @@
             <a:endParaRPr lang="en-US" sz="1250" dirty="0"/>
           </a:p>
           <a:p>
-            <a:pPr indent="0" marL="0">
+            <a:pPr marL="0" indent="0">
               <a:buNone/>
             </a:pPr>
             <a:r>
@@ -5693,7 +5325,7 @@
             <a:endParaRPr lang="en-US" sz="1250" dirty="0"/>
           </a:p>
           <a:p>
-            <a:pPr indent="0" marL="0">
+            <a:pPr marL="0" indent="0">
               <a:buNone/>
             </a:pPr>
             <a:r>
@@ -5759,7 +5391,7 @@
           <a:bodyPr wrap="square" lIns="0" tIns="0" rIns="0" bIns="0" rtlCol="0" anchor="ctr"/>
           <a:lstStyle/>
           <a:p>
-            <a:pPr indent="0" marL="0">
+            <a:pPr marL="0" indent="0">
               <a:buNone/>
             </a:pPr>
             <a:r>
@@ -5848,7 +5480,7 @@
           <a:bodyPr wrap="square" lIns="0" tIns="0" rIns="0" bIns="0" rtlCol="0" anchor="ctr"/>
           <a:lstStyle/>
           <a:p>
-            <a:pPr indent="0" marL="0">
+            <a:pPr marL="0" indent="0">
               <a:buNone/>
             </a:pPr>
             <a:r>
@@ -5882,6 +5514,7 @@
         <a:solidFill>
           <a:srgbClr val="0C1A2E"/>
         </a:solidFill>
+        <a:effectLst/>
       </p:bgPr>
     </p:bg>
     <p:spTree>
@@ -5994,11 +5627,11 @@
           <a:bodyPr wrap="square" lIns="0" tIns="0" rIns="0" bIns="0" rtlCol="0" anchor="ctr"/>
           <a:lstStyle/>
           <a:p>
-            <a:pPr algn="ctr" indent="0" marL="0">
-              <a:buNone/>
-            </a:pPr>
-            <a:r>
-              <a:rPr lang="en-US" sz="1000" b="1" spc="200" kern="0" dirty="0">
+            <a:pPr marL="0" indent="0" algn="ctr">
+              <a:buNone/>
+            </a:pPr>
+            <a:r>
+              <a:rPr lang="en-US" sz="1000" b="1" kern="0" spc="200" dirty="0">
                 <a:solidFill>
                   <a:srgbClr val="FFFFFF"/>
                 </a:solidFill>
@@ -6033,7 +5666,7 @@
           <a:bodyPr wrap="square" lIns="0" tIns="0" rIns="0" bIns="0" rtlCol="0" anchor="ctr"/>
           <a:lstStyle/>
           <a:p>
-            <a:pPr indent="0" marL="0">
+            <a:pPr marL="0" indent="0">
               <a:buNone/>
             </a:pPr>
             <a:r>
@@ -6072,7 +5705,7 @@
           <a:bodyPr wrap="square" rtlCol="0" anchor="ctr"/>
           <a:lstStyle/>
           <a:p>
-            <a:pPr indent="0" marL="0">
+            <a:pPr marL="0" indent="0">
               <a:buNone/>
             </a:pPr>
             <a:r>
@@ -6138,7 +5771,7 @@
           <a:bodyPr wrap="square" lIns="0" tIns="0" rIns="0" bIns="0" rtlCol="0" anchor="ctr"/>
           <a:lstStyle/>
           <a:p>
-            <a:pPr indent="0" marL="0">
+            <a:pPr marL="0" indent="0">
               <a:buNone/>
             </a:pPr>
             <a:r>
@@ -6152,9 +5785,6 @@
               </a:rPr>
               <a:t>▶ </a:t>
             </a:r>
-            <a:pPr indent="0" marL="0">
-              <a:buNone/>
-            </a:pPr>
             <a:r>
               <a:rPr lang="en-US" sz="1250" b="1" dirty="0">
                 <a:solidFill>
@@ -6191,7 +5821,7 @@
           <a:bodyPr wrap="square" lIns="0" tIns="0" rIns="0" bIns="0" rtlCol="0" anchor="ctr"/>
           <a:lstStyle/>
           <a:p>
-            <a:pPr indent="0" marL="0">
+            <a:pPr marL="0" indent="0">
               <a:buNone/>
             </a:pPr>
             <a:r>
@@ -6205,9 +5835,6 @@
               </a:rPr>
               <a:t>▶ </a:t>
             </a:r>
-            <a:pPr indent="0" marL="0">
-              <a:buNone/>
-            </a:pPr>
             <a:r>
               <a:rPr lang="en-US" sz="1250" dirty="0">
                 <a:solidFill>
@@ -6244,7 +5871,7 @@
           <a:bodyPr wrap="square" lIns="0" tIns="0" rIns="0" bIns="0" rtlCol="0" anchor="ctr"/>
           <a:lstStyle/>
           <a:p>
-            <a:pPr indent="0" marL="0">
+            <a:pPr marL="0" indent="0">
               <a:buNone/>
             </a:pPr>
             <a:r>
@@ -6258,9 +5885,6 @@
               </a:rPr>
               <a:t>▶ </a:t>
             </a:r>
-            <a:pPr indent="0" marL="0">
-              <a:buNone/>
-            </a:pPr>
             <a:r>
               <a:rPr lang="en-US" sz="1250" dirty="0">
                 <a:solidFill>
@@ -6322,7 +5946,7 @@
           <a:bodyPr wrap="square" lIns="0" tIns="0" rIns="0" bIns="0" rtlCol="0" anchor="ctr"/>
           <a:lstStyle/>
           <a:p>
-            <a:pPr indent="0" marL="0">
+            <a:pPr marL="0" indent="0">
               <a:buNone/>
             </a:pPr>
             <a:r>
@@ -6386,7 +6010,7 @@
           <a:bodyPr wrap="square" lIns="0" tIns="0" rIns="0" bIns="0" rtlCol="0" anchor="ctr"/>
           <a:lstStyle/>
           <a:p>
-            <a:pPr indent="0" marL="0">
+            <a:pPr marL="0" indent="0">
               <a:buNone/>
             </a:pPr>
             <a:r>
@@ -6452,7 +6076,7 @@
           <a:bodyPr wrap="square" lIns="0" tIns="0" rIns="0" bIns="0" rtlCol="0" anchor="ctr"/>
           <a:lstStyle/>
           <a:p>
-            <a:pPr indent="0" marL="0">
+            <a:pPr marL="0" indent="0">
               <a:buNone/>
             </a:pPr>
             <a:r>
@@ -6516,7 +6140,7 @@
           <a:bodyPr wrap="square" lIns="0" tIns="0" rIns="0" bIns="0" rtlCol="0" anchor="ctr"/>
           <a:lstStyle/>
           <a:p>
-            <a:pPr indent="0" marL="0">
+            <a:pPr marL="0" indent="0">
               <a:buNone/>
             </a:pPr>
             <a:r>
@@ -6550,6 +6174,7 @@
         <a:solidFill>
           <a:srgbClr val="0C1A2E"/>
         </a:solidFill>
+        <a:effectLst/>
       </p:bgPr>
     </p:bg>
     <p:spTree>
@@ -6662,11 +6287,11 @@
           <a:bodyPr wrap="square" lIns="0" tIns="0" rIns="0" bIns="0" rtlCol="0" anchor="ctr"/>
           <a:lstStyle/>
           <a:p>
-            <a:pPr algn="ctr" indent="0" marL="0">
-              <a:buNone/>
-            </a:pPr>
-            <a:r>
-              <a:rPr lang="en-US" sz="1000" b="1" spc="200" kern="0" dirty="0">
+            <a:pPr marL="0" indent="0" algn="ctr">
+              <a:buNone/>
+            </a:pPr>
+            <a:r>
+              <a:rPr lang="en-US" sz="1000" b="1" kern="0" spc="200" dirty="0">
                 <a:solidFill>
                   <a:srgbClr val="FFFFFF"/>
                 </a:solidFill>
@@ -6701,7 +6326,7 @@
           <a:bodyPr wrap="square" lIns="0" tIns="0" rIns="0" bIns="0" rtlCol="0" anchor="ctr"/>
           <a:lstStyle/>
           <a:p>
-            <a:pPr indent="0" marL="0">
+            <a:pPr marL="0" indent="0">
               <a:buNone/>
             </a:pPr>
             <a:r>
@@ -6740,7 +6365,7 @@
           <a:bodyPr wrap="square" rtlCol="0" anchor="ctr"/>
           <a:lstStyle/>
           <a:p>
-            <a:pPr indent="0" marL="0">
+            <a:pPr marL="0" indent="0">
               <a:buNone/>
             </a:pPr>
             <a:r>
@@ -6806,7 +6431,7 @@
           <a:bodyPr wrap="square" lIns="0" tIns="0" rIns="0" bIns="0" rtlCol="0" anchor="ctr"/>
           <a:lstStyle/>
           <a:p>
-            <a:pPr indent="0" marL="0">
+            <a:pPr marL="0" indent="0">
               <a:buNone/>
             </a:pPr>
             <a:r>
@@ -6820,9 +6445,6 @@
               </a:rPr>
               <a:t>▶ </a:t>
             </a:r>
-            <a:pPr indent="0" marL="0">
-              <a:buNone/>
-            </a:pPr>
             <a:r>
               <a:rPr lang="en-US" sz="1250" b="1" dirty="0">
                 <a:solidFill>
@@ -6859,7 +6481,7 @@
           <a:bodyPr wrap="square" lIns="0" tIns="0" rIns="0" bIns="0" rtlCol="0" anchor="ctr"/>
           <a:lstStyle/>
           <a:p>
-            <a:pPr indent="0" marL="0">
+            <a:pPr marL="0" indent="0">
               <a:buNone/>
             </a:pPr>
             <a:r>
@@ -6873,9 +6495,6 @@
               </a:rPr>
               <a:t>▶ </a:t>
             </a:r>
-            <a:pPr indent="0" marL="0">
-              <a:buNone/>
-            </a:pPr>
             <a:r>
               <a:rPr lang="en-US" sz="1250" dirty="0">
                 <a:solidFill>
@@ -6912,7 +6531,7 @@
           <a:bodyPr wrap="square" lIns="0" tIns="0" rIns="0" bIns="0" rtlCol="0" anchor="ctr"/>
           <a:lstStyle/>
           <a:p>
-            <a:pPr indent="0" marL="0">
+            <a:pPr marL="0" indent="0">
               <a:buNone/>
             </a:pPr>
             <a:r>
@@ -6926,9 +6545,6 @@
               </a:rPr>
               <a:t>▶ </a:t>
             </a:r>
-            <a:pPr indent="0" marL="0">
-              <a:buNone/>
-            </a:pPr>
             <a:r>
               <a:rPr lang="en-US" sz="1250" dirty="0">
                 <a:solidFill>
@@ -6990,7 +6606,7 @@
           <a:bodyPr wrap="square" lIns="0" tIns="0" rIns="0" bIns="0" rtlCol="0" anchor="ctr"/>
           <a:lstStyle/>
           <a:p>
-            <a:pPr indent="0" marL="0">
+            <a:pPr marL="0" indent="0">
               <a:buNone/>
             </a:pPr>
             <a:r>
@@ -7054,7 +6670,7 @@
           <a:bodyPr wrap="square" lIns="0" tIns="0" rIns="0" bIns="0" rtlCol="0" anchor="ctr"/>
           <a:lstStyle/>
           <a:p>
-            <a:pPr indent="0" marL="0">
+            <a:pPr marL="0" indent="0">
               <a:buNone/>
             </a:pPr>
             <a:r>
@@ -7120,7 +6736,7 @@
           <a:bodyPr wrap="square" lIns="0" tIns="0" rIns="0" bIns="0" rtlCol="0" anchor="ctr"/>
           <a:lstStyle/>
           <a:p>
-            <a:pPr indent="0" marL="0">
+            <a:pPr marL="0" indent="0">
               <a:buNone/>
             </a:pPr>
             <a:r>
@@ -7184,7 +6800,7 @@
           <a:bodyPr wrap="square" lIns="0" tIns="0" rIns="0" bIns="0" rtlCol="0" anchor="ctr"/>
           <a:lstStyle/>
           <a:p>
-            <a:pPr indent="0" marL="0">
+            <a:pPr marL="0" indent="0">
               <a:buNone/>
             </a:pPr>
             <a:r>
@@ -7218,6 +6834,7 @@
         <a:solidFill>
           <a:srgbClr val="0C1A2E"/>
         </a:solidFill>
+        <a:effectLst/>
       </p:bgPr>
     </p:bg>
     <p:spTree>
@@ -7330,11 +6947,11 @@
           <a:bodyPr wrap="square" lIns="0" tIns="0" rIns="0" bIns="0" rtlCol="0" anchor="ctr"/>
           <a:lstStyle/>
           <a:p>
-            <a:pPr algn="ctr" indent="0" marL="0">
-              <a:buNone/>
-            </a:pPr>
-            <a:r>
-              <a:rPr lang="en-US" sz="1000" b="1" spc="200" kern="0" dirty="0">
+            <a:pPr marL="0" indent="0" algn="ctr">
+              <a:buNone/>
+            </a:pPr>
+            <a:r>
+              <a:rPr lang="en-US" sz="1000" b="1" kern="0" spc="200" dirty="0">
                 <a:solidFill>
                   <a:srgbClr val="FFFFFF"/>
                 </a:solidFill>
@@ -7369,7 +6986,7 @@
           <a:bodyPr wrap="square" lIns="0" tIns="0" rIns="0" bIns="0" rtlCol="0" anchor="ctr"/>
           <a:lstStyle/>
           <a:p>
-            <a:pPr indent="0" marL="0">
+            <a:pPr marL="0" indent="0">
               <a:buNone/>
             </a:pPr>
             <a:r>
@@ -7408,7 +7025,7 @@
           <a:bodyPr wrap="square" rtlCol="0" anchor="ctr"/>
           <a:lstStyle/>
           <a:p>
-            <a:pPr indent="0" marL="0">
+            <a:pPr marL="0" indent="0">
               <a:buNone/>
             </a:pPr>
             <a:r>
@@ -7474,7 +7091,7 @@
           <a:bodyPr wrap="square" lIns="0" tIns="0" rIns="0" bIns="0" rtlCol="0" anchor="ctr"/>
           <a:lstStyle/>
           <a:p>
-            <a:pPr indent="0" marL="0">
+            <a:pPr marL="0" indent="0">
               <a:buNone/>
             </a:pPr>
             <a:r>
@@ -7488,9 +7105,6 @@
               </a:rPr>
               <a:t>▶ </a:t>
             </a:r>
-            <a:pPr indent="0" marL="0">
-              <a:buNone/>
-            </a:pPr>
             <a:r>
               <a:rPr lang="en-US" sz="1250" b="1" dirty="0">
                 <a:solidFill>
@@ -7527,7 +7141,7 @@
           <a:bodyPr wrap="square" lIns="0" tIns="0" rIns="0" bIns="0" rtlCol="0" anchor="ctr"/>
           <a:lstStyle/>
           <a:p>
-            <a:pPr indent="0" marL="0">
+            <a:pPr marL="0" indent="0">
               <a:buNone/>
             </a:pPr>
             <a:r>
@@ -7541,9 +7155,6 @@
               </a:rPr>
               <a:t>▶ </a:t>
             </a:r>
-            <a:pPr indent="0" marL="0">
-              <a:buNone/>
-            </a:pPr>
             <a:r>
               <a:rPr lang="en-US" sz="1250" dirty="0">
                 <a:solidFill>
@@ -7605,7 +7216,7 @@
           <a:bodyPr wrap="square" lIns="0" tIns="0" rIns="0" bIns="0" rtlCol="0" anchor="ctr"/>
           <a:lstStyle/>
           <a:p>
-            <a:pPr indent="0" marL="0">
+            <a:pPr marL="0" indent="0">
               <a:buNone/>
             </a:pPr>
             <a:r>
@@ -7669,7 +7280,7 @@
           <a:bodyPr wrap="square" lIns="0" tIns="0" rIns="0" bIns="0" rtlCol="0" anchor="ctr"/>
           <a:lstStyle/>
           <a:p>
-            <a:pPr indent="0" marL="0">
+            <a:pPr marL="0" indent="0">
               <a:buNone/>
             </a:pPr>
             <a:r>
@@ -7735,7 +7346,7 @@
           <a:bodyPr wrap="square" lIns="0" tIns="0" rIns="0" bIns="0" rtlCol="0" anchor="ctr"/>
           <a:lstStyle/>
           <a:p>
-            <a:pPr indent="0" marL="0">
+            <a:pPr marL="0" indent="0">
               <a:buNone/>
             </a:pPr>
             <a:r>
@@ -7799,7 +7410,7 @@
           <a:bodyPr wrap="square" lIns="0" tIns="0" rIns="0" bIns="0" rtlCol="0" anchor="ctr"/>
           <a:lstStyle/>
           <a:p>
-            <a:pPr indent="0" marL="0">
+            <a:pPr marL="0" indent="0">
               <a:buNone/>
             </a:pPr>
             <a:r>
@@ -7833,6 +7444,7 @@
         <a:solidFill>
           <a:srgbClr val="0C1A2E"/>
         </a:solidFill>
+        <a:effectLst/>
       </p:bgPr>
     </p:bg>
     <p:spTree>
@@ -7945,11 +7557,11 @@
           <a:bodyPr wrap="square" lIns="0" tIns="0" rIns="0" bIns="0" rtlCol="0" anchor="ctr"/>
           <a:lstStyle/>
           <a:p>
-            <a:pPr algn="ctr" indent="0" marL="0">
-              <a:buNone/>
-            </a:pPr>
-            <a:r>
-              <a:rPr lang="en-US" sz="1000" b="1" spc="200" kern="0" dirty="0">
+            <a:pPr marL="0" indent="0" algn="ctr">
+              <a:buNone/>
+            </a:pPr>
+            <a:r>
+              <a:rPr lang="en-US" sz="1000" b="1" kern="0" spc="200" dirty="0">
                 <a:solidFill>
                   <a:srgbClr val="FFFFFF"/>
                 </a:solidFill>
@@ -7984,7 +7596,7 @@
           <a:bodyPr wrap="square" lIns="0" tIns="0" rIns="0" bIns="0" rtlCol="0" anchor="ctr"/>
           <a:lstStyle/>
           <a:p>
-            <a:pPr indent="0" marL="0">
+            <a:pPr marL="0" indent="0">
               <a:buNone/>
             </a:pPr>
             <a:r>
@@ -8023,7 +7635,7 @@
           <a:bodyPr wrap="square" rtlCol="0" anchor="ctr"/>
           <a:lstStyle/>
           <a:p>
-            <a:pPr indent="0" marL="0">
+            <a:pPr marL="0" indent="0">
               <a:buNone/>
             </a:pPr>
             <a:r>
@@ -8089,7 +7701,7 @@
           <a:bodyPr wrap="square" lIns="0" tIns="0" rIns="0" bIns="0" rtlCol="0" anchor="ctr"/>
           <a:lstStyle/>
           <a:p>
-            <a:pPr indent="0" marL="0">
+            <a:pPr marL="0" indent="0">
               <a:buNone/>
             </a:pPr>
             <a:r>
@@ -8103,9 +7715,6 @@
               </a:rPr>
               <a:t>▶ </a:t>
             </a:r>
-            <a:pPr indent="0" marL="0">
-              <a:buNone/>
-            </a:pPr>
             <a:r>
               <a:rPr lang="en-US" sz="1250" b="1" dirty="0">
                 <a:solidFill>
@@ -8142,7 +7751,7 @@
           <a:bodyPr wrap="square" lIns="0" tIns="0" rIns="0" bIns="0" rtlCol="0" anchor="ctr"/>
           <a:lstStyle/>
           <a:p>
-            <a:pPr indent="0" marL="0">
+            <a:pPr marL="0" indent="0">
               <a:buNone/>
             </a:pPr>
             <a:r>
@@ -8156,9 +7765,6 @@
               </a:rPr>
               <a:t>▶ </a:t>
             </a:r>
-            <a:pPr indent="0" marL="0">
-              <a:buNone/>
-            </a:pPr>
             <a:r>
               <a:rPr lang="en-US" sz="1250" dirty="0">
                 <a:solidFill>
@@ -8220,7 +7826,7 @@
           <a:bodyPr wrap="square" lIns="0" tIns="0" rIns="0" bIns="0" rtlCol="0" anchor="ctr"/>
           <a:lstStyle/>
           <a:p>
-            <a:pPr indent="0" marL="0">
+            <a:pPr marL="0" indent="0">
               <a:buNone/>
             </a:pPr>
             <a:r>
@@ -8284,7 +7890,7 @@
           <a:bodyPr wrap="square" lIns="0" tIns="0" rIns="0" bIns="0" rtlCol="0" anchor="ctr"/>
           <a:lstStyle/>
           <a:p>
-            <a:pPr indent="0" marL="0">
+            <a:pPr marL="0" indent="0">
               <a:buNone/>
             </a:pPr>
             <a:r>
@@ -8350,7 +7956,7 @@
           <a:bodyPr wrap="square" lIns="0" tIns="0" rIns="0" bIns="0" rtlCol="0" anchor="ctr"/>
           <a:lstStyle/>
           <a:p>
-            <a:pPr indent="0" marL="0">
+            <a:pPr marL="0" indent="0">
               <a:buNone/>
             </a:pPr>
             <a:r>
@@ -8414,7 +8020,7 @@
           <a:bodyPr wrap="square" lIns="0" tIns="0" rIns="0" bIns="0" rtlCol="0" anchor="ctr"/>
           <a:lstStyle/>
           <a:p>
-            <a:pPr indent="0" marL="0">
+            <a:pPr marL="0" indent="0">
               <a:buNone/>
             </a:pPr>
             <a:r>
@@ -8448,6 +8054,7 @@
         <a:solidFill>
           <a:srgbClr val="0D2218"/>
         </a:solidFill>
+        <a:effectLst/>
       </p:bgPr>
     </p:bg>
     <p:spTree>
@@ -8537,7 +8144,7 @@
           <a:bodyPr wrap="square" rtlCol="0" anchor="ctr"/>
           <a:lstStyle/>
           <a:p>
-            <a:pPr indent="0" marL="0">
+            <a:pPr marL="0" indent="0">
               <a:buNone/>
             </a:pPr>
             <a:r>
@@ -8576,11 +8183,11 @@
           <a:bodyPr wrap="square" rtlCol="0" anchor="ctr"/>
           <a:lstStyle/>
           <a:p>
-            <a:pPr indent="0" marL="0">
-              <a:buNone/>
-            </a:pPr>
-            <a:r>
-              <a:rPr lang="en-US" sz="1100" b="1" spc="400" kern="0" dirty="0">
+            <a:pPr marL="0" indent="0">
+              <a:buNone/>
+            </a:pPr>
+            <a:r>
+              <a:rPr lang="en-US" sz="1100" b="1" kern="0" spc="400" dirty="0">
                 <a:solidFill>
                   <a:srgbClr val="86EFAC"/>
                 </a:solidFill>
@@ -8615,7 +8222,7 @@
           <a:bodyPr wrap="square" rtlCol="0" anchor="ctr"/>
           <a:lstStyle/>
           <a:p>
-            <a:pPr indent="0" marL="0">
+            <a:pPr marL="0" indent="0">
               <a:buNone/>
             </a:pPr>
             <a:r>
@@ -8654,7 +8261,7 @@
           <a:bodyPr wrap="square" rtlCol="0" anchor="ctr"/>
           <a:lstStyle/>
           <a:p>
-            <a:pPr indent="0" marL="0">
+            <a:pPr marL="0" indent="0">
               <a:buNone/>
             </a:pPr>
             <a:r>
@@ -8693,7 +8300,7 @@
           <a:bodyPr wrap="square" rtlCol="0" anchor="ctr"/>
           <a:lstStyle/>
           <a:p>
-            <a:pPr indent="0" marL="0">
+            <a:pPr marL="0" indent="0">
               <a:buNone/>
             </a:pPr>
             <a:r>
@@ -8727,6 +8334,7 @@
         <a:solidFill>
           <a:srgbClr val="F0FDF4"/>
         </a:solidFill>
+        <a:effectLst/>
       </p:bgPr>
     </p:bg>
     <p:spTree>
@@ -8814,7 +8422,7 @@
           <a:bodyPr wrap="square" lIns="0" tIns="0" rIns="0" bIns="0" rtlCol="0" anchor="ctr"/>
           <a:lstStyle/>
           <a:p>
-            <a:pPr indent="0" marL="0">
+            <a:pPr marL="0" indent="0">
               <a:buNone/>
             </a:pPr>
             <a:r>
@@ -8853,7 +8461,7 @@
           <a:bodyPr wrap="square" lIns="0" tIns="0" rIns="0" bIns="0" rtlCol="0" anchor="ctr"/>
           <a:lstStyle/>
           <a:p>
-            <a:pPr indent="0" marL="0">
+            <a:pPr marL="0" indent="0">
               <a:buNone/>
             </a:pPr>
             <a:r>
@@ -8867,9 +8475,6 @@
               </a:rPr>
               <a:t>◈ </a:t>
             </a:r>
-            <a:pPr indent="0" marL="0">
-              <a:buNone/>
-            </a:pPr>
             <a:r>
               <a:rPr lang="en-US" sz="1300" b="1" dirty="0">
                 <a:solidFill>
@@ -8906,7 +8511,7 @@
           <a:bodyPr wrap="square" lIns="0" tIns="0" rIns="0" bIns="0" rtlCol="0" anchor="ctr"/>
           <a:lstStyle/>
           <a:p>
-            <a:pPr indent="0" marL="0">
+            <a:pPr marL="0" indent="0">
               <a:buNone/>
             </a:pPr>
             <a:r>
@@ -8920,9 +8525,6 @@
               </a:rPr>
               <a:t>◈ </a:t>
             </a:r>
-            <a:pPr indent="0" marL="0">
-              <a:buNone/>
-            </a:pPr>
             <a:r>
               <a:rPr lang="en-US" sz="1300" dirty="0">
                 <a:solidFill>
@@ -8959,7 +8561,7 @@
           <a:bodyPr wrap="square" lIns="0" tIns="0" rIns="0" bIns="0" rtlCol="0" anchor="ctr"/>
           <a:lstStyle/>
           <a:p>
-            <a:pPr indent="0" marL="0">
+            <a:pPr marL="0" indent="0">
               <a:buNone/>
             </a:pPr>
             <a:r>
@@ -8973,9 +8575,6 @@
               </a:rPr>
               <a:t>◈ </a:t>
             </a:r>
-            <a:pPr indent="0" marL="0">
-              <a:buNone/>
-            </a:pPr>
             <a:r>
               <a:rPr lang="en-US" sz="1300" b="1" dirty="0">
                 <a:solidFill>
@@ -9012,7 +8611,7 @@
           <a:bodyPr wrap="square" lIns="0" tIns="0" rIns="0" bIns="0" rtlCol="0" anchor="ctr"/>
           <a:lstStyle/>
           <a:p>
-            <a:pPr indent="0" marL="0">
+            <a:pPr marL="0" indent="0">
               <a:buNone/>
             </a:pPr>
             <a:r>
@@ -9026,9 +8625,6 @@
               </a:rPr>
               <a:t>◈ </a:t>
             </a:r>
-            <a:pPr indent="0" marL="0">
-              <a:buNone/>
-            </a:pPr>
             <a:r>
               <a:rPr lang="en-US" sz="1300" dirty="0">
                 <a:solidFill>
@@ -9065,7 +8661,7 @@
           <a:bodyPr wrap="square" lIns="0" tIns="0" rIns="0" bIns="0" rtlCol="0" anchor="ctr"/>
           <a:lstStyle/>
           <a:p>
-            <a:pPr indent="0" marL="0">
+            <a:pPr marL="0" indent="0">
               <a:buNone/>
             </a:pPr>
             <a:r>
@@ -9079,9 +8675,6 @@
               </a:rPr>
               <a:t>◈ </a:t>
             </a:r>
-            <a:pPr indent="0" marL="0">
-              <a:buNone/>
-            </a:pPr>
             <a:r>
               <a:rPr lang="en-US" sz="1300" dirty="0">
                 <a:solidFill>
@@ -9118,7 +8711,7 @@
           <a:bodyPr wrap="square" lIns="0" tIns="0" rIns="0" bIns="0" rtlCol="0" anchor="ctr"/>
           <a:lstStyle/>
           <a:p>
-            <a:pPr indent="0" marL="0">
+            <a:pPr marL="0" indent="0">
               <a:buNone/>
             </a:pPr>
             <a:r>
@@ -9132,9 +8725,6 @@
               </a:rPr>
               <a:t>◈ </a:t>
             </a:r>
-            <a:pPr indent="0" marL="0">
-              <a:buNone/>
-            </a:pPr>
             <a:r>
               <a:rPr lang="en-US" sz="1300" dirty="0">
                 <a:solidFill>
@@ -9198,7 +8788,7 @@
           <a:bodyPr wrap="square" lIns="0" tIns="0" rIns="0" bIns="0" rtlCol="0" anchor="ctr"/>
           <a:lstStyle/>
           <a:p>
-            <a:pPr indent="0" marL="0">
+            <a:pPr marL="0" indent="0">
               <a:buNone/>
             </a:pPr>
             <a:r>
@@ -9287,7 +8877,7 @@
           <a:bodyPr wrap="square" lIns="0" tIns="0" rIns="0" bIns="0" rtlCol="0" anchor="ctr"/>
           <a:lstStyle/>
           <a:p>
-            <a:pPr indent="0" marL="0">
+            <a:pPr marL="0" indent="0">
               <a:buNone/>
             </a:pPr>
             <a:r>
@@ -9321,6 +8911,7 @@
         <a:solidFill>
           <a:srgbClr val="F0FDF4"/>
         </a:solidFill>
+        <a:effectLst/>
       </p:bgPr>
     </p:bg>
     <p:spTree>
@@ -9408,7 +8999,7 @@
           <a:bodyPr wrap="square" lIns="0" tIns="0" rIns="0" bIns="0" rtlCol="0" anchor="ctr"/>
           <a:lstStyle/>
           <a:p>
-            <a:pPr indent="0" marL="0">
+            <a:pPr marL="0" indent="0">
               <a:buNone/>
             </a:pPr>
             <a:r>
@@ -9447,7 +9038,7 @@
           <a:bodyPr wrap="square" lIns="0" tIns="0" rIns="0" bIns="0" rtlCol="0" anchor="ctr"/>
           <a:lstStyle/>
           <a:p>
-            <a:pPr indent="0" marL="0">
+            <a:pPr marL="0" indent="0">
               <a:buNone/>
             </a:pPr>
             <a:r>
@@ -9489,7 +9080,7 @@
             <a:prstDash val="solid"/>
           </a:ln>
           <a:effectLst>
-            <a:outerShdw sx="100000" sy="100000" kx="0" ky="0" algn="bl" rotWithShape="0" blurRad="76200" dist="25400" dir="8100000">
+            <a:outerShdw blurRad="76200" dist="25400" dir="8100000" algn="bl" rotWithShape="0">
               <a:srgbClr val="000000">
                 <a:alpha val="18000"/>
               </a:srgbClr>
@@ -9530,7 +9121,7 @@
         </p:nvSpPr>
         <p:spPr>
           <a:xfrm>
-            <a:off x="457200" y="1444752"/>
+            <a:off x="530352" y="1364375"/>
             <a:ext cx="8412480" cy="2523744"/>
           </a:xfrm>
           <a:prstGeom prst="rect">
@@ -9543,7 +9134,7 @@
           <a:bodyPr wrap="square" lIns="0" tIns="0" rIns="0" bIns="0" rtlCol="0" anchor="t"/>
           <a:lstStyle/>
           <a:p>
-            <a:pPr indent="0" marL="0">
+            <a:pPr marL="0" indent="0">
               <a:buNone/>
             </a:pPr>
             <a:r>
@@ -9560,7 +9151,7 @@
             <a:endParaRPr lang="en-US" sz="1250" dirty="0"/>
           </a:p>
           <a:p>
-            <a:pPr indent="0" marL="0">
+            <a:pPr marL="0" indent="0">
               <a:buNone/>
             </a:pPr>
             <a:r>
@@ -9577,7 +9168,7 @@
             <a:endParaRPr lang="en-US" sz="1250" dirty="0"/>
           </a:p>
           <a:p>
-            <a:pPr indent="0" marL="0">
+            <a:pPr marL="0" indent="0">
               <a:buNone/>
             </a:pPr>
             <a:r>
@@ -9594,7 +9185,7 @@
             <a:endParaRPr lang="en-US" sz="1250" dirty="0"/>
           </a:p>
           <a:p>
-            <a:pPr indent="0" marL="0">
+            <a:pPr marL="0" indent="0">
               <a:buNone/>
             </a:pPr>
             <a:r>
@@ -9611,7 +9202,7 @@
             <a:endParaRPr lang="en-US" sz="1250" dirty="0"/>
           </a:p>
           <a:p>
-            <a:pPr indent="0" marL="0">
+            <a:pPr marL="0" indent="0">
               <a:buNone/>
             </a:pPr>
             <a:r>
@@ -9628,7 +9219,7 @@
             <a:endParaRPr lang="en-US" sz="1250" dirty="0"/>
           </a:p>
           <a:p>
-            <a:pPr indent="0" marL="0">
+            <a:pPr marL="0" indent="0">
               <a:buNone/>
             </a:pPr>
             <a:r>
@@ -9645,13 +9236,13 @@
             <a:endParaRPr lang="en-US" sz="1250" dirty="0"/>
           </a:p>
           <a:p>
-            <a:pPr indent="0" marL="0">
+            <a:pPr marL="0" indent="0">
               <a:buNone/>
             </a:pPr>
             <a:endParaRPr lang="en-US" sz="1250" dirty="0"/>
           </a:p>
           <a:p>
-            <a:pPr indent="0" marL="0">
+            <a:pPr marL="0" indent="0">
               <a:buNone/>
             </a:pPr>
             <a:r>
@@ -9668,7 +9259,7 @@
             <a:endParaRPr lang="en-US" sz="1250" dirty="0"/>
           </a:p>
           <a:p>
-            <a:pPr indent="0" marL="0">
+            <a:pPr marL="0" indent="0">
               <a:buNone/>
             </a:pPr>
             <a:r>
@@ -9685,7 +9276,7 @@
             <a:endParaRPr lang="en-US" sz="1250" dirty="0"/>
           </a:p>
           <a:p>
-            <a:pPr indent="0" marL="0">
+            <a:pPr marL="0" indent="0">
               <a:buNone/>
             </a:pPr>
             <a:r>
@@ -9702,7 +9293,7 @@
             <a:endParaRPr lang="en-US" sz="1250" dirty="0"/>
           </a:p>
           <a:p>
-            <a:pPr indent="0" marL="0">
+            <a:pPr marL="0" indent="0">
               <a:buNone/>
             </a:pPr>
             <a:r>
@@ -9719,7 +9310,7 @@
             <a:endParaRPr lang="en-US" sz="1250" dirty="0"/>
           </a:p>
           <a:p>
-            <a:pPr indent="0" marL="0">
+            <a:pPr marL="0" indent="0">
               <a:buNone/>
             </a:pPr>
             <a:r>
@@ -9736,7 +9327,7 @@
             <a:endParaRPr lang="en-US" sz="1250" dirty="0"/>
           </a:p>
           <a:p>
-            <a:pPr indent="0" marL="0">
+            <a:pPr marL="0" indent="0">
               <a:buNone/>
             </a:pPr>
             <a:r>
@@ -9753,7 +9344,7 @@
             <a:endParaRPr lang="en-US" sz="1250" dirty="0"/>
           </a:p>
           <a:p>
-            <a:pPr indent="0" marL="0">
+            <a:pPr marL="0" indent="0">
               <a:buNone/>
             </a:pPr>
             <a:r>
@@ -9819,7 +9410,7 @@
           <a:bodyPr wrap="square" lIns="0" tIns="0" rIns="0" bIns="0" rtlCol="0" anchor="ctr"/>
           <a:lstStyle/>
           <a:p>
-            <a:pPr indent="0" marL="0">
+            <a:pPr marL="0" indent="0">
               <a:buNone/>
             </a:pPr>
             <a:r>
@@ -9908,7 +9499,7 @@
           <a:bodyPr wrap="square" lIns="0" tIns="0" rIns="0" bIns="0" rtlCol="0" anchor="ctr"/>
           <a:lstStyle/>
           <a:p>
-            <a:pPr indent="0" marL="0">
+            <a:pPr marL="0" indent="0">
               <a:buNone/>
             </a:pPr>
             <a:r>
@@ -9942,6 +9533,7 @@
         <a:solidFill>
           <a:srgbClr val="F0FDF4"/>
         </a:solidFill>
+        <a:effectLst/>
       </p:bgPr>
     </p:bg>
     <p:spTree>
@@ -10029,7 +9621,7 @@
           <a:bodyPr wrap="square" lIns="0" tIns="0" rIns="0" bIns="0" rtlCol="0" anchor="ctr"/>
           <a:lstStyle/>
           <a:p>
-            <a:pPr indent="0" marL="0">
+            <a:pPr marL="0" indent="0">
               <a:buNone/>
             </a:pPr>
             <a:r>
@@ -10068,7 +9660,7 @@
           <a:bodyPr wrap="square" lIns="0" tIns="0" rIns="0" bIns="0" rtlCol="0" anchor="ctr"/>
           <a:lstStyle/>
           <a:p>
-            <a:pPr indent="0" marL="0">
+            <a:pPr marL="0" indent="0">
               <a:buNone/>
             </a:pPr>
             <a:r>
@@ -10082,9 +9674,6 @@
               </a:rPr>
               <a:t>◈ </a:t>
             </a:r>
-            <a:pPr indent="0" marL="0">
-              <a:buNone/>
-            </a:pPr>
             <a:r>
               <a:rPr lang="en-US" sz="1300" b="1" dirty="0">
                 <a:solidFill>
@@ -10121,7 +9710,7 @@
           <a:bodyPr wrap="square" lIns="0" tIns="0" rIns="0" bIns="0" rtlCol="0" anchor="ctr"/>
           <a:lstStyle/>
           <a:p>
-            <a:pPr indent="0" marL="0">
+            <a:pPr marL="0" indent="0">
               <a:buNone/>
             </a:pPr>
             <a:r>
@@ -10135,9 +9724,6 @@
               </a:rPr>
               <a:t>◈ </a:t>
             </a:r>
-            <a:pPr indent="0" marL="0">
-              <a:buNone/>
-            </a:pPr>
             <a:r>
               <a:rPr lang="en-US" sz="1300" b="1" dirty="0">
                 <a:solidFill>
@@ -10174,7 +9760,7 @@
           <a:bodyPr wrap="square" lIns="0" tIns="0" rIns="0" bIns="0" rtlCol="0" anchor="ctr"/>
           <a:lstStyle/>
           <a:p>
-            <a:pPr indent="0" marL="0">
+            <a:pPr marL="0" indent="0">
               <a:buNone/>
             </a:pPr>
             <a:r>
@@ -10188,9 +9774,6 @@
               </a:rPr>
               <a:t>◈ </a:t>
             </a:r>
-            <a:pPr indent="0" marL="0">
-              <a:buNone/>
-            </a:pPr>
             <a:r>
               <a:rPr lang="en-US" sz="1300" b="1" dirty="0">
                 <a:solidFill>
@@ -10252,7 +9835,7 @@
           <a:bodyPr wrap="square" lIns="0" tIns="0" rIns="0" bIns="0" rtlCol="0" anchor="ctr"/>
           <a:lstStyle/>
           <a:p>
-            <a:pPr indent="0" marL="0">
+            <a:pPr marL="0" indent="0">
               <a:buNone/>
             </a:pPr>
             <a:r>
@@ -10316,7 +9899,7 @@
           <a:bodyPr wrap="square" lIns="0" tIns="0" rIns="0" bIns="0" rtlCol="0" anchor="ctr"/>
           <a:lstStyle/>
           <a:p>
-            <a:pPr indent="0" marL="0">
+            <a:pPr marL="0" indent="0">
               <a:buNone/>
             </a:pPr>
             <a:r>
@@ -10380,7 +9963,7 @@
           <a:bodyPr wrap="square" lIns="0" tIns="0" rIns="0" bIns="0" rtlCol="0" anchor="ctr"/>
           <a:lstStyle/>
           <a:p>
-            <a:pPr indent="0" marL="0">
+            <a:pPr marL="0" indent="0">
               <a:buNone/>
             </a:pPr>
             <a:r>
@@ -10444,7 +10027,7 @@
           <a:bodyPr wrap="square" lIns="0" tIns="0" rIns="0" bIns="0" rtlCol="0" anchor="ctr"/>
           <a:lstStyle/>
           <a:p>
-            <a:pPr indent="0" marL="0">
+            <a:pPr marL="0" indent="0">
               <a:buNone/>
             </a:pPr>
             <a:r>
@@ -10510,7 +10093,7 @@
           <a:bodyPr wrap="square" lIns="0" tIns="0" rIns="0" bIns="0" rtlCol="0" anchor="ctr"/>
           <a:lstStyle/>
           <a:p>
-            <a:pPr indent="0" marL="0">
+            <a:pPr marL="0" indent="0">
               <a:buNone/>
             </a:pPr>
             <a:r>
@@ -10599,7 +10182,7 @@
           <a:bodyPr wrap="square" lIns="0" tIns="0" rIns="0" bIns="0" rtlCol="0" anchor="ctr"/>
           <a:lstStyle/>
           <a:p>
-            <a:pPr indent="0" marL="0">
+            <a:pPr marL="0" indent="0">
               <a:buNone/>
             </a:pPr>
             <a:r>
@@ -10633,6 +10216,7 @@
         <a:solidFill>
           <a:srgbClr val="0C1A2E"/>
         </a:solidFill>
+        <a:effectLst/>
       </p:bgPr>
     </p:bg>
     <p:spTree>
@@ -10745,11 +10329,11 @@
           <a:bodyPr wrap="square" lIns="0" tIns="0" rIns="0" bIns="0" rtlCol="0" anchor="ctr"/>
           <a:lstStyle/>
           <a:p>
-            <a:pPr algn="ctr" indent="0" marL="0">
-              <a:buNone/>
-            </a:pPr>
-            <a:r>
-              <a:rPr lang="en-US" sz="1000" b="1" spc="200" kern="0" dirty="0">
+            <a:pPr marL="0" indent="0" algn="ctr">
+              <a:buNone/>
+            </a:pPr>
+            <a:r>
+              <a:rPr lang="en-US" sz="1000" b="1" kern="0" spc="200" dirty="0">
                 <a:solidFill>
                   <a:srgbClr val="FFFFFF"/>
                 </a:solidFill>
@@ -10784,7 +10368,7 @@
           <a:bodyPr wrap="square" lIns="0" tIns="0" rIns="0" bIns="0" rtlCol="0" anchor="ctr"/>
           <a:lstStyle/>
           <a:p>
-            <a:pPr indent="0" marL="0">
+            <a:pPr marL="0" indent="0">
               <a:buNone/>
             </a:pPr>
             <a:r>
@@ -10823,7 +10407,7 @@
           <a:bodyPr wrap="square" rtlCol="0" anchor="ctr"/>
           <a:lstStyle/>
           <a:p>
-            <a:pPr indent="0" marL="0">
+            <a:pPr marL="0" indent="0">
               <a:buNone/>
             </a:pPr>
             <a:r>
@@ -10889,7 +10473,7 @@
           <a:bodyPr wrap="square" lIns="0" tIns="0" rIns="0" bIns="0" rtlCol="0" anchor="ctr"/>
           <a:lstStyle/>
           <a:p>
-            <a:pPr indent="0" marL="0">
+            <a:pPr marL="0" indent="0">
               <a:buNone/>
             </a:pPr>
             <a:r>
@@ -10903,9 +10487,6 @@
               </a:rPr>
               <a:t>▶ </a:t>
             </a:r>
-            <a:pPr indent="0" marL="0">
-              <a:buNone/>
-            </a:pPr>
             <a:r>
               <a:rPr lang="en-US" sz="1250" b="1" dirty="0">
                 <a:solidFill>
@@ -10967,7 +10548,7 @@
           <a:bodyPr wrap="square" lIns="0" tIns="0" rIns="0" bIns="0" rtlCol="0" anchor="ctr"/>
           <a:lstStyle/>
           <a:p>
-            <a:pPr indent="0" marL="0">
+            <a:pPr marL="0" indent="0">
               <a:buNone/>
             </a:pPr>
             <a:r>
@@ -11031,7 +10612,7 @@
           <a:bodyPr wrap="square" lIns="0" tIns="0" rIns="0" bIns="0" rtlCol="0" anchor="ctr"/>
           <a:lstStyle/>
           <a:p>
-            <a:pPr indent="0" marL="0">
+            <a:pPr marL="0" indent="0">
               <a:buNone/>
             </a:pPr>
             <a:r>
@@ -11097,7 +10678,7 @@
           <a:bodyPr wrap="square" lIns="0" tIns="0" rIns="0" bIns="0" rtlCol="0" anchor="ctr"/>
           <a:lstStyle/>
           <a:p>
-            <a:pPr indent="0" marL="0">
+            <a:pPr marL="0" indent="0">
               <a:buNone/>
             </a:pPr>
             <a:r>
@@ -11161,7 +10742,7 @@
           <a:bodyPr wrap="square" lIns="0" tIns="0" rIns="0" bIns="0" rtlCol="0" anchor="ctr"/>
           <a:lstStyle/>
           <a:p>
-            <a:pPr indent="0" marL="0">
+            <a:pPr marL="0" indent="0">
               <a:buNone/>
             </a:pPr>
             <a:r>
@@ -11195,6 +10776,7 @@
         <a:solidFill>
           <a:srgbClr val="F0FDF4"/>
         </a:solidFill>
+        <a:effectLst/>
       </p:bgPr>
     </p:bg>
     <p:spTree>
@@ -11282,7 +10864,7 @@
           <a:bodyPr wrap="square" lIns="0" tIns="0" rIns="0" bIns="0" rtlCol="0" anchor="ctr"/>
           <a:lstStyle/>
           <a:p>
-            <a:pPr indent="0" marL="0">
+            <a:pPr marL="0" indent="0">
               <a:buNone/>
             </a:pPr>
             <a:r>
@@ -11346,7 +10928,7 @@
           <a:bodyPr wrap="square" lIns="0" tIns="0" rIns="0" bIns="0" rtlCol="0" anchor="ctr"/>
           <a:lstStyle/>
           <a:p>
-            <a:pPr algn="ctr" indent="0" marL="0">
+            <a:pPr marL="0" indent="0" algn="ctr">
               <a:buNone/>
             </a:pPr>
             <a:r>
@@ -11385,7 +10967,7 @@
           <a:bodyPr wrap="square" lIns="0" tIns="0" rIns="0" bIns="0" rtlCol="0" anchor="ctr"/>
           <a:lstStyle/>
           <a:p>
-            <a:pPr indent="0" marL="0">
+            <a:pPr marL="0" indent="0">
               <a:buNone/>
             </a:pPr>
             <a:r>
@@ -11424,7 +11006,7 @@
           <a:bodyPr wrap="square" lIns="0" tIns="0" rIns="0" bIns="0" rtlCol="0" anchor="ctr"/>
           <a:lstStyle/>
           <a:p>
-            <a:pPr indent="0" marL="0">
+            <a:pPr marL="0" indent="0">
               <a:buNone/>
             </a:pPr>
             <a:r>
@@ -11488,7 +11070,7 @@
           <a:bodyPr wrap="square" lIns="0" tIns="0" rIns="0" bIns="0" rtlCol="0" anchor="ctr"/>
           <a:lstStyle/>
           <a:p>
-            <a:pPr algn="ctr" indent="0" marL="0">
+            <a:pPr marL="0" indent="0" algn="ctr">
               <a:buNone/>
             </a:pPr>
             <a:r>
@@ -11527,7 +11109,7 @@
           <a:bodyPr wrap="square" lIns="0" tIns="0" rIns="0" bIns="0" rtlCol="0" anchor="ctr"/>
           <a:lstStyle/>
           <a:p>
-            <a:pPr indent="0" marL="0">
+            <a:pPr marL="0" indent="0">
               <a:buNone/>
             </a:pPr>
             <a:r>
@@ -11566,7 +11148,7 @@
           <a:bodyPr wrap="square" lIns="0" tIns="0" rIns="0" bIns="0" rtlCol="0" anchor="ctr"/>
           <a:lstStyle/>
           <a:p>
-            <a:pPr indent="0" marL="0">
+            <a:pPr marL="0" indent="0">
               <a:buNone/>
             </a:pPr>
             <a:r>
@@ -11630,7 +11212,7 @@
           <a:bodyPr wrap="square" lIns="0" tIns="0" rIns="0" bIns="0" rtlCol="0" anchor="ctr"/>
           <a:lstStyle/>
           <a:p>
-            <a:pPr algn="ctr" indent="0" marL="0">
+            <a:pPr marL="0" indent="0" algn="ctr">
               <a:buNone/>
             </a:pPr>
             <a:r>
@@ -11669,7 +11251,7 @@
           <a:bodyPr wrap="square" lIns="0" tIns="0" rIns="0" bIns="0" rtlCol="0" anchor="ctr"/>
           <a:lstStyle/>
           <a:p>
-            <a:pPr indent="0" marL="0">
+            <a:pPr marL="0" indent="0">
               <a:buNone/>
             </a:pPr>
             <a:r>
@@ -11708,7 +11290,7 @@
           <a:bodyPr wrap="square" lIns="0" tIns="0" rIns="0" bIns="0" rtlCol="0" anchor="ctr"/>
           <a:lstStyle/>
           <a:p>
-            <a:pPr indent="0" marL="0">
+            <a:pPr marL="0" indent="0">
               <a:buNone/>
             </a:pPr>
             <a:r>
@@ -11772,7 +11354,7 @@
           <a:bodyPr wrap="square" lIns="0" tIns="0" rIns="0" bIns="0" rtlCol="0" anchor="ctr"/>
           <a:lstStyle/>
           <a:p>
-            <a:pPr algn="ctr" indent="0" marL="0">
+            <a:pPr marL="0" indent="0" algn="ctr">
               <a:buNone/>
             </a:pPr>
             <a:r>
@@ -11811,7 +11393,7 @@
           <a:bodyPr wrap="square" lIns="0" tIns="0" rIns="0" bIns="0" rtlCol="0" anchor="ctr"/>
           <a:lstStyle/>
           <a:p>
-            <a:pPr indent="0" marL="0">
+            <a:pPr marL="0" indent="0">
               <a:buNone/>
             </a:pPr>
             <a:r>
@@ -11850,7 +11432,7 @@
           <a:bodyPr wrap="square" lIns="0" tIns="0" rIns="0" bIns="0" rtlCol="0" anchor="ctr"/>
           <a:lstStyle/>
           <a:p>
-            <a:pPr indent="0" marL="0">
+            <a:pPr marL="0" indent="0">
               <a:buNone/>
             </a:pPr>
             <a:r>
@@ -11914,7 +11496,7 @@
           <a:bodyPr wrap="square" lIns="0" tIns="0" rIns="0" bIns="0" rtlCol="0" anchor="ctr"/>
           <a:lstStyle/>
           <a:p>
-            <a:pPr algn="ctr" indent="0" marL="0">
+            <a:pPr marL="0" indent="0" algn="ctr">
               <a:buNone/>
             </a:pPr>
             <a:r>
@@ -11953,7 +11535,7 @@
           <a:bodyPr wrap="square" lIns="0" tIns="0" rIns="0" bIns="0" rtlCol="0" anchor="ctr"/>
           <a:lstStyle/>
           <a:p>
-            <a:pPr indent="0" marL="0">
+            <a:pPr marL="0" indent="0">
               <a:buNone/>
             </a:pPr>
             <a:r>
@@ -11992,7 +11574,7 @@
           <a:bodyPr wrap="square" lIns="0" tIns="0" rIns="0" bIns="0" rtlCol="0" anchor="ctr"/>
           <a:lstStyle/>
           <a:p>
-            <a:pPr indent="0" marL="0">
+            <a:pPr marL="0" indent="0">
               <a:buNone/>
             </a:pPr>
             <a:r>
@@ -12056,7 +11638,7 @@
           <a:bodyPr wrap="square" lIns="0" tIns="0" rIns="0" bIns="0" rtlCol="0" anchor="ctr"/>
           <a:lstStyle/>
           <a:p>
-            <a:pPr algn="ctr" indent="0" marL="0">
+            <a:pPr marL="0" indent="0" algn="ctr">
               <a:buNone/>
             </a:pPr>
             <a:r>
@@ -12095,7 +11677,7 @@
           <a:bodyPr wrap="square" lIns="0" tIns="0" rIns="0" bIns="0" rtlCol="0" anchor="ctr"/>
           <a:lstStyle/>
           <a:p>
-            <a:pPr indent="0" marL="0">
+            <a:pPr marL="0" indent="0">
               <a:buNone/>
             </a:pPr>
             <a:r>
@@ -12134,7 +11716,7 @@
           <a:bodyPr wrap="square" lIns="0" tIns="0" rIns="0" bIns="0" rtlCol="0" anchor="ctr"/>
           <a:lstStyle/>
           <a:p>
-            <a:pPr indent="0" marL="0">
+            <a:pPr marL="0" indent="0">
               <a:buNone/>
             </a:pPr>
             <a:r>
@@ -12198,7 +11780,7 @@
           <a:bodyPr wrap="square" lIns="0" tIns="0" rIns="0" bIns="0" rtlCol="0" anchor="ctr"/>
           <a:lstStyle/>
           <a:p>
-            <a:pPr algn="ctr" indent="0" marL="0">
+            <a:pPr marL="0" indent="0" algn="ctr">
               <a:buNone/>
             </a:pPr>
             <a:r>
@@ -12237,7 +11819,7 @@
           <a:bodyPr wrap="square" lIns="0" tIns="0" rIns="0" bIns="0" rtlCol="0" anchor="ctr"/>
           <a:lstStyle/>
           <a:p>
-            <a:pPr indent="0" marL="0">
+            <a:pPr marL="0" indent="0">
               <a:buNone/>
             </a:pPr>
             <a:r>
@@ -12276,7 +11858,7 @@
           <a:bodyPr wrap="square" lIns="0" tIns="0" rIns="0" bIns="0" rtlCol="0" anchor="ctr"/>
           <a:lstStyle/>
           <a:p>
-            <a:pPr indent="0" marL="0">
+            <a:pPr marL="0" indent="0">
               <a:buNone/>
             </a:pPr>
             <a:r>
@@ -12365,7 +11947,7 @@
           <a:bodyPr wrap="square" lIns="0" tIns="0" rIns="0" bIns="0" rtlCol="0" anchor="ctr"/>
           <a:lstStyle/>
           <a:p>
-            <a:pPr indent="0" marL="0">
+            <a:pPr marL="0" indent="0">
               <a:buNone/>
             </a:pPr>
             <a:r>
@@ -12399,6 +11981,7 @@
         <a:solidFill>
           <a:srgbClr val="0C1A2E"/>
         </a:solidFill>
+        <a:effectLst/>
       </p:bgPr>
     </p:bg>
     <p:spTree>
@@ -12511,11 +12094,11 @@
           <a:bodyPr wrap="square" lIns="0" tIns="0" rIns="0" bIns="0" rtlCol="0" anchor="ctr"/>
           <a:lstStyle/>
           <a:p>
-            <a:pPr algn="ctr" indent="0" marL="0">
-              <a:buNone/>
-            </a:pPr>
-            <a:r>
-              <a:rPr lang="en-US" sz="1000" b="1" spc="200" kern="0" dirty="0">
+            <a:pPr marL="0" indent="0" algn="ctr">
+              <a:buNone/>
+            </a:pPr>
+            <a:r>
+              <a:rPr lang="en-US" sz="1000" b="1" kern="0" spc="200" dirty="0">
                 <a:solidFill>
                   <a:srgbClr val="FFFFFF"/>
                 </a:solidFill>
@@ -12550,7 +12133,7 @@
           <a:bodyPr wrap="square" lIns="0" tIns="0" rIns="0" bIns="0" rtlCol="0" anchor="ctr"/>
           <a:lstStyle/>
           <a:p>
-            <a:pPr indent="0" marL="0">
+            <a:pPr marL="0" indent="0">
               <a:buNone/>
             </a:pPr>
             <a:r>
@@ -12589,7 +12172,7 @@
           <a:bodyPr wrap="square" rtlCol="0" anchor="ctr"/>
           <a:lstStyle/>
           <a:p>
-            <a:pPr indent="0" marL="0">
+            <a:pPr marL="0" indent="0">
               <a:buNone/>
             </a:pPr>
             <a:r>
@@ -12655,7 +12238,7 @@
           <a:bodyPr wrap="square" lIns="0" tIns="0" rIns="0" bIns="0" rtlCol="0" anchor="ctr"/>
           <a:lstStyle/>
           <a:p>
-            <a:pPr indent="0" marL="0">
+            <a:pPr marL="0" indent="0">
               <a:buNone/>
             </a:pPr>
             <a:r>
@@ -12669,9 +12252,6 @@
               </a:rPr>
               <a:t>▶ </a:t>
             </a:r>
-            <a:pPr indent="0" marL="0">
-              <a:buNone/>
-            </a:pPr>
             <a:r>
               <a:rPr lang="en-US" sz="1250" b="1" dirty="0">
                 <a:solidFill>
@@ -12708,7 +12288,7 @@
           <a:bodyPr wrap="square" lIns="0" tIns="0" rIns="0" bIns="0" rtlCol="0" anchor="ctr"/>
           <a:lstStyle/>
           <a:p>
-            <a:pPr indent="0" marL="0">
+            <a:pPr marL="0" indent="0">
               <a:buNone/>
             </a:pPr>
             <a:r>
@@ -12722,9 +12302,6 @@
               </a:rPr>
               <a:t>▶ </a:t>
             </a:r>
-            <a:pPr indent="0" marL="0">
-              <a:buNone/>
-            </a:pPr>
             <a:r>
               <a:rPr lang="en-US" sz="1250" b="1" dirty="0">
                 <a:solidFill>
@@ -12786,7 +12363,7 @@
           <a:bodyPr wrap="square" lIns="0" tIns="0" rIns="0" bIns="0" rtlCol="0" anchor="ctr"/>
           <a:lstStyle/>
           <a:p>
-            <a:pPr indent="0" marL="0">
+            <a:pPr marL="0" indent="0">
               <a:buNone/>
             </a:pPr>
             <a:r>
@@ -12850,7 +12427,7 @@
           <a:bodyPr wrap="square" lIns="0" tIns="0" rIns="0" bIns="0" rtlCol="0" anchor="ctr"/>
           <a:lstStyle/>
           <a:p>
-            <a:pPr indent="0" marL="0">
+            <a:pPr marL="0" indent="0">
               <a:buNone/>
             </a:pPr>
             <a:r>
@@ -12916,7 +12493,7 @@
           <a:bodyPr wrap="square" lIns="0" tIns="0" rIns="0" bIns="0" rtlCol="0" anchor="ctr"/>
           <a:lstStyle/>
           <a:p>
-            <a:pPr indent="0" marL="0">
+            <a:pPr marL="0" indent="0">
               <a:buNone/>
             </a:pPr>
             <a:r>
@@ -12980,7 +12557,7 @@
           <a:bodyPr wrap="square" lIns="0" tIns="0" rIns="0" bIns="0" rtlCol="0" anchor="ctr"/>
           <a:lstStyle/>
           <a:p>
-            <a:pPr indent="0" marL="0">
+            <a:pPr marL="0" indent="0">
               <a:buNone/>
             </a:pPr>
             <a:r>
@@ -13014,6 +12591,7 @@
         <a:solidFill>
           <a:srgbClr val="0D2218"/>
         </a:solidFill>
+        <a:effectLst/>
       </p:bgPr>
     </p:bg>
     <p:spTree>
@@ -13103,7 +12681,7 @@
           <a:bodyPr wrap="square" rtlCol="0" anchor="ctr"/>
           <a:lstStyle/>
           <a:p>
-            <a:pPr indent="0" marL="0">
+            <a:pPr marL="0" indent="0">
               <a:buNone/>
             </a:pPr>
             <a:r>
@@ -13142,11 +12720,11 @@
           <a:bodyPr wrap="square" rtlCol="0" anchor="ctr"/>
           <a:lstStyle/>
           <a:p>
-            <a:pPr indent="0" marL="0">
-              <a:buNone/>
-            </a:pPr>
-            <a:r>
-              <a:rPr lang="en-US" sz="1100" b="1" spc="400" kern="0" dirty="0">
+            <a:pPr marL="0" indent="0">
+              <a:buNone/>
+            </a:pPr>
+            <a:r>
+              <a:rPr lang="en-US" sz="1100" b="1" kern="0" spc="400" dirty="0">
                 <a:solidFill>
                   <a:srgbClr val="86EFAC"/>
                 </a:solidFill>
@@ -13181,7 +12759,7 @@
           <a:bodyPr wrap="square" rtlCol="0" anchor="ctr"/>
           <a:lstStyle/>
           <a:p>
-            <a:pPr indent="0" marL="0">
+            <a:pPr marL="0" indent="0">
               <a:buNone/>
             </a:pPr>
             <a:r>
@@ -13220,7 +12798,7 @@
           <a:bodyPr wrap="square" rtlCol="0" anchor="ctr"/>
           <a:lstStyle/>
           <a:p>
-            <a:pPr indent="0" marL="0">
+            <a:pPr marL="0" indent="0">
               <a:buNone/>
             </a:pPr>
             <a:r>
@@ -13259,7 +12837,7 @@
           <a:bodyPr wrap="square" rtlCol="0" anchor="ctr"/>
           <a:lstStyle/>
           <a:p>
-            <a:pPr indent="0" marL="0">
+            <a:pPr marL="0" indent="0">
               <a:buNone/>
             </a:pPr>
             <a:r>
@@ -13293,6 +12871,7 @@
         <a:solidFill>
           <a:srgbClr val="F0FDF4"/>
         </a:solidFill>
+        <a:effectLst/>
       </p:bgPr>
     </p:bg>
     <p:spTree>
@@ -13380,7 +12959,7 @@
           <a:bodyPr wrap="square" lIns="0" tIns="0" rIns="0" bIns="0" rtlCol="0" anchor="ctr"/>
           <a:lstStyle/>
           <a:p>
-            <a:pPr indent="0" marL="0">
+            <a:pPr marL="0" indent="0">
               <a:buNone/>
             </a:pPr>
             <a:r>
@@ -13419,7 +12998,7 @@
           <a:bodyPr wrap="square" lIns="0" tIns="0" rIns="0" bIns="0" rtlCol="0" anchor="ctr"/>
           <a:lstStyle/>
           <a:p>
-            <a:pPr indent="0" marL="0">
+            <a:pPr marL="0" indent="0">
               <a:buNone/>
             </a:pPr>
             <a:r>
@@ -13433,9 +13012,6 @@
               </a:rPr>
               <a:t>◈ </a:t>
             </a:r>
-            <a:pPr indent="0" marL="0">
-              <a:buNone/>
-            </a:pPr>
             <a:r>
               <a:rPr lang="en-US" sz="1300" b="1" dirty="0">
                 <a:solidFill>
@@ -13472,7 +13048,7 @@
           <a:bodyPr wrap="square" lIns="0" tIns="0" rIns="0" bIns="0" rtlCol="0" anchor="ctr"/>
           <a:lstStyle/>
           <a:p>
-            <a:pPr indent="0" marL="0">
+            <a:pPr marL="0" indent="0">
               <a:buNone/>
             </a:pPr>
             <a:r>
@@ -13486,9 +13062,6 @@
               </a:rPr>
               <a:t>◈ </a:t>
             </a:r>
-            <a:pPr indent="0" marL="0">
-              <a:buNone/>
-            </a:pPr>
             <a:r>
               <a:rPr lang="en-US" sz="1300" b="1" dirty="0">
                 <a:solidFill>
@@ -13550,7 +13123,7 @@
           <a:bodyPr wrap="square" lIns="0" tIns="0" rIns="0" bIns="0" rtlCol="0" anchor="ctr"/>
           <a:lstStyle/>
           <a:p>
-            <a:pPr indent="0" marL="0">
+            <a:pPr marL="0" indent="0">
               <a:buNone/>
             </a:pPr>
             <a:r>
@@ -13589,7 +13162,7 @@
           <a:bodyPr wrap="square" lIns="0" tIns="0" rIns="0" bIns="0" rtlCol="0" anchor="ctr"/>
           <a:lstStyle/>
           <a:p>
-            <a:pPr indent="0" marL="0">
+            <a:pPr marL="0" indent="0">
               <a:buNone/>
             </a:pPr>
             <a:r>
@@ -13603,9 +13176,6 @@
               </a:rPr>
               <a:t>◈ </a:t>
             </a:r>
-            <a:pPr indent="0" marL="0">
-              <a:buNone/>
-            </a:pPr>
             <a:r>
               <a:rPr lang="en-US" sz="1300" b="1" dirty="0">
                 <a:solidFill>
@@ -13667,7 +13237,7 @@
           <a:bodyPr wrap="square" lIns="0" tIns="0" rIns="0" bIns="0" rtlCol="0" anchor="ctr"/>
           <a:lstStyle/>
           <a:p>
-            <a:pPr indent="0" marL="0">
+            <a:pPr marL="0" indent="0">
               <a:buNone/>
             </a:pPr>
             <a:r>
@@ -13731,7 +13301,7 @@
           <a:bodyPr wrap="square" lIns="0" tIns="0" rIns="0" bIns="0" rtlCol="0" anchor="ctr"/>
           <a:lstStyle/>
           <a:p>
-            <a:pPr indent="0" marL="0">
+            <a:pPr marL="0" indent="0">
               <a:buNone/>
             </a:pPr>
             <a:r>
@@ -13795,7 +13365,7 @@
           <a:bodyPr wrap="square" lIns="0" tIns="0" rIns="0" bIns="0" rtlCol="0" anchor="ctr"/>
           <a:lstStyle/>
           <a:p>
-            <a:pPr indent="0" marL="0">
+            <a:pPr marL="0" indent="0">
               <a:buNone/>
             </a:pPr>
             <a:r>
@@ -13861,7 +13431,7 @@
           <a:bodyPr wrap="square" lIns="0" tIns="0" rIns="0" bIns="0" rtlCol="0" anchor="ctr"/>
           <a:lstStyle/>
           <a:p>
-            <a:pPr indent="0" marL="0">
+            <a:pPr marL="0" indent="0">
               <a:buNone/>
             </a:pPr>
             <a:r>
@@ -13950,7 +13520,7 @@
           <a:bodyPr wrap="square" lIns="0" tIns="0" rIns="0" bIns="0" rtlCol="0" anchor="ctr"/>
           <a:lstStyle/>
           <a:p>
-            <a:pPr indent="0" marL="0">
+            <a:pPr marL="0" indent="0">
               <a:buNone/>
             </a:pPr>
             <a:r>
@@ -13984,6 +13554,7 @@
         <a:solidFill>
           <a:srgbClr val="F0FDF4"/>
         </a:solidFill>
+        <a:effectLst/>
       </p:bgPr>
     </p:bg>
     <p:spTree>
@@ -14071,7 +13642,7 @@
           <a:bodyPr wrap="square" lIns="0" tIns="0" rIns="0" bIns="0" rtlCol="0" anchor="ctr"/>
           <a:lstStyle/>
           <a:p>
-            <a:pPr indent="0" marL="0">
+            <a:pPr marL="0" indent="0">
               <a:buNone/>
             </a:pPr>
             <a:r>
@@ -14110,7 +13681,7 @@
           <a:bodyPr wrap="square" lIns="0" tIns="0" rIns="0" bIns="0" rtlCol="0" anchor="ctr"/>
           <a:lstStyle/>
           <a:p>
-            <a:pPr indent="0" marL="0">
+            <a:pPr marL="0" indent="0">
               <a:buNone/>
             </a:pPr>
             <a:r>
@@ -14152,7 +13723,7 @@
             <a:prstDash val="solid"/>
           </a:ln>
           <a:effectLst>
-            <a:outerShdw sx="100000" sy="100000" kx="0" ky="0" algn="bl" rotWithShape="0" blurRad="76200" dist="25400" dir="8100000">
+            <a:outerShdw blurRad="76200" dist="25400" dir="8100000" algn="bl" rotWithShape="0">
               <a:srgbClr val="000000">
                 <a:alpha val="18000"/>
               </a:srgbClr>
@@ -14193,7 +13764,7 @@
         </p:nvSpPr>
         <p:spPr>
           <a:xfrm>
-            <a:off x="457200" y="1444752"/>
+            <a:off x="475488" y="1380377"/>
             <a:ext cx="8412480" cy="2523744"/>
           </a:xfrm>
           <a:prstGeom prst="rect">
@@ -14206,7 +13777,7 @@
           <a:bodyPr wrap="square" lIns="0" tIns="0" rIns="0" bIns="0" rtlCol="0" anchor="t"/>
           <a:lstStyle/>
           <a:p>
-            <a:pPr indent="0" marL="0">
+            <a:pPr marL="0" indent="0">
               <a:buNone/>
             </a:pPr>
             <a:r>
@@ -14223,7 +13794,7 @@
             <a:endParaRPr lang="en-US" sz="1100" dirty="0"/>
           </a:p>
           <a:p>
-            <a:pPr indent="0" marL="0">
+            <a:pPr marL="0" indent="0">
               <a:buNone/>
             </a:pPr>
             <a:r>
@@ -14240,7 +13811,7 @@
             <a:endParaRPr lang="en-US" sz="1100" dirty="0"/>
           </a:p>
           <a:p>
-            <a:pPr indent="0" marL="0">
+            <a:pPr marL="0" indent="0">
               <a:buNone/>
             </a:pPr>
             <a:r>
@@ -14257,7 +13828,7 @@
             <a:endParaRPr lang="en-US" sz="1100" dirty="0"/>
           </a:p>
           <a:p>
-            <a:pPr indent="0" marL="0">
+            <a:pPr marL="0" indent="0">
               <a:buNone/>
             </a:pPr>
             <a:r>
@@ -14274,7 +13845,7 @@
             <a:endParaRPr lang="en-US" sz="1100" dirty="0"/>
           </a:p>
           <a:p>
-            <a:pPr indent="0" marL="0">
+            <a:pPr marL="0" indent="0">
               <a:buNone/>
             </a:pPr>
             <a:r>
@@ -14291,7 +13862,7 @@
             <a:endParaRPr lang="en-US" sz="1100" dirty="0"/>
           </a:p>
           <a:p>
-            <a:pPr indent="0" marL="0">
+            <a:pPr marL="0" indent="0">
               <a:buNone/>
             </a:pPr>
             <a:r>
@@ -14308,7 +13879,7 @@
             <a:endParaRPr lang="en-US" sz="1100" dirty="0"/>
           </a:p>
           <a:p>
-            <a:pPr indent="0" marL="0">
+            <a:pPr marL="0" indent="0">
               <a:buNone/>
             </a:pPr>
             <a:r>
@@ -14325,7 +13896,7 @@
             <a:endParaRPr lang="en-US" sz="1100" dirty="0"/>
           </a:p>
           <a:p>
-            <a:pPr indent="0" marL="0">
+            <a:pPr marL="0" indent="0">
               <a:buNone/>
             </a:pPr>
             <a:r>
@@ -14342,13 +13913,13 @@
             <a:endParaRPr lang="en-US" sz="1100" dirty="0"/>
           </a:p>
           <a:p>
-            <a:pPr indent="0" marL="0">
+            <a:pPr marL="0" indent="0">
               <a:buNone/>
             </a:pPr>
             <a:endParaRPr lang="en-US" sz="1100" dirty="0"/>
           </a:p>
           <a:p>
-            <a:pPr indent="0" marL="0">
+            <a:pPr marL="0" indent="0">
               <a:buNone/>
             </a:pPr>
             <a:r>
@@ -14365,7 +13936,7 @@
             <a:endParaRPr lang="en-US" sz="1100" dirty="0"/>
           </a:p>
           <a:p>
-            <a:pPr indent="0" marL="0">
+            <a:pPr marL="0" indent="0">
               <a:buNone/>
             </a:pPr>
             <a:r>
@@ -14382,7 +13953,7 @@
             <a:endParaRPr lang="en-US" sz="1100" dirty="0"/>
           </a:p>
           <a:p>
-            <a:pPr indent="0" marL="0">
+            <a:pPr marL="0" indent="0">
               <a:buNone/>
             </a:pPr>
             <a:r>
@@ -14399,7 +13970,7 @@
             <a:endParaRPr lang="en-US" sz="1100" dirty="0"/>
           </a:p>
           <a:p>
-            <a:pPr indent="0" marL="0">
+            <a:pPr marL="0" indent="0">
               <a:buNone/>
             </a:pPr>
             <a:r>
@@ -14416,7 +13987,7 @@
             <a:endParaRPr lang="en-US" sz="1100" dirty="0"/>
           </a:p>
           <a:p>
-            <a:pPr indent="0" marL="0">
+            <a:pPr marL="0" indent="0">
               <a:buNone/>
             </a:pPr>
             <a:r>
@@ -14433,7 +14004,7 @@
             <a:endParaRPr lang="en-US" sz="1100" dirty="0"/>
           </a:p>
           <a:p>
-            <a:pPr indent="0" marL="0">
+            <a:pPr marL="0" indent="0">
               <a:buNone/>
             </a:pPr>
             <a:r>
@@ -14450,7 +14021,7 @@
             <a:endParaRPr lang="en-US" sz="1100" dirty="0"/>
           </a:p>
           <a:p>
-            <a:pPr indent="0" marL="0">
+            <a:pPr marL="0" indent="0">
               <a:buNone/>
             </a:pPr>
             <a:r>
@@ -14516,7 +14087,7 @@
           <a:bodyPr wrap="square" lIns="0" tIns="0" rIns="0" bIns="0" rtlCol="0" anchor="ctr"/>
           <a:lstStyle/>
           <a:p>
-            <a:pPr indent="0" marL="0">
+            <a:pPr marL="0" indent="0">
               <a:buNone/>
             </a:pPr>
             <a:r>
@@ -14605,7 +14176,7 @@
           <a:bodyPr wrap="square" lIns="0" tIns="0" rIns="0" bIns="0" rtlCol="0" anchor="ctr"/>
           <a:lstStyle/>
           <a:p>
-            <a:pPr indent="0" marL="0">
+            <a:pPr marL="0" indent="0">
               <a:buNone/>
             </a:pPr>
             <a:r>
@@ -14639,6 +14210,7 @@
         <a:solidFill>
           <a:srgbClr val="0C1A2E"/>
         </a:solidFill>
+        <a:effectLst/>
       </p:bgPr>
     </p:bg>
     <p:spTree>
@@ -14751,11 +14323,11 @@
           <a:bodyPr wrap="square" lIns="0" tIns="0" rIns="0" bIns="0" rtlCol="0" anchor="ctr"/>
           <a:lstStyle/>
           <a:p>
-            <a:pPr algn="ctr" indent="0" marL="0">
-              <a:buNone/>
-            </a:pPr>
-            <a:r>
-              <a:rPr lang="en-US" sz="1000" b="1" spc="200" kern="0" dirty="0">
+            <a:pPr marL="0" indent="0" algn="ctr">
+              <a:buNone/>
+            </a:pPr>
+            <a:r>
+              <a:rPr lang="en-US" sz="1000" b="1" kern="0" spc="200" dirty="0">
                 <a:solidFill>
                   <a:srgbClr val="FFFFFF"/>
                 </a:solidFill>
@@ -14790,7 +14362,7 @@
           <a:bodyPr wrap="square" lIns="0" tIns="0" rIns="0" bIns="0" rtlCol="0" anchor="ctr"/>
           <a:lstStyle/>
           <a:p>
-            <a:pPr indent="0" marL="0">
+            <a:pPr marL="0" indent="0">
               <a:buNone/>
             </a:pPr>
             <a:r>
@@ -14829,7 +14401,7 @@
           <a:bodyPr wrap="square" rtlCol="0" anchor="ctr"/>
           <a:lstStyle/>
           <a:p>
-            <a:pPr indent="0" marL="0">
+            <a:pPr marL="0" indent="0">
               <a:buNone/>
             </a:pPr>
             <a:r>
@@ -14895,7 +14467,7 @@
           <a:bodyPr wrap="square" lIns="0" tIns="0" rIns="0" bIns="0" rtlCol="0" anchor="ctr"/>
           <a:lstStyle/>
           <a:p>
-            <a:pPr indent="0" marL="0">
+            <a:pPr marL="0" indent="0">
               <a:buNone/>
             </a:pPr>
             <a:r>
@@ -14909,9 +14481,6 @@
               </a:rPr>
               <a:t>▶ </a:t>
             </a:r>
-            <a:pPr indent="0" marL="0">
-              <a:buNone/>
-            </a:pPr>
             <a:r>
               <a:rPr lang="en-US" sz="1250" b="1" dirty="0">
                 <a:solidFill>
@@ -14948,7 +14517,7 @@
           <a:bodyPr wrap="square" lIns="0" tIns="0" rIns="0" bIns="0" rtlCol="0" anchor="ctr"/>
           <a:lstStyle/>
           <a:p>
-            <a:pPr indent="0" marL="0">
+            <a:pPr marL="0" indent="0">
               <a:buNone/>
             </a:pPr>
             <a:r>
@@ -14962,9 +14531,6 @@
               </a:rPr>
               <a:t>▶ </a:t>
             </a:r>
-            <a:pPr indent="0" marL="0">
-              <a:buNone/>
-            </a:pPr>
             <a:r>
               <a:rPr lang="en-US" sz="1250" dirty="0">
                 <a:solidFill>
@@ -15001,7 +14567,7 @@
           <a:bodyPr wrap="square" lIns="0" tIns="0" rIns="0" bIns="0" rtlCol="0" anchor="ctr"/>
           <a:lstStyle/>
           <a:p>
-            <a:pPr indent="0" marL="0">
+            <a:pPr marL="0" indent="0">
               <a:buNone/>
             </a:pPr>
             <a:r>
@@ -15015,9 +14581,6 @@
               </a:rPr>
               <a:t>▶ </a:t>
             </a:r>
-            <a:pPr indent="0" marL="0">
-              <a:buNone/>
-            </a:pPr>
             <a:r>
               <a:rPr lang="en-US" sz="1250" dirty="0">
                 <a:solidFill>
@@ -15079,7 +14642,7 @@
           <a:bodyPr wrap="square" lIns="0" tIns="0" rIns="0" bIns="0" rtlCol="0" anchor="ctr"/>
           <a:lstStyle/>
           <a:p>
-            <a:pPr indent="0" marL="0">
+            <a:pPr marL="0" indent="0">
               <a:buNone/>
             </a:pPr>
             <a:r>
@@ -15143,7 +14706,7 @@
           <a:bodyPr wrap="square" lIns="0" tIns="0" rIns="0" bIns="0" rtlCol="0" anchor="ctr"/>
           <a:lstStyle/>
           <a:p>
-            <a:pPr indent="0" marL="0">
+            <a:pPr marL="0" indent="0">
               <a:buNone/>
             </a:pPr>
             <a:r>
@@ -15209,7 +14772,7 @@
           <a:bodyPr wrap="square" lIns="0" tIns="0" rIns="0" bIns="0" rtlCol="0" anchor="ctr"/>
           <a:lstStyle/>
           <a:p>
-            <a:pPr indent="0" marL="0">
+            <a:pPr marL="0" indent="0">
               <a:buNone/>
             </a:pPr>
             <a:r>
@@ -15273,7 +14836,7 @@
           <a:bodyPr wrap="square" lIns="0" tIns="0" rIns="0" bIns="0" rtlCol="0" anchor="ctr"/>
           <a:lstStyle/>
           <a:p>
-            <a:pPr indent="0" marL="0">
+            <a:pPr marL="0" indent="0">
               <a:buNone/>
             </a:pPr>
             <a:r>
@@ -15307,6 +14870,7 @@
         <a:solidFill>
           <a:srgbClr val="0C1A2E"/>
         </a:solidFill>
+        <a:effectLst/>
       </p:bgPr>
     </p:bg>
     <p:spTree>
@@ -15419,11 +14983,11 @@
           <a:bodyPr wrap="square" lIns="0" tIns="0" rIns="0" bIns="0" rtlCol="0" anchor="ctr"/>
           <a:lstStyle/>
           <a:p>
-            <a:pPr algn="ctr" indent="0" marL="0">
-              <a:buNone/>
-            </a:pPr>
-            <a:r>
-              <a:rPr lang="en-US" sz="1000" b="1" spc="200" kern="0" dirty="0">
+            <a:pPr marL="0" indent="0" algn="ctr">
+              <a:buNone/>
+            </a:pPr>
+            <a:r>
+              <a:rPr lang="en-US" sz="1000" b="1" kern="0" spc="200" dirty="0">
                 <a:solidFill>
                   <a:srgbClr val="FFFFFF"/>
                 </a:solidFill>
@@ -15458,7 +15022,7 @@
           <a:bodyPr wrap="square" lIns="0" tIns="0" rIns="0" bIns="0" rtlCol="0" anchor="ctr"/>
           <a:lstStyle/>
           <a:p>
-            <a:pPr indent="0" marL="0">
+            <a:pPr marL="0" indent="0">
               <a:buNone/>
             </a:pPr>
             <a:r>
@@ -15497,7 +15061,7 @@
           <a:bodyPr wrap="square" rtlCol="0" anchor="ctr"/>
           <a:lstStyle/>
           <a:p>
-            <a:pPr indent="0" marL="0">
+            <a:pPr marL="0" indent="0">
               <a:buNone/>
             </a:pPr>
             <a:r>
@@ -15563,7 +15127,7 @@
           <a:bodyPr wrap="square" lIns="0" tIns="0" rIns="0" bIns="0" rtlCol="0" anchor="ctr"/>
           <a:lstStyle/>
           <a:p>
-            <a:pPr indent="0" marL="0">
+            <a:pPr marL="0" indent="0">
               <a:buNone/>
             </a:pPr>
             <a:r>
@@ -15577,9 +15141,6 @@
               </a:rPr>
               <a:t>▶ </a:t>
             </a:r>
-            <a:pPr indent="0" marL="0">
-              <a:buNone/>
-            </a:pPr>
             <a:r>
               <a:rPr lang="en-US" sz="1250" b="1" dirty="0">
                 <a:solidFill>
@@ -15616,7 +15177,7 @@
           <a:bodyPr wrap="square" lIns="0" tIns="0" rIns="0" bIns="0" rtlCol="0" anchor="ctr"/>
           <a:lstStyle/>
           <a:p>
-            <a:pPr indent="0" marL="0">
+            <a:pPr marL="0" indent="0">
               <a:buNone/>
             </a:pPr>
             <a:r>
@@ -15630,9 +15191,6 @@
               </a:rPr>
               <a:t>▶ </a:t>
             </a:r>
-            <a:pPr indent="0" marL="0">
-              <a:buNone/>
-            </a:pPr>
             <a:r>
               <a:rPr lang="en-US" sz="1250" dirty="0">
                 <a:solidFill>
@@ -15694,7 +15252,7 @@
           <a:bodyPr wrap="square" lIns="0" tIns="0" rIns="0" bIns="0" rtlCol="0" anchor="ctr"/>
           <a:lstStyle/>
           <a:p>
-            <a:pPr indent="0" marL="0">
+            <a:pPr marL="0" indent="0">
               <a:buNone/>
             </a:pPr>
             <a:r>
@@ -15758,7 +15316,7 @@
           <a:bodyPr wrap="square" lIns="0" tIns="0" rIns="0" bIns="0" rtlCol="0" anchor="ctr"/>
           <a:lstStyle/>
           <a:p>
-            <a:pPr indent="0" marL="0">
+            <a:pPr marL="0" indent="0">
               <a:buNone/>
             </a:pPr>
             <a:r>
@@ -15822,7 +15380,7 @@
           <a:bodyPr wrap="square" lIns="0" tIns="0" rIns="0" bIns="0" rtlCol="0" anchor="ctr"/>
           <a:lstStyle/>
           <a:p>
-            <a:pPr indent="0" marL="0">
+            <a:pPr marL="0" indent="0">
               <a:buNone/>
             </a:pPr>
             <a:r>
@@ -15888,7 +15446,7 @@
           <a:bodyPr wrap="square" lIns="0" tIns="0" rIns="0" bIns="0" rtlCol="0" anchor="ctr"/>
           <a:lstStyle/>
           <a:p>
-            <a:pPr indent="0" marL="0">
+            <a:pPr marL="0" indent="0">
               <a:buNone/>
             </a:pPr>
             <a:r>
@@ -15952,7 +15510,7 @@
           <a:bodyPr wrap="square" lIns="0" tIns="0" rIns="0" bIns="0" rtlCol="0" anchor="ctr"/>
           <a:lstStyle/>
           <a:p>
-            <a:pPr indent="0" marL="0">
+            <a:pPr marL="0" indent="0">
               <a:buNone/>
             </a:pPr>
             <a:r>
@@ -15986,6 +15544,7 @@
         <a:solidFill>
           <a:srgbClr val="0D2218"/>
         </a:solidFill>
+        <a:effectLst/>
       </p:bgPr>
     </p:bg>
     <p:spTree>
@@ -16075,7 +15634,7 @@
           <a:bodyPr wrap="square" rtlCol="0" anchor="ctr"/>
           <a:lstStyle/>
           <a:p>
-            <a:pPr indent="0" marL="0">
+            <a:pPr marL="0" indent="0">
               <a:buNone/>
             </a:pPr>
             <a:r>
@@ -16114,11 +15673,11 @@
           <a:bodyPr wrap="square" rtlCol="0" anchor="ctr"/>
           <a:lstStyle/>
           <a:p>
-            <a:pPr indent="0" marL="0">
-              <a:buNone/>
-            </a:pPr>
-            <a:r>
-              <a:rPr lang="en-US" sz="1100" b="1" spc="400" kern="0" dirty="0">
+            <a:pPr marL="0" indent="0">
+              <a:buNone/>
+            </a:pPr>
+            <a:r>
+              <a:rPr lang="en-US" sz="1100" b="1" kern="0" spc="400" dirty="0">
                 <a:solidFill>
                   <a:srgbClr val="86EFAC"/>
                 </a:solidFill>
@@ -16153,7 +15712,7 @@
           <a:bodyPr wrap="square" rtlCol="0" anchor="ctr"/>
           <a:lstStyle/>
           <a:p>
-            <a:pPr indent="0" marL="0">
+            <a:pPr marL="0" indent="0">
               <a:buNone/>
             </a:pPr>
             <a:r>
@@ -16192,7 +15751,7 @@
           <a:bodyPr wrap="square" rtlCol="0" anchor="ctr"/>
           <a:lstStyle/>
           <a:p>
-            <a:pPr indent="0" marL="0">
+            <a:pPr marL="0" indent="0">
               <a:buNone/>
             </a:pPr>
             <a:r>
@@ -16231,7 +15790,7 @@
           <a:bodyPr wrap="square" rtlCol="0" anchor="ctr"/>
           <a:lstStyle/>
           <a:p>
-            <a:pPr indent="0" marL="0">
+            <a:pPr marL="0" indent="0">
               <a:buNone/>
             </a:pPr>
             <a:r>
@@ -16265,6 +15824,7 @@
         <a:solidFill>
           <a:srgbClr val="F0FDF4"/>
         </a:solidFill>
+        <a:effectLst/>
       </p:bgPr>
     </p:bg>
     <p:spTree>
@@ -16352,7 +15912,7 @@
           <a:bodyPr wrap="square" lIns="0" tIns="0" rIns="0" bIns="0" rtlCol="0" anchor="ctr"/>
           <a:lstStyle/>
           <a:p>
-            <a:pPr indent="0" marL="0">
+            <a:pPr marL="0" indent="0">
               <a:buNone/>
             </a:pPr>
             <a:r>
@@ -16391,7 +15951,7 @@
           <a:bodyPr wrap="square" lIns="0" tIns="0" rIns="0" bIns="0" rtlCol="0" anchor="ctr"/>
           <a:lstStyle/>
           <a:p>
-            <a:pPr indent="0" marL="0">
+            <a:pPr marL="0" indent="0">
               <a:buNone/>
             </a:pPr>
             <a:r>
@@ -16405,9 +15965,6 @@
               </a:rPr>
               <a:t>◈ </a:t>
             </a:r>
-            <a:pPr indent="0" marL="0">
-              <a:buNone/>
-            </a:pPr>
             <a:r>
               <a:rPr lang="en-US" sz="1300" b="1" dirty="0">
                 <a:solidFill>
@@ -16444,7 +16001,7 @@
           <a:bodyPr wrap="square" lIns="0" tIns="0" rIns="0" bIns="0" rtlCol="0" anchor="ctr"/>
           <a:lstStyle/>
           <a:p>
-            <a:pPr indent="0" marL="0">
+            <a:pPr marL="0" indent="0">
               <a:buNone/>
             </a:pPr>
             <a:r>
@@ -16458,9 +16015,6 @@
               </a:rPr>
               <a:t>◈ </a:t>
             </a:r>
-            <a:pPr indent="0" marL="0">
-              <a:buNone/>
-            </a:pPr>
             <a:r>
               <a:rPr lang="en-US" sz="1300" dirty="0">
                 <a:solidFill>
@@ -16497,7 +16051,7 @@
           <a:bodyPr wrap="square" lIns="0" tIns="0" rIns="0" bIns="0" rtlCol="0" anchor="ctr"/>
           <a:lstStyle/>
           <a:p>
-            <a:pPr indent="0" marL="0">
+            <a:pPr marL="0" indent="0">
               <a:buNone/>
             </a:pPr>
             <a:r>
@@ -16511,9 +16065,6 @@
               </a:rPr>
               <a:t>◈ </a:t>
             </a:r>
-            <a:pPr indent="0" marL="0">
-              <a:buNone/>
-            </a:pPr>
             <a:r>
               <a:rPr lang="en-US" sz="1300" b="1" dirty="0">
                 <a:solidFill>
@@ -16550,7 +16101,7 @@
           <a:bodyPr wrap="square" lIns="0" tIns="0" rIns="0" bIns="0" rtlCol="0" anchor="ctr"/>
           <a:lstStyle/>
           <a:p>
-            <a:pPr indent="0" marL="0">
+            <a:pPr marL="0" indent="0">
               <a:buNone/>
             </a:pPr>
             <a:r>
@@ -16564,9 +16115,6 @@
               </a:rPr>
               <a:t>◈ </a:t>
             </a:r>
-            <a:pPr indent="0" marL="0">
-              <a:buNone/>
-            </a:pPr>
             <a:r>
               <a:rPr lang="en-US" sz="1300" b="1" dirty="0">
                 <a:solidFill>
@@ -16603,7 +16151,7 @@
           <a:bodyPr wrap="square" lIns="0" tIns="0" rIns="0" bIns="0" rtlCol="0" anchor="ctr"/>
           <a:lstStyle/>
           <a:p>
-            <a:pPr indent="0" marL="0">
+            <a:pPr marL="0" indent="0">
               <a:buNone/>
             </a:pPr>
             <a:r>
@@ -16617,9 +16165,6 @@
               </a:rPr>
               <a:t>◈ </a:t>
             </a:r>
-            <a:pPr indent="0" marL="0">
-              <a:buNone/>
-            </a:pPr>
             <a:r>
               <a:rPr lang="en-US" sz="1300" dirty="0">
                 <a:solidFill>
@@ -16656,7 +16201,7 @@
           <a:bodyPr wrap="square" lIns="0" tIns="0" rIns="0" bIns="0" rtlCol="0" anchor="ctr"/>
           <a:lstStyle/>
           <a:p>
-            <a:pPr indent="0" marL="0">
+            <a:pPr marL="0" indent="0">
               <a:buNone/>
             </a:pPr>
             <a:r>
@@ -16670,9 +16215,6 @@
               </a:rPr>
               <a:t>◈ </a:t>
             </a:r>
-            <a:pPr indent="0" marL="0">
-              <a:buNone/>
-            </a:pPr>
             <a:r>
               <a:rPr lang="en-US" sz="1300" dirty="0">
                 <a:solidFill>
@@ -16736,7 +16278,7 @@
           <a:bodyPr wrap="square" lIns="0" tIns="0" rIns="0" bIns="0" rtlCol="0" anchor="ctr"/>
           <a:lstStyle/>
           <a:p>
-            <a:pPr indent="0" marL="0">
+            <a:pPr marL="0" indent="0">
               <a:buNone/>
             </a:pPr>
             <a:r>
@@ -16825,7 +16367,7 @@
           <a:bodyPr wrap="square" lIns="0" tIns="0" rIns="0" bIns="0" rtlCol="0" anchor="ctr"/>
           <a:lstStyle/>
           <a:p>
-            <a:pPr indent="0" marL="0">
+            <a:pPr marL="0" indent="0">
               <a:buNone/>
             </a:pPr>
             <a:r>
@@ -16859,6 +16401,7 @@
         <a:solidFill>
           <a:srgbClr val="F0FDF4"/>
         </a:solidFill>
+        <a:effectLst/>
       </p:bgPr>
     </p:bg>
     <p:spTree>
@@ -16946,7 +16489,7 @@
           <a:bodyPr wrap="square" lIns="0" tIns="0" rIns="0" bIns="0" rtlCol="0" anchor="ctr"/>
           <a:lstStyle/>
           <a:p>
-            <a:pPr indent="0" marL="0">
+            <a:pPr marL="0" indent="0">
               <a:buNone/>
             </a:pPr>
             <a:r>
@@ -16988,7 +16531,7 @@
             <a:prstDash val="solid"/>
           </a:ln>
           <a:effectLst>
-            <a:outerShdw sx="100000" sy="100000" kx="0" ky="0" algn="bl" rotWithShape="0" blurRad="76200" dist="25400" dir="8100000">
+            <a:outerShdw blurRad="76200" dist="25400" dir="8100000" algn="bl" rotWithShape="0">
               <a:srgbClr val="000000">
                 <a:alpha val="15000"/>
               </a:srgbClr>
@@ -17042,7 +16585,7 @@
           <a:bodyPr wrap="square" lIns="0" tIns="0" rIns="0" bIns="0" rtlCol="0" anchor="ctr"/>
           <a:lstStyle/>
           <a:p>
-            <a:pPr indent="0" marL="0">
+            <a:pPr marL="0" indent="0">
               <a:buNone/>
             </a:pPr>
             <a:r>
@@ -17081,7 +16624,7 @@
           <a:bodyPr wrap="square" lIns="0" tIns="0" rIns="0" bIns="0" rtlCol="0" anchor="ctr"/>
           <a:lstStyle/>
           <a:p>
-            <a:pPr indent="0" marL="0">
+            <a:pPr marL="0" indent="0">
               <a:buNone/>
             </a:pPr>
             <a:r>
@@ -17095,9 +16638,6 @@
               </a:rPr>
               <a:t>▸ </a:t>
             </a:r>
-            <a:pPr indent="0" marL="0">
-              <a:buNone/>
-            </a:pPr>
             <a:r>
               <a:rPr lang="en-US" sz="1250" dirty="0">
                 <a:solidFill>
@@ -17134,7 +16674,7 @@
           <a:bodyPr wrap="square" lIns="0" tIns="0" rIns="0" bIns="0" rtlCol="0" anchor="ctr"/>
           <a:lstStyle/>
           <a:p>
-            <a:pPr indent="0" marL="0">
+            <a:pPr marL="0" indent="0">
               <a:buNone/>
             </a:pPr>
             <a:r>
@@ -17148,9 +16688,6 @@
               </a:rPr>
               <a:t>▸ </a:t>
             </a:r>
-            <a:pPr indent="0" marL="0">
-              <a:buNone/>
-            </a:pPr>
             <a:r>
               <a:rPr lang="en-US" sz="1250" dirty="0">
                 <a:solidFill>
@@ -17187,7 +16724,7 @@
           <a:bodyPr wrap="square" lIns="0" tIns="0" rIns="0" bIns="0" rtlCol="0" anchor="ctr"/>
           <a:lstStyle/>
           <a:p>
-            <a:pPr indent="0" marL="0">
+            <a:pPr marL="0" indent="0">
               <a:buNone/>
             </a:pPr>
             <a:r>
@@ -17201,9 +16738,6 @@
               </a:rPr>
               <a:t>▸ </a:t>
             </a:r>
-            <a:pPr indent="0" marL="0">
-              <a:buNone/>
-            </a:pPr>
             <a:r>
               <a:rPr lang="en-US" sz="1250" dirty="0">
                 <a:solidFill>
@@ -17240,7 +16774,7 @@
           <a:bodyPr wrap="square" lIns="0" tIns="0" rIns="0" bIns="0" rtlCol="0" anchor="ctr"/>
           <a:lstStyle/>
           <a:p>
-            <a:pPr indent="0" marL="0">
+            <a:pPr marL="0" indent="0">
               <a:buNone/>
             </a:pPr>
             <a:r>
@@ -17254,9 +16788,6 @@
               </a:rPr>
               <a:t>▸ </a:t>
             </a:r>
-            <a:pPr indent="0" marL="0">
-              <a:buNone/>
-            </a:pPr>
             <a:r>
               <a:rPr lang="en-US" sz="1250" dirty="0">
                 <a:solidFill>
@@ -17293,7 +16824,7 @@
           <a:bodyPr wrap="square" lIns="0" tIns="0" rIns="0" bIns="0" rtlCol="0" anchor="ctr"/>
           <a:lstStyle/>
           <a:p>
-            <a:pPr indent="0" marL="0">
+            <a:pPr marL="0" indent="0">
               <a:buNone/>
             </a:pPr>
             <a:r>
@@ -17307,9 +16838,6 @@
               </a:rPr>
               <a:t>▸ </a:t>
             </a:r>
-            <a:pPr indent="0" marL="0">
-              <a:buNone/>
-            </a:pPr>
             <a:r>
               <a:rPr lang="en-US" sz="1250" dirty="0">
                 <a:solidFill>
@@ -17346,7 +16874,7 @@
           <a:bodyPr wrap="square" lIns="0" tIns="0" rIns="0" bIns="0" rtlCol="0" anchor="ctr"/>
           <a:lstStyle/>
           <a:p>
-            <a:pPr indent="0" marL="0">
+            <a:pPr marL="0" indent="0">
               <a:buNone/>
             </a:pPr>
             <a:r>
@@ -17360,9 +16888,6 @@
               </a:rPr>
               <a:t>▸ </a:t>
             </a:r>
-            <a:pPr indent="0" marL="0">
-              <a:buNone/>
-            </a:pPr>
             <a:r>
               <a:rPr lang="en-US" sz="1250" dirty="0">
                 <a:solidFill>
@@ -17402,7 +16927,7 @@
             <a:prstDash val="solid"/>
           </a:ln>
           <a:effectLst>
-            <a:outerShdw sx="100000" sy="100000" kx="0" ky="0" algn="bl" rotWithShape="0" blurRad="76200" dist="25400" dir="8100000">
+            <a:outerShdw blurRad="76200" dist="25400" dir="8100000" algn="bl" rotWithShape="0">
               <a:srgbClr val="000000">
                 <a:alpha val="15000"/>
               </a:srgbClr>
@@ -17456,7 +16981,7 @@
           <a:bodyPr wrap="square" lIns="0" tIns="0" rIns="0" bIns="0" rtlCol="0" anchor="ctr"/>
           <a:lstStyle/>
           <a:p>
-            <a:pPr indent="0" marL="0">
+            <a:pPr marL="0" indent="0">
               <a:buNone/>
             </a:pPr>
             <a:r>
@@ -17495,7 +17020,7 @@
           <a:bodyPr wrap="square" lIns="0" tIns="0" rIns="0" bIns="0" rtlCol="0" anchor="ctr"/>
           <a:lstStyle/>
           <a:p>
-            <a:pPr indent="0" marL="0">
+            <a:pPr marL="0" indent="0">
               <a:buNone/>
             </a:pPr>
             <a:r>
@@ -17509,9 +17034,6 @@
               </a:rPr>
               <a:t>▸ </a:t>
             </a:r>
-            <a:pPr indent="0" marL="0">
-              <a:buNone/>
-            </a:pPr>
             <a:r>
               <a:rPr lang="en-US" sz="1250" dirty="0">
                 <a:solidFill>
@@ -17548,7 +17070,7 @@
           <a:bodyPr wrap="square" lIns="0" tIns="0" rIns="0" bIns="0" rtlCol="0" anchor="ctr"/>
           <a:lstStyle/>
           <a:p>
-            <a:pPr indent="0" marL="0">
+            <a:pPr marL="0" indent="0">
               <a:buNone/>
             </a:pPr>
             <a:r>
@@ -17562,9 +17084,6 @@
               </a:rPr>
               <a:t>▸ </a:t>
             </a:r>
-            <a:pPr indent="0" marL="0">
-              <a:buNone/>
-            </a:pPr>
             <a:r>
               <a:rPr lang="en-US" sz="1250" dirty="0">
                 <a:solidFill>
@@ -17601,7 +17120,7 @@
           <a:bodyPr wrap="square" lIns="0" tIns="0" rIns="0" bIns="0" rtlCol="0" anchor="ctr"/>
           <a:lstStyle/>
           <a:p>
-            <a:pPr indent="0" marL="0">
+            <a:pPr marL="0" indent="0">
               <a:buNone/>
             </a:pPr>
             <a:r>
@@ -17615,9 +17134,6 @@
               </a:rPr>
               <a:t>▸ </a:t>
             </a:r>
-            <a:pPr indent="0" marL="0">
-              <a:buNone/>
-            </a:pPr>
             <a:r>
               <a:rPr lang="en-US" sz="1250" dirty="0">
                 <a:solidFill>
@@ -17654,7 +17170,7 @@
           <a:bodyPr wrap="square" lIns="0" tIns="0" rIns="0" bIns="0" rtlCol="0" anchor="ctr"/>
           <a:lstStyle/>
           <a:p>
-            <a:pPr indent="0" marL="0">
+            <a:pPr marL="0" indent="0">
               <a:buNone/>
             </a:pPr>
             <a:r>
@@ -17668,9 +17184,6 @@
               </a:rPr>
               <a:t>▸ </a:t>
             </a:r>
-            <a:pPr indent="0" marL="0">
-              <a:buNone/>
-            </a:pPr>
             <a:r>
               <a:rPr lang="en-US" sz="1250" dirty="0">
                 <a:solidFill>
@@ -17707,7 +17220,7 @@
           <a:bodyPr wrap="square" lIns="0" tIns="0" rIns="0" bIns="0" rtlCol="0" anchor="ctr"/>
           <a:lstStyle/>
           <a:p>
-            <a:pPr indent="0" marL="0">
+            <a:pPr marL="0" indent="0">
               <a:buNone/>
             </a:pPr>
             <a:r>
@@ -17721,9 +17234,6 @@
               </a:rPr>
               <a:t>▸ </a:t>
             </a:r>
-            <a:pPr indent="0" marL="0">
-              <a:buNone/>
-            </a:pPr>
             <a:r>
               <a:rPr lang="en-US" sz="1250" dirty="0">
                 <a:solidFill>
@@ -17760,7 +17270,7 @@
           <a:bodyPr wrap="square" lIns="0" tIns="0" rIns="0" bIns="0" rtlCol="0" anchor="ctr"/>
           <a:lstStyle/>
           <a:p>
-            <a:pPr indent="0" marL="0">
+            <a:pPr marL="0" indent="0">
               <a:buNone/>
             </a:pPr>
             <a:r>
@@ -17774,9 +17284,6 @@
               </a:rPr>
               <a:t>▸ </a:t>
             </a:r>
-            <a:pPr indent="0" marL="0">
-              <a:buNone/>
-            </a:pPr>
             <a:r>
               <a:rPr lang="en-US" sz="1250" dirty="0">
                 <a:solidFill>
@@ -17863,7 +17370,7 @@
           <a:bodyPr wrap="square" lIns="0" tIns="0" rIns="0" bIns="0" rtlCol="0" anchor="ctr"/>
           <a:lstStyle/>
           <a:p>
-            <a:pPr indent="0" marL="0">
+            <a:pPr marL="0" indent="0">
               <a:buNone/>
             </a:pPr>
             <a:r>
@@ -17897,6 +17404,7 @@
         <a:solidFill>
           <a:srgbClr val="F0FDF4"/>
         </a:solidFill>
+        <a:effectLst/>
       </p:bgPr>
     </p:bg>
     <p:spTree>
@@ -17984,7 +17492,7 @@
           <a:bodyPr wrap="square" lIns="0" tIns="0" rIns="0" bIns="0" rtlCol="0" anchor="ctr"/>
           <a:lstStyle/>
           <a:p>
-            <a:pPr indent="0" marL="0">
+            <a:pPr marL="0" indent="0">
               <a:buNone/>
             </a:pPr>
             <a:r>
@@ -18023,7 +17531,7 @@
           <a:bodyPr wrap="square" lIns="0" tIns="0" rIns="0" bIns="0" rtlCol="0" anchor="ctr"/>
           <a:lstStyle/>
           <a:p>
-            <a:pPr indent="0" marL="0">
+            <a:pPr marL="0" indent="0">
               <a:buNone/>
             </a:pPr>
             <a:r>
@@ -18050,7 +17558,7 @@
         <p:spPr>
           <a:xfrm>
             <a:off x="201168" y="1353312"/>
-            <a:ext cx="8741664" cy="2688336"/>
+            <a:ext cx="8741664" cy="2820924"/>
           </a:xfrm>
           <a:prstGeom prst="rect">
             <a:avLst/>
@@ -18065,7 +17573,7 @@
             <a:prstDash val="solid"/>
           </a:ln>
           <a:effectLst>
-            <a:outerShdw sx="100000" sy="100000" kx="0" ky="0" algn="bl" rotWithShape="0" blurRad="76200" dist="25400" dir="8100000">
+            <a:outerShdw blurRad="76200" dist="25400" dir="8100000" algn="bl" rotWithShape="0">
               <a:srgbClr val="000000">
                 <a:alpha val="18000"/>
               </a:srgbClr>
@@ -18119,7 +17627,7 @@
           <a:bodyPr wrap="square" lIns="0" tIns="0" rIns="0" bIns="0" rtlCol="0" anchor="t"/>
           <a:lstStyle/>
           <a:p>
-            <a:pPr indent="0" marL="0">
+            <a:pPr marL="0" indent="0">
               <a:buNone/>
             </a:pPr>
             <a:r>
@@ -18136,7 +17644,7 @@
             <a:endParaRPr lang="en-US" sz="1250" dirty="0"/>
           </a:p>
           <a:p>
-            <a:pPr indent="0" marL="0">
+            <a:pPr marL="0" indent="0">
               <a:buNone/>
             </a:pPr>
             <a:r>
@@ -18153,7 +17661,7 @@
             <a:endParaRPr lang="en-US" sz="1250" dirty="0"/>
           </a:p>
           <a:p>
-            <a:pPr indent="0" marL="0">
+            <a:pPr marL="0" indent="0">
               <a:buNone/>
             </a:pPr>
             <a:r>
@@ -18170,7 +17678,7 @@
             <a:endParaRPr lang="en-US" sz="1250" dirty="0"/>
           </a:p>
           <a:p>
-            <a:pPr indent="0" marL="0">
+            <a:pPr marL="0" indent="0">
               <a:buNone/>
             </a:pPr>
             <a:r>
@@ -18187,13 +17695,13 @@
             <a:endParaRPr lang="en-US" sz="1250" dirty="0"/>
           </a:p>
           <a:p>
-            <a:pPr indent="0" marL="0">
+            <a:pPr marL="0" indent="0">
               <a:buNone/>
             </a:pPr>
             <a:endParaRPr lang="en-US" sz="1250" dirty="0"/>
           </a:p>
           <a:p>
-            <a:pPr indent="0" marL="0">
+            <a:pPr marL="0" indent="0">
               <a:buNone/>
             </a:pPr>
             <a:r>
@@ -18210,7 +17718,7 @@
             <a:endParaRPr lang="en-US" sz="1250" dirty="0"/>
           </a:p>
           <a:p>
-            <a:pPr indent="0" marL="0">
+            <a:pPr marL="0" indent="0">
               <a:buNone/>
             </a:pPr>
             <a:r>
@@ -18227,7 +17735,7 @@
             <a:endParaRPr lang="en-US" sz="1250" dirty="0"/>
           </a:p>
           <a:p>
-            <a:pPr indent="0" marL="0">
+            <a:pPr marL="0" indent="0">
               <a:buNone/>
             </a:pPr>
             <a:r>
@@ -18244,7 +17752,7 @@
             <a:endParaRPr lang="en-US" sz="1250" dirty="0"/>
           </a:p>
           <a:p>
-            <a:pPr indent="0" marL="0">
+            <a:pPr marL="0" indent="0">
               <a:buNone/>
             </a:pPr>
             <a:r>
@@ -18261,7 +17769,7 @@
             <a:endParaRPr lang="en-US" sz="1250" dirty="0"/>
           </a:p>
           <a:p>
-            <a:pPr indent="0" marL="0">
+            <a:pPr marL="0" indent="0">
               <a:buNone/>
             </a:pPr>
             <a:r>
@@ -18278,13 +17786,13 @@
             <a:endParaRPr lang="en-US" sz="1250" dirty="0"/>
           </a:p>
           <a:p>
-            <a:pPr indent="0" marL="0">
+            <a:pPr marL="0" indent="0">
               <a:buNone/>
             </a:pPr>
             <a:endParaRPr lang="en-US" sz="1250" dirty="0"/>
           </a:p>
           <a:p>
-            <a:pPr indent="0" marL="0">
+            <a:pPr marL="0" indent="0">
               <a:buNone/>
             </a:pPr>
             <a:r>
@@ -18301,7 +17809,7 @@
             <a:endParaRPr lang="en-US" sz="1250" dirty="0"/>
           </a:p>
           <a:p>
-            <a:pPr indent="0" marL="0">
+            <a:pPr marL="0" indent="0">
               <a:buNone/>
             </a:pPr>
             <a:r>
@@ -18318,7 +17826,7 @@
             <a:endParaRPr lang="en-US" sz="1250" dirty="0"/>
           </a:p>
           <a:p>
-            <a:pPr indent="0" marL="0">
+            <a:pPr marL="0" indent="0">
               <a:buNone/>
             </a:pPr>
             <a:r>
@@ -18384,7 +17892,7 @@
           <a:bodyPr wrap="square" lIns="0" tIns="0" rIns="0" bIns="0" rtlCol="0" anchor="ctr"/>
           <a:lstStyle/>
           <a:p>
-            <a:pPr indent="0" marL="0">
+            <a:pPr marL="0" indent="0">
               <a:buNone/>
             </a:pPr>
             <a:r>
@@ -18473,7 +17981,7 @@
           <a:bodyPr wrap="square" lIns="0" tIns="0" rIns="0" bIns="0" rtlCol="0" anchor="ctr"/>
           <a:lstStyle/>
           <a:p>
-            <a:pPr indent="0" marL="0">
+            <a:pPr marL="0" indent="0">
               <a:buNone/>
             </a:pPr>
             <a:r>
@@ -18507,6 +18015,7 @@
         <a:solidFill>
           <a:srgbClr val="0D2218"/>
         </a:solidFill>
+        <a:effectLst/>
       </p:bgPr>
     </p:bg>
     <p:spTree>
@@ -18596,7 +18105,7 @@
           <a:bodyPr wrap="square" rtlCol="0" anchor="ctr"/>
           <a:lstStyle/>
           <a:p>
-            <a:pPr indent="0" marL="0">
+            <a:pPr marL="0" indent="0">
               <a:buNone/>
             </a:pPr>
             <a:r>
@@ -18635,11 +18144,11 @@
           <a:bodyPr wrap="square" rtlCol="0" anchor="ctr"/>
           <a:lstStyle/>
           <a:p>
-            <a:pPr indent="0" marL="0">
-              <a:buNone/>
-            </a:pPr>
-            <a:r>
-              <a:rPr lang="en-US" sz="1100" b="1" spc="400" kern="0" dirty="0">
+            <a:pPr marL="0" indent="0">
+              <a:buNone/>
+            </a:pPr>
+            <a:r>
+              <a:rPr lang="en-US" sz="1100" b="1" kern="0" spc="400" dirty="0">
                 <a:solidFill>
                   <a:srgbClr val="86EFAC"/>
                 </a:solidFill>
@@ -18674,7 +18183,7 @@
           <a:bodyPr wrap="square" rtlCol="0" anchor="ctr"/>
           <a:lstStyle/>
           <a:p>
-            <a:pPr indent="0" marL="0">
+            <a:pPr marL="0" indent="0">
               <a:buNone/>
             </a:pPr>
             <a:r>
@@ -18713,7 +18222,7 @@
           <a:bodyPr wrap="square" rtlCol="0" anchor="ctr"/>
           <a:lstStyle/>
           <a:p>
-            <a:pPr indent="0" marL="0">
+            <a:pPr marL="0" indent="0">
               <a:buNone/>
             </a:pPr>
             <a:r>
@@ -18752,7 +18261,7 @@
           <a:bodyPr wrap="square" rtlCol="0" anchor="ctr"/>
           <a:lstStyle/>
           <a:p>
-            <a:pPr indent="0" marL="0">
+            <a:pPr marL="0" indent="0">
               <a:buNone/>
             </a:pPr>
             <a:r>
@@ -18786,6 +18295,7 @@
         <a:solidFill>
           <a:srgbClr val="0C1A2E"/>
         </a:solidFill>
+        <a:effectLst/>
       </p:bgPr>
     </p:bg>
     <p:spTree>
@@ -18898,11 +18408,11 @@
           <a:bodyPr wrap="square" lIns="0" tIns="0" rIns="0" bIns="0" rtlCol="0" anchor="ctr"/>
           <a:lstStyle/>
           <a:p>
-            <a:pPr algn="ctr" indent="0" marL="0">
-              <a:buNone/>
-            </a:pPr>
-            <a:r>
-              <a:rPr lang="en-US" sz="1000" b="1" spc="200" kern="0" dirty="0">
+            <a:pPr marL="0" indent="0" algn="ctr">
+              <a:buNone/>
+            </a:pPr>
+            <a:r>
+              <a:rPr lang="en-US" sz="1000" b="1" kern="0" spc="200" dirty="0">
                 <a:solidFill>
                   <a:srgbClr val="FFFFFF"/>
                 </a:solidFill>
@@ -18937,7 +18447,7 @@
           <a:bodyPr wrap="square" lIns="0" tIns="0" rIns="0" bIns="0" rtlCol="0" anchor="ctr"/>
           <a:lstStyle/>
           <a:p>
-            <a:pPr indent="0" marL="0">
+            <a:pPr marL="0" indent="0">
               <a:buNone/>
             </a:pPr>
             <a:r>
@@ -18976,7 +18486,7 @@
           <a:bodyPr wrap="square" rtlCol="0" anchor="ctr"/>
           <a:lstStyle/>
           <a:p>
-            <a:pPr indent="0" marL="0">
+            <a:pPr marL="0" indent="0">
               <a:buNone/>
             </a:pPr>
             <a:r>
@@ -19042,7 +18552,7 @@
           <a:bodyPr wrap="square" lIns="0" tIns="0" rIns="0" bIns="0" rtlCol="0" anchor="ctr"/>
           <a:lstStyle/>
           <a:p>
-            <a:pPr indent="0" marL="0">
+            <a:pPr marL="0" indent="0">
               <a:buNone/>
             </a:pPr>
             <a:r>
@@ -19056,9 +18566,6 @@
               </a:rPr>
               <a:t>▶ </a:t>
             </a:r>
-            <a:pPr indent="0" marL="0">
-              <a:buNone/>
-            </a:pPr>
             <a:r>
               <a:rPr lang="en-US" sz="1250" b="1" dirty="0">
                 <a:solidFill>
@@ -19095,7 +18602,7 @@
           <a:bodyPr wrap="square" lIns="0" tIns="0" rIns="0" bIns="0" rtlCol="0" anchor="ctr"/>
           <a:lstStyle/>
           <a:p>
-            <a:pPr indent="0" marL="0">
+            <a:pPr marL="0" indent="0">
               <a:buNone/>
             </a:pPr>
             <a:r>
@@ -19109,9 +18616,6 @@
               </a:rPr>
               <a:t>▶ </a:t>
             </a:r>
-            <a:pPr indent="0" marL="0">
-              <a:buNone/>
-            </a:pPr>
             <a:r>
               <a:rPr lang="en-US" sz="1250" dirty="0">
                 <a:solidFill>
@@ -19148,7 +18652,7 @@
           <a:bodyPr wrap="square" lIns="0" tIns="0" rIns="0" bIns="0" rtlCol="0" anchor="ctr"/>
           <a:lstStyle/>
           <a:p>
-            <a:pPr indent="0" marL="0">
+            <a:pPr marL="0" indent="0">
               <a:buNone/>
             </a:pPr>
             <a:r>
@@ -19162,9 +18666,6 @@
               </a:rPr>
               <a:t>▶ </a:t>
             </a:r>
-            <a:pPr indent="0" marL="0">
-              <a:buNone/>
-            </a:pPr>
             <a:r>
               <a:rPr lang="en-US" sz="1250" dirty="0">
                 <a:solidFill>
@@ -19201,7 +18702,7 @@
           <a:bodyPr wrap="square" lIns="0" tIns="0" rIns="0" bIns="0" rtlCol="0" anchor="ctr"/>
           <a:lstStyle/>
           <a:p>
-            <a:pPr indent="0" marL="0">
+            <a:pPr marL="0" indent="0">
               <a:buNone/>
             </a:pPr>
             <a:r>
@@ -19215,9 +18716,6 @@
               </a:rPr>
               <a:t>▶ </a:t>
             </a:r>
-            <a:pPr indent="0" marL="0">
-              <a:buNone/>
-            </a:pPr>
             <a:r>
               <a:rPr lang="en-US" sz="1250" dirty="0">
                 <a:solidFill>
@@ -19279,7 +18777,7 @@
           <a:bodyPr wrap="square" lIns="0" tIns="0" rIns="0" bIns="0" rtlCol="0" anchor="ctr"/>
           <a:lstStyle/>
           <a:p>
-            <a:pPr indent="0" marL="0">
+            <a:pPr marL="0" indent="0">
               <a:buNone/>
             </a:pPr>
             <a:r>
@@ -19343,7 +18841,7 @@
           <a:bodyPr wrap="square" lIns="0" tIns="0" rIns="0" bIns="0" rtlCol="0" anchor="ctr"/>
           <a:lstStyle/>
           <a:p>
-            <a:pPr indent="0" marL="0">
+            <a:pPr marL="0" indent="0">
               <a:buNone/>
             </a:pPr>
             <a:r>
@@ -19409,7 +18907,7 @@
           <a:bodyPr wrap="square" lIns="0" tIns="0" rIns="0" bIns="0" rtlCol="0" anchor="ctr"/>
           <a:lstStyle/>
           <a:p>
-            <a:pPr indent="0" marL="0">
+            <a:pPr marL="0" indent="0">
               <a:buNone/>
             </a:pPr>
             <a:r>
@@ -19473,7 +18971,7 @@
           <a:bodyPr wrap="square" lIns="0" tIns="0" rIns="0" bIns="0" rtlCol="0" anchor="ctr"/>
           <a:lstStyle/>
           <a:p>
-            <a:pPr indent="0" marL="0">
+            <a:pPr marL="0" indent="0">
               <a:buNone/>
             </a:pPr>
             <a:r>
@@ -19507,6 +19005,7 @@
         <a:solidFill>
           <a:srgbClr val="0C1A2E"/>
         </a:solidFill>
+        <a:effectLst/>
       </p:bgPr>
     </p:bg>
     <p:spTree>
@@ -19619,11 +19118,11 @@
           <a:bodyPr wrap="square" lIns="0" tIns="0" rIns="0" bIns="0" rtlCol="0" anchor="ctr"/>
           <a:lstStyle/>
           <a:p>
-            <a:pPr algn="ctr" indent="0" marL="0">
-              <a:buNone/>
-            </a:pPr>
-            <a:r>
-              <a:rPr lang="en-US" sz="1000" b="1" spc="200" kern="0" dirty="0">
+            <a:pPr marL="0" indent="0" algn="ctr">
+              <a:buNone/>
+            </a:pPr>
+            <a:r>
+              <a:rPr lang="en-US" sz="1000" b="1" kern="0" spc="200" dirty="0">
                 <a:solidFill>
                   <a:srgbClr val="FFFFFF"/>
                 </a:solidFill>
@@ -19658,7 +19157,7 @@
           <a:bodyPr wrap="square" lIns="0" tIns="0" rIns="0" bIns="0" rtlCol="0" anchor="ctr"/>
           <a:lstStyle/>
           <a:p>
-            <a:pPr indent="0" marL="0">
+            <a:pPr marL="0" indent="0">
               <a:buNone/>
             </a:pPr>
             <a:r>
@@ -19697,7 +19196,7 @@
           <a:bodyPr wrap="square" rtlCol="0" anchor="ctr"/>
           <a:lstStyle/>
           <a:p>
-            <a:pPr indent="0" marL="0">
+            <a:pPr marL="0" indent="0">
               <a:buNone/>
             </a:pPr>
             <a:r>
@@ -19763,7 +19262,7 @@
           <a:bodyPr wrap="square" lIns="0" tIns="0" rIns="0" bIns="0" rtlCol="0" anchor="ctr"/>
           <a:lstStyle/>
           <a:p>
-            <a:pPr indent="0" marL="0">
+            <a:pPr marL="0" indent="0">
               <a:buNone/>
             </a:pPr>
             <a:r>
@@ -19777,9 +19276,6 @@
               </a:rPr>
               <a:t>▶ </a:t>
             </a:r>
-            <a:pPr indent="0" marL="0">
-              <a:buNone/>
-            </a:pPr>
             <a:r>
               <a:rPr lang="en-US" sz="1250" b="1" dirty="0">
                 <a:solidFill>
@@ -19816,7 +19312,7 @@
           <a:bodyPr wrap="square" lIns="0" tIns="0" rIns="0" bIns="0" rtlCol="0" anchor="ctr"/>
           <a:lstStyle/>
           <a:p>
-            <a:pPr indent="0" marL="0">
+            <a:pPr marL="0" indent="0">
               <a:buNone/>
             </a:pPr>
             <a:r>
@@ -19830,9 +19326,6 @@
               </a:rPr>
               <a:t>▶ </a:t>
             </a:r>
-            <a:pPr indent="0" marL="0">
-              <a:buNone/>
-            </a:pPr>
             <a:r>
               <a:rPr lang="en-US" sz="1250" dirty="0">
                 <a:solidFill>
@@ -19869,7 +19362,7 @@
           <a:bodyPr wrap="square" lIns="0" tIns="0" rIns="0" bIns="0" rtlCol="0" anchor="ctr"/>
           <a:lstStyle/>
           <a:p>
-            <a:pPr indent="0" marL="0">
+            <a:pPr marL="0" indent="0">
               <a:buNone/>
             </a:pPr>
             <a:r>
@@ -19883,9 +19376,6 @@
               </a:rPr>
               <a:t>▶ </a:t>
             </a:r>
-            <a:pPr indent="0" marL="0">
-              <a:buNone/>
-            </a:pPr>
             <a:r>
               <a:rPr lang="en-US" sz="1250" dirty="0">
                 <a:solidFill>
@@ -19947,7 +19437,7 @@
           <a:bodyPr wrap="square" lIns="0" tIns="0" rIns="0" bIns="0" rtlCol="0" anchor="ctr"/>
           <a:lstStyle/>
           <a:p>
-            <a:pPr indent="0" marL="0">
+            <a:pPr marL="0" indent="0">
               <a:buNone/>
             </a:pPr>
             <a:r>
@@ -20011,7 +19501,7 @@
           <a:bodyPr wrap="square" lIns="0" tIns="0" rIns="0" bIns="0" rtlCol="0" anchor="ctr"/>
           <a:lstStyle/>
           <a:p>
-            <a:pPr indent="0" marL="0">
+            <a:pPr marL="0" indent="0">
               <a:buNone/>
             </a:pPr>
             <a:r>
@@ -20077,7 +19567,7 @@
           <a:bodyPr wrap="square" lIns="0" tIns="0" rIns="0" bIns="0" rtlCol="0" anchor="ctr"/>
           <a:lstStyle/>
           <a:p>
-            <a:pPr indent="0" marL="0">
+            <a:pPr marL="0" indent="0">
               <a:buNone/>
             </a:pPr>
             <a:r>
@@ -20141,7 +19631,7 @@
           <a:bodyPr wrap="square" lIns="0" tIns="0" rIns="0" bIns="0" rtlCol="0" anchor="ctr"/>
           <a:lstStyle/>
           <a:p>
-            <a:pPr indent="0" marL="0">
+            <a:pPr marL="0" indent="0">
               <a:buNone/>
             </a:pPr>
             <a:r>
@@ -20175,6 +19665,7 @@
         <a:solidFill>
           <a:srgbClr val="0D2218"/>
         </a:solidFill>
+        <a:effectLst/>
       </p:bgPr>
     </p:bg>
     <p:spTree>
@@ -20264,7 +19755,7 @@
           <a:bodyPr wrap="square" rtlCol="0" anchor="ctr"/>
           <a:lstStyle/>
           <a:p>
-            <a:pPr indent="0" marL="0">
+            <a:pPr marL="0" indent="0">
               <a:buNone/>
             </a:pPr>
             <a:r>
@@ -20303,11 +19794,11 @@
           <a:bodyPr wrap="square" rtlCol="0" anchor="ctr"/>
           <a:lstStyle/>
           <a:p>
-            <a:pPr indent="0" marL="0">
-              <a:buNone/>
-            </a:pPr>
-            <a:r>
-              <a:rPr lang="en-US" sz="1100" b="1" spc="400" kern="0" dirty="0">
+            <a:pPr marL="0" indent="0">
+              <a:buNone/>
+            </a:pPr>
+            <a:r>
+              <a:rPr lang="en-US" sz="1100" b="1" kern="0" spc="400" dirty="0">
                 <a:solidFill>
                   <a:srgbClr val="86EFAC"/>
                 </a:solidFill>
@@ -20342,7 +19833,7 @@
           <a:bodyPr wrap="square" rtlCol="0" anchor="ctr"/>
           <a:lstStyle/>
           <a:p>
-            <a:pPr indent="0" marL="0">
+            <a:pPr marL="0" indent="0">
               <a:buNone/>
             </a:pPr>
             <a:r>
@@ -20381,7 +19872,7 @@
           <a:bodyPr wrap="square" rtlCol="0" anchor="ctr"/>
           <a:lstStyle/>
           <a:p>
-            <a:pPr indent="0" marL="0">
+            <a:pPr marL="0" indent="0">
               <a:buNone/>
             </a:pPr>
             <a:r>
@@ -20420,7 +19911,7 @@
           <a:bodyPr wrap="square" rtlCol="0" anchor="ctr"/>
           <a:lstStyle/>
           <a:p>
-            <a:pPr indent="0" marL="0">
+            <a:pPr marL="0" indent="0">
               <a:buNone/>
             </a:pPr>
             <a:r>
@@ -20454,6 +19945,7 @@
         <a:solidFill>
           <a:srgbClr val="F0FDF4"/>
         </a:solidFill>
+        <a:effectLst/>
       </p:bgPr>
     </p:bg>
     <p:spTree>
@@ -20541,7 +20033,7 @@
           <a:bodyPr wrap="square" lIns="0" tIns="0" rIns="0" bIns="0" rtlCol="0" anchor="ctr"/>
           <a:lstStyle/>
           <a:p>
-            <a:pPr indent="0" marL="0">
+            <a:pPr marL="0" indent="0">
               <a:buNone/>
             </a:pPr>
             <a:r>
@@ -20580,7 +20072,7 @@
           <a:bodyPr wrap="square" lIns="0" tIns="0" rIns="0" bIns="0" rtlCol="0" anchor="ctr"/>
           <a:lstStyle/>
           <a:p>
-            <a:pPr indent="0" marL="0">
+            <a:pPr marL="0" indent="0">
               <a:buNone/>
             </a:pPr>
             <a:r>
@@ -20594,9 +20086,6 @@
               </a:rPr>
               <a:t>◈ </a:t>
             </a:r>
-            <a:pPr indent="0" marL="0">
-              <a:buNone/>
-            </a:pPr>
             <a:r>
               <a:rPr lang="en-US" sz="1300" b="1" dirty="0">
                 <a:solidFill>
@@ -20633,7 +20122,7 @@
           <a:bodyPr wrap="square" lIns="0" tIns="0" rIns="0" bIns="0" rtlCol="0" anchor="ctr"/>
           <a:lstStyle/>
           <a:p>
-            <a:pPr indent="0" marL="0">
+            <a:pPr marL="0" indent="0">
               <a:buNone/>
             </a:pPr>
             <a:r>
@@ -20647,9 +20136,6 @@
               </a:rPr>
               <a:t>◈ </a:t>
             </a:r>
-            <a:pPr indent="0" marL="0">
-              <a:buNone/>
-            </a:pPr>
             <a:r>
               <a:rPr lang="en-US" sz="1300" b="1" dirty="0">
                 <a:solidFill>
@@ -20686,7 +20172,7 @@
           <a:bodyPr wrap="square" lIns="0" tIns="0" rIns="0" bIns="0" rtlCol="0" anchor="ctr"/>
           <a:lstStyle/>
           <a:p>
-            <a:pPr indent="0" marL="0">
+            <a:pPr marL="0" indent="0">
               <a:buNone/>
             </a:pPr>
             <a:r>
@@ -20725,7 +20211,7 @@
           <a:bodyPr wrap="square" lIns="0" tIns="0" rIns="0" bIns="0" rtlCol="0" anchor="ctr"/>
           <a:lstStyle/>
           <a:p>
-            <a:pPr indent="0" marL="0">
+            <a:pPr marL="0" indent="0">
               <a:buNone/>
             </a:pPr>
             <a:r>
@@ -20739,9 +20225,6 @@
               </a:rPr>
               <a:t>◈ </a:t>
             </a:r>
-            <a:pPr indent="0" marL="0">
-              <a:buNone/>
-            </a:pPr>
             <a:r>
               <a:rPr lang="en-US" sz="1300" b="1" dirty="0">
                 <a:solidFill>
@@ -20803,7 +20286,7 @@
           <a:bodyPr wrap="square" lIns="0" tIns="0" rIns="0" bIns="0" rtlCol="0" anchor="ctr"/>
           <a:lstStyle/>
           <a:p>
-            <a:pPr indent="0" marL="0">
+            <a:pPr marL="0" indent="0">
               <a:buNone/>
             </a:pPr>
             <a:r>
@@ -20842,7 +20325,7 @@
           <a:bodyPr wrap="square" lIns="0" tIns="0" rIns="0" bIns="0" rtlCol="0" anchor="ctr"/>
           <a:lstStyle/>
           <a:p>
-            <a:pPr indent="0" marL="0">
+            <a:pPr marL="0" indent="0">
               <a:buNone/>
             </a:pPr>
             <a:r>
@@ -20856,9 +20339,6 @@
               </a:rPr>
               <a:t>◈ </a:t>
             </a:r>
-            <a:pPr indent="0" marL="0">
-              <a:buNone/>
-            </a:pPr>
             <a:r>
               <a:rPr lang="en-US" sz="1300" dirty="0">
                 <a:solidFill>
@@ -20922,7 +20402,7 @@
           <a:bodyPr wrap="square" lIns="0" tIns="0" rIns="0" bIns="0" rtlCol="0" anchor="ctr"/>
           <a:lstStyle/>
           <a:p>
-            <a:pPr indent="0" marL="0">
+            <a:pPr marL="0" indent="0">
               <a:buNone/>
             </a:pPr>
             <a:r>
@@ -21011,7 +20491,7 @@
           <a:bodyPr wrap="square" lIns="0" tIns="0" rIns="0" bIns="0" rtlCol="0" anchor="ctr"/>
           <a:lstStyle/>
           <a:p>
-            <a:pPr indent="0" marL="0">
+            <a:pPr marL="0" indent="0">
               <a:buNone/>
             </a:pPr>
             <a:r>
@@ -21045,6 +20525,7 @@
         <a:solidFill>
           <a:srgbClr val="F0FDF4"/>
         </a:solidFill>
+        <a:effectLst/>
       </p:bgPr>
     </p:bg>
     <p:spTree>
@@ -21132,7 +20613,7 @@
           <a:bodyPr wrap="square" lIns="0" tIns="0" rIns="0" bIns="0" rtlCol="0" anchor="ctr"/>
           <a:lstStyle/>
           <a:p>
-            <a:pPr indent="0" marL="0">
+            <a:pPr marL="0" indent="0">
               <a:buNone/>
             </a:pPr>
             <a:r>
@@ -21158,7 +20639,7 @@
         </p:nvSpPr>
         <p:spPr>
           <a:xfrm>
-            <a:off x="256032" y="969264"/>
+            <a:off x="283464" y="890806"/>
             <a:ext cx="8631936" cy="347472"/>
           </a:xfrm>
           <a:prstGeom prst="rect">
@@ -21171,7 +20652,7 @@
           <a:bodyPr wrap="square" lIns="0" tIns="0" rIns="0" bIns="0" rtlCol="0" anchor="ctr"/>
           <a:lstStyle/>
           <a:p>
-            <a:pPr indent="0" marL="0">
+            <a:pPr marL="0" indent="0">
               <a:buNone/>
             </a:pPr>
             <a:r>
@@ -21197,8 +20678,8 @@
         </p:nvSpPr>
         <p:spPr>
           <a:xfrm>
-            <a:off x="201168" y="1353312"/>
-            <a:ext cx="8741664" cy="2688336"/>
+            <a:off x="201168" y="1175004"/>
+            <a:ext cx="8741664" cy="2935224"/>
           </a:xfrm>
           <a:prstGeom prst="rect">
             <a:avLst/>
@@ -21213,7 +20694,7 @@
             <a:prstDash val="solid"/>
           </a:ln>
           <a:effectLst>
-            <a:outerShdw sx="100000" sy="100000" kx="0" ky="0" algn="bl" rotWithShape="0" blurRad="76200" dist="25400" dir="8100000">
+            <a:outerShdw blurRad="76200" dist="25400" dir="8100000" algn="bl" rotWithShape="0">
               <a:srgbClr val="000000">
                 <a:alpha val="18000"/>
               </a:srgbClr>
@@ -21267,7 +20748,7 @@
           <a:bodyPr wrap="square" lIns="0" tIns="0" rIns="0" bIns="0" rtlCol="0" anchor="t"/>
           <a:lstStyle/>
           <a:p>
-            <a:pPr indent="0" marL="0">
+            <a:pPr marL="0" indent="0">
               <a:buNone/>
             </a:pPr>
             <a:r>
@@ -21284,7 +20765,7 @@
             <a:endParaRPr lang="en-US" sz="1100" dirty="0"/>
           </a:p>
           <a:p>
-            <a:pPr indent="0" marL="0">
+            <a:pPr marL="0" indent="0">
               <a:buNone/>
             </a:pPr>
             <a:r>
@@ -21301,7 +20782,7 @@
             <a:endParaRPr lang="en-US" sz="1100" dirty="0"/>
           </a:p>
           <a:p>
-            <a:pPr indent="0" marL="0">
+            <a:pPr marL="0" indent="0">
               <a:buNone/>
             </a:pPr>
             <a:r>
@@ -21318,7 +20799,7 @@
             <a:endParaRPr lang="en-US" sz="1100" dirty="0"/>
           </a:p>
           <a:p>
-            <a:pPr indent="0" marL="0">
+            <a:pPr marL="0" indent="0">
               <a:buNone/>
             </a:pPr>
             <a:r>
@@ -21335,13 +20816,13 @@
             <a:endParaRPr lang="en-US" sz="1100" dirty="0"/>
           </a:p>
           <a:p>
-            <a:pPr indent="0" marL="0">
+            <a:pPr marL="0" indent="0">
               <a:buNone/>
             </a:pPr>
             <a:endParaRPr lang="en-US" sz="1100" dirty="0"/>
           </a:p>
           <a:p>
-            <a:pPr indent="0" marL="0">
+            <a:pPr marL="0" indent="0">
               <a:buNone/>
             </a:pPr>
             <a:r>
@@ -21358,7 +20839,7 @@
             <a:endParaRPr lang="en-US" sz="1100" dirty="0"/>
           </a:p>
           <a:p>
-            <a:pPr indent="0" marL="0">
+            <a:pPr marL="0" indent="0">
               <a:buNone/>
             </a:pPr>
             <a:r>
@@ -21375,7 +20856,7 @@
             <a:endParaRPr lang="en-US" sz="1100" dirty="0"/>
           </a:p>
           <a:p>
-            <a:pPr indent="0" marL="0">
+            <a:pPr marL="0" indent="0">
               <a:buNone/>
             </a:pPr>
             <a:r>
@@ -21392,7 +20873,7 @@
             <a:endParaRPr lang="en-US" sz="1100" dirty="0"/>
           </a:p>
           <a:p>
-            <a:pPr indent="0" marL="0">
+            <a:pPr marL="0" indent="0">
               <a:buNone/>
             </a:pPr>
             <a:r>
@@ -21409,7 +20890,7 @@
             <a:endParaRPr lang="en-US" sz="1100" dirty="0"/>
           </a:p>
           <a:p>
-            <a:pPr indent="0" marL="0">
+            <a:pPr marL="0" indent="0">
               <a:buNone/>
             </a:pPr>
             <a:r>
@@ -21426,7 +20907,7 @@
             <a:endParaRPr lang="en-US" sz="1100" dirty="0"/>
           </a:p>
           <a:p>
-            <a:pPr indent="0" marL="0">
+            <a:pPr marL="0" indent="0">
               <a:buNone/>
             </a:pPr>
             <a:r>
@@ -21443,7 +20924,7 @@
             <a:endParaRPr lang="en-US" sz="1100" dirty="0"/>
           </a:p>
           <a:p>
-            <a:pPr indent="0" marL="0">
+            <a:pPr marL="0" indent="0">
               <a:buNone/>
             </a:pPr>
             <a:r>
@@ -21460,7 +20941,7 @@
             <a:endParaRPr lang="en-US" sz="1100" dirty="0"/>
           </a:p>
           <a:p>
-            <a:pPr indent="0" marL="0">
+            <a:pPr marL="0" indent="0">
               <a:buNone/>
             </a:pPr>
             <a:r>
@@ -21477,13 +20958,7 @@
             <a:endParaRPr lang="en-US" sz="1100" dirty="0"/>
           </a:p>
           <a:p>
-            <a:pPr indent="0" marL="0">
-              <a:buNone/>
-            </a:pPr>
-            <a:endParaRPr lang="en-US" sz="1100" dirty="0"/>
-          </a:p>
-          <a:p>
-            <a:pPr indent="0" marL="0">
+            <a:pPr marL="0" indent="0">
               <a:buNone/>
             </a:pPr>
             <a:r>
@@ -21500,7 +20975,7 @@
             <a:endParaRPr lang="en-US" sz="1100" dirty="0"/>
           </a:p>
           <a:p>
-            <a:pPr indent="0" marL="0">
+            <a:pPr marL="0" indent="0">
               <a:buNone/>
             </a:pPr>
             <a:r>
@@ -21517,7 +20992,7 @@
             <a:endParaRPr lang="en-US" sz="1100" dirty="0"/>
           </a:p>
           <a:p>
-            <a:pPr indent="0" marL="0">
+            <a:pPr marL="0" indent="0">
               <a:buNone/>
             </a:pPr>
             <a:r>
@@ -21583,7 +21058,7 @@
           <a:bodyPr wrap="square" lIns="0" tIns="0" rIns="0" bIns="0" rtlCol="0" anchor="ctr"/>
           <a:lstStyle/>
           <a:p>
-            <a:pPr indent="0" marL="0">
+            <a:pPr marL="0" indent="0">
               <a:buNone/>
             </a:pPr>
             <a:r>
@@ -21672,7 +21147,7 @@
           <a:bodyPr wrap="square" lIns="0" tIns="0" rIns="0" bIns="0" rtlCol="0" anchor="ctr"/>
           <a:lstStyle/>
           <a:p>
-            <a:pPr indent="0" marL="0">
+            <a:pPr marL="0" indent="0">
               <a:buNone/>
             </a:pPr>
             <a:r>
@@ -21706,6 +21181,7 @@
         <a:solidFill>
           <a:srgbClr val="0D2218"/>
         </a:solidFill>
+        <a:effectLst/>
       </p:bgPr>
     </p:bg>
     <p:spTree>
@@ -21795,7 +21271,7 @@
           <a:bodyPr wrap="square" rtlCol="0" anchor="ctr"/>
           <a:lstStyle/>
           <a:p>
-            <a:pPr indent="0" marL="0">
+            <a:pPr marL="0" indent="0">
               <a:buNone/>
             </a:pPr>
             <a:r>
@@ -21834,11 +21310,11 @@
           <a:bodyPr wrap="square" rtlCol="0" anchor="ctr"/>
           <a:lstStyle/>
           <a:p>
-            <a:pPr indent="0" marL="0">
-              <a:buNone/>
-            </a:pPr>
-            <a:r>
-              <a:rPr lang="en-US" sz="1100" b="1" spc="400" kern="0" dirty="0">
+            <a:pPr marL="0" indent="0">
+              <a:buNone/>
+            </a:pPr>
+            <a:r>
+              <a:rPr lang="en-US" sz="1100" b="1" kern="0" spc="400" dirty="0">
                 <a:solidFill>
                   <a:srgbClr val="86EFAC"/>
                 </a:solidFill>
@@ -21873,7 +21349,7 @@
           <a:bodyPr wrap="square" rtlCol="0" anchor="ctr"/>
           <a:lstStyle/>
           <a:p>
-            <a:pPr indent="0" marL="0">
+            <a:pPr marL="0" indent="0">
               <a:buNone/>
             </a:pPr>
             <a:r>
@@ -21912,7 +21388,7 @@
           <a:bodyPr wrap="square" rtlCol="0" anchor="ctr"/>
           <a:lstStyle/>
           <a:p>
-            <a:pPr indent="0" marL="0">
+            <a:pPr marL="0" indent="0">
               <a:buNone/>
             </a:pPr>
             <a:r>
@@ -21951,7 +21427,7 @@
           <a:bodyPr wrap="square" rtlCol="0" anchor="ctr"/>
           <a:lstStyle/>
           <a:p>
-            <a:pPr indent="0" marL="0">
+            <a:pPr marL="0" indent="0">
               <a:buNone/>
             </a:pPr>
             <a:r>
@@ -21985,6 +21461,7 @@
         <a:solidFill>
           <a:srgbClr val="F0FDF4"/>
         </a:solidFill>
+        <a:effectLst/>
       </p:bgPr>
     </p:bg>
     <p:spTree>
@@ -22072,7 +21549,7 @@
           <a:bodyPr wrap="square" lIns="0" tIns="0" rIns="0" bIns="0" rtlCol="0" anchor="ctr"/>
           <a:lstStyle/>
           <a:p>
-            <a:pPr indent="0" marL="0">
+            <a:pPr marL="0" indent="0">
               <a:buNone/>
             </a:pPr>
             <a:r>
@@ -22111,7 +21588,7 @@
           <a:bodyPr wrap="square" lIns="0" tIns="0" rIns="0" bIns="0" rtlCol="0" anchor="ctr"/>
           <a:lstStyle/>
           <a:p>
-            <a:pPr indent="0" marL="0">
+            <a:pPr marL="0" indent="0">
               <a:buNone/>
             </a:pPr>
             <a:r>
@@ -22125,9 +21602,6 @@
               </a:rPr>
               <a:t>◈ </a:t>
             </a:r>
-            <a:pPr indent="0" marL="0">
-              <a:buNone/>
-            </a:pPr>
             <a:r>
               <a:rPr lang="en-US" sz="1300" b="1" dirty="0">
                 <a:solidFill>
@@ -22164,7 +21638,7 @@
           <a:bodyPr wrap="square" lIns="0" tIns="0" rIns="0" bIns="0" rtlCol="0" anchor="ctr"/>
           <a:lstStyle/>
           <a:p>
-            <a:pPr indent="0" marL="0">
+            <a:pPr marL="0" indent="0">
               <a:buNone/>
             </a:pPr>
             <a:r>
@@ -22178,9 +21652,6 @@
               </a:rPr>
               <a:t>◈ </a:t>
             </a:r>
-            <a:pPr indent="0" marL="0">
-              <a:buNone/>
-            </a:pPr>
             <a:r>
               <a:rPr lang="en-US" sz="1300" dirty="0">
                 <a:solidFill>
@@ -22217,7 +21688,7 @@
           <a:bodyPr wrap="square" lIns="0" tIns="0" rIns="0" bIns="0" rtlCol="0" anchor="ctr"/>
           <a:lstStyle/>
           <a:p>
-            <a:pPr indent="0" marL="0">
+            <a:pPr marL="0" indent="0">
               <a:buNone/>
             </a:pPr>
             <a:r>
@@ -22231,9 +21702,6 @@
               </a:rPr>
               <a:t>◈ </a:t>
             </a:r>
-            <a:pPr indent="0" marL="0">
-              <a:buNone/>
-            </a:pPr>
             <a:r>
               <a:rPr lang="en-US" sz="1300" dirty="0">
                 <a:solidFill>
@@ -22270,7 +21738,7 @@
           <a:bodyPr wrap="square" lIns="0" tIns="0" rIns="0" bIns="0" rtlCol="0" anchor="ctr"/>
           <a:lstStyle/>
           <a:p>
-            <a:pPr indent="0" marL="0">
+            <a:pPr marL="0" indent="0">
               <a:buNone/>
             </a:pPr>
             <a:r>
@@ -22284,9 +21752,6 @@
               </a:rPr>
               <a:t>◈ </a:t>
             </a:r>
-            <a:pPr indent="0" marL="0">
-              <a:buNone/>
-            </a:pPr>
             <a:r>
               <a:rPr lang="en-US" sz="1300" b="1" dirty="0">
                 <a:solidFill>
@@ -22323,7 +21788,7 @@
           <a:bodyPr wrap="square" lIns="0" tIns="0" rIns="0" bIns="0" rtlCol="0" anchor="ctr"/>
           <a:lstStyle/>
           <a:p>
-            <a:pPr indent="0" marL="0">
+            <a:pPr marL="0" indent="0">
               <a:buNone/>
             </a:pPr>
             <a:r>
@@ -22337,9 +21802,6 @@
               </a:rPr>
               <a:t>◈ </a:t>
             </a:r>
-            <a:pPr indent="0" marL="0">
-              <a:buNone/>
-            </a:pPr>
             <a:r>
               <a:rPr lang="en-US" sz="1300" dirty="0">
                 <a:solidFill>
@@ -22376,7 +21838,7 @@
           <a:bodyPr wrap="square" lIns="0" tIns="0" rIns="0" bIns="0" rtlCol="0" anchor="ctr"/>
           <a:lstStyle/>
           <a:p>
-            <a:pPr indent="0" marL="0">
+            <a:pPr marL="0" indent="0">
               <a:buNone/>
             </a:pPr>
             <a:r>
@@ -22390,9 +21852,6 @@
               </a:rPr>
               <a:t>◈ </a:t>
             </a:r>
-            <a:pPr indent="0" marL="0">
-              <a:buNone/>
-            </a:pPr>
             <a:r>
               <a:rPr lang="en-US" sz="1300" dirty="0">
                 <a:solidFill>
@@ -22456,7 +21915,7 @@
           <a:bodyPr wrap="square" lIns="0" tIns="0" rIns="0" bIns="0" rtlCol="0" anchor="ctr"/>
           <a:lstStyle/>
           <a:p>
-            <a:pPr indent="0" marL="0">
+            <a:pPr marL="0" indent="0">
               <a:buNone/>
             </a:pPr>
             <a:r>
@@ -22545,7 +22004,7 @@
           <a:bodyPr wrap="square" lIns="0" tIns="0" rIns="0" bIns="0" rtlCol="0" anchor="ctr"/>
           <a:lstStyle/>
           <a:p>
-            <a:pPr indent="0" marL="0">
+            <a:pPr marL="0" indent="0">
               <a:buNone/>
             </a:pPr>
             <a:r>
@@ -22579,6 +22038,7 @@
         <a:solidFill>
           <a:srgbClr val="F0FDF4"/>
         </a:solidFill>
+        <a:effectLst/>
       </p:bgPr>
     </p:bg>
     <p:spTree>
@@ -22666,7 +22126,7 @@
           <a:bodyPr wrap="square" lIns="0" tIns="0" rIns="0" bIns="0" rtlCol="0" anchor="ctr"/>
           <a:lstStyle/>
           <a:p>
-            <a:pPr indent="0" marL="0">
+            <a:pPr marL="0" indent="0">
               <a:buNone/>
             </a:pPr>
             <a:r>
@@ -22705,7 +22165,7 @@
           <a:bodyPr wrap="square" lIns="0" tIns="0" rIns="0" bIns="0" rtlCol="0" anchor="ctr"/>
           <a:lstStyle/>
           <a:p>
-            <a:pPr indent="0" marL="0">
+            <a:pPr marL="0" indent="0">
               <a:buNone/>
             </a:pPr>
             <a:r>
@@ -22719,9 +22179,6 @@
               </a:rPr>
               <a:t>◈ </a:t>
             </a:r>
-            <a:pPr indent="0" marL="0">
-              <a:buNone/>
-            </a:pPr>
             <a:r>
               <a:rPr lang="en-US" sz="1300" b="1" dirty="0">
                 <a:solidFill>
@@ -22783,7 +22240,7 @@
           <a:bodyPr wrap="square" lIns="0" tIns="0" rIns="0" bIns="0" rtlCol="0" anchor="ctr"/>
           <a:lstStyle/>
           <a:p>
-            <a:pPr indent="0" marL="0">
+            <a:pPr marL="0" indent="0">
               <a:buNone/>
             </a:pPr>
             <a:r>
@@ -22847,7 +22304,7 @@
           <a:bodyPr wrap="square" lIns="0" tIns="0" rIns="0" bIns="0" rtlCol="0" anchor="ctr"/>
           <a:lstStyle/>
           <a:p>
-            <a:pPr indent="0" marL="0">
+            <a:pPr marL="0" indent="0">
               <a:buNone/>
             </a:pPr>
             <a:r>
@@ -22911,7 +22368,7 @@
           <a:bodyPr wrap="square" lIns="0" tIns="0" rIns="0" bIns="0" rtlCol="0" anchor="ctr"/>
           <a:lstStyle/>
           <a:p>
-            <a:pPr indent="0" marL="0">
+            <a:pPr marL="0" indent="0">
               <a:buNone/>
             </a:pPr>
             <a:r>
@@ -22975,7 +22432,7 @@
           <a:bodyPr wrap="square" lIns="0" tIns="0" rIns="0" bIns="0" rtlCol="0" anchor="ctr"/>
           <a:lstStyle/>
           <a:p>
-            <a:pPr indent="0" marL="0">
+            <a:pPr marL="0" indent="0">
               <a:buNone/>
             </a:pPr>
             <a:r>
@@ -23039,7 +22496,7 @@
           <a:bodyPr wrap="square" lIns="0" tIns="0" rIns="0" bIns="0" rtlCol="0" anchor="ctr"/>
           <a:lstStyle/>
           <a:p>
-            <a:pPr indent="0" marL="0">
+            <a:pPr marL="0" indent="0">
               <a:buNone/>
             </a:pPr>
             <a:r>
@@ -23105,7 +22562,7 @@
           <a:bodyPr wrap="square" lIns="0" tIns="0" rIns="0" bIns="0" rtlCol="0" anchor="ctr"/>
           <a:lstStyle/>
           <a:p>
-            <a:pPr indent="0" marL="0">
+            <a:pPr marL="0" indent="0">
               <a:buNone/>
             </a:pPr>
             <a:r>
@@ -23194,7 +22651,7 @@
           <a:bodyPr wrap="square" lIns="0" tIns="0" rIns="0" bIns="0" rtlCol="0" anchor="ctr"/>
           <a:lstStyle/>
           <a:p>
-            <a:pPr indent="0" marL="0">
+            <a:pPr marL="0" indent="0">
               <a:buNone/>
             </a:pPr>
             <a:r>
@@ -23228,6 +22685,7 @@
         <a:solidFill>
           <a:srgbClr val="F0FDF4"/>
         </a:solidFill>
+        <a:effectLst/>
       </p:bgPr>
     </p:bg>
     <p:spTree>
@@ -23315,7 +22773,7 @@
           <a:bodyPr wrap="square" lIns="0" tIns="0" rIns="0" bIns="0" rtlCol="0" anchor="ctr"/>
           <a:lstStyle/>
           <a:p>
-            <a:pPr indent="0" marL="0">
+            <a:pPr marL="0" indent="0">
               <a:buNone/>
             </a:pPr>
             <a:r>
@@ -23354,7 +22812,7 @@
           <a:bodyPr wrap="square" lIns="0" tIns="0" rIns="0" bIns="0" rtlCol="0" anchor="ctr"/>
           <a:lstStyle/>
           <a:p>
-            <a:pPr indent="0" marL="0">
+            <a:pPr marL="0" indent="0">
               <a:buNone/>
             </a:pPr>
             <a:r>
@@ -23368,9 +22826,6 @@
               </a:rPr>
               <a:t>◈ </a:t>
             </a:r>
-            <a:pPr indent="0" marL="0">
-              <a:buNone/>
-            </a:pPr>
             <a:r>
               <a:rPr lang="en-US" sz="1300" b="1" dirty="0">
                 <a:solidFill>
@@ -23407,7 +22862,7 @@
           <a:bodyPr wrap="square" lIns="0" tIns="0" rIns="0" bIns="0" rtlCol="0" anchor="ctr"/>
           <a:lstStyle/>
           <a:p>
-            <a:pPr indent="0" marL="0">
+            <a:pPr marL="0" indent="0">
               <a:buNone/>
             </a:pPr>
             <a:r>
@@ -23421,9 +22876,6 @@
               </a:rPr>
               <a:t>◈ </a:t>
             </a:r>
-            <a:pPr indent="0" marL="0">
-              <a:buNone/>
-            </a:pPr>
             <a:r>
               <a:rPr lang="en-US" sz="1300" dirty="0">
                 <a:solidFill>
@@ -23460,7 +22912,7 @@
           <a:bodyPr wrap="square" lIns="0" tIns="0" rIns="0" bIns="0" rtlCol="0" anchor="ctr"/>
           <a:lstStyle/>
           <a:p>
-            <a:pPr indent="0" marL="0">
+            <a:pPr marL="0" indent="0">
               <a:buNone/>
             </a:pPr>
             <a:r>
@@ -23474,9 +22926,6 @@
               </a:rPr>
               <a:t>◈ </a:t>
             </a:r>
-            <a:pPr indent="0" marL="0">
-              <a:buNone/>
-            </a:pPr>
             <a:r>
               <a:rPr lang="en-US" sz="1300" b="1" dirty="0">
                 <a:solidFill>
@@ -23513,7 +22962,7 @@
           <a:bodyPr wrap="square" lIns="0" tIns="0" rIns="0" bIns="0" rtlCol="0" anchor="ctr"/>
           <a:lstStyle/>
           <a:p>
-            <a:pPr indent="0" marL="0">
+            <a:pPr marL="0" indent="0">
               <a:buNone/>
             </a:pPr>
             <a:r>
@@ -23527,9 +22976,6 @@
               </a:rPr>
               <a:t>◈ </a:t>
             </a:r>
-            <a:pPr indent="0" marL="0">
-              <a:buNone/>
-            </a:pPr>
             <a:r>
               <a:rPr lang="en-US" sz="1300" b="1" dirty="0">
                 <a:solidFill>
@@ -23566,7 +23012,7 @@
           <a:bodyPr wrap="square" lIns="0" tIns="0" rIns="0" bIns="0" rtlCol="0" anchor="ctr"/>
           <a:lstStyle/>
           <a:p>
-            <a:pPr indent="0" marL="0">
+            <a:pPr marL="0" indent="0">
               <a:buNone/>
             </a:pPr>
             <a:r>
@@ -23580,9 +23026,6 @@
               </a:rPr>
               <a:t>◈ </a:t>
             </a:r>
-            <a:pPr indent="0" marL="0">
-              <a:buNone/>
-            </a:pPr>
             <a:r>
               <a:rPr lang="en-US" sz="1300" dirty="0">
                 <a:solidFill>
@@ -23619,7 +23062,7 @@
           <a:bodyPr wrap="square" lIns="0" tIns="0" rIns="0" bIns="0" rtlCol="0" anchor="ctr"/>
           <a:lstStyle/>
           <a:p>
-            <a:pPr indent="0" marL="0">
+            <a:pPr marL="0" indent="0">
               <a:buNone/>
             </a:pPr>
             <a:r>
@@ -23633,9 +23076,6 @@
               </a:rPr>
               <a:t>◈ </a:t>
             </a:r>
-            <a:pPr indent="0" marL="0">
-              <a:buNone/>
-            </a:pPr>
             <a:r>
               <a:rPr lang="en-US" sz="1300" dirty="0">
                 <a:solidFill>
@@ -23699,7 +23139,7 @@
           <a:bodyPr wrap="square" lIns="0" tIns="0" rIns="0" bIns="0" rtlCol="0" anchor="ctr"/>
           <a:lstStyle/>
           <a:p>
-            <a:pPr indent="0" marL="0">
+            <a:pPr marL="0" indent="0">
               <a:buNone/>
             </a:pPr>
             <a:r>
@@ -23788,7 +23228,7 @@
           <a:bodyPr wrap="square" lIns="0" tIns="0" rIns="0" bIns="0" rtlCol="0" anchor="ctr"/>
           <a:lstStyle/>
           <a:p>
-            <a:pPr indent="0" marL="0">
+            <a:pPr marL="0" indent="0">
               <a:buNone/>
             </a:pPr>
             <a:r>
@@ -23822,6 +23262,7 @@
         <a:solidFill>
           <a:srgbClr val="0A1A12"/>
         </a:solidFill>
+        <a:effectLst/>
       </p:bgPr>
     </p:bg>
     <p:spTree>
@@ -23936,7 +23377,7 @@
           <a:bodyPr wrap="square" rtlCol="0" anchor="ctr"/>
           <a:lstStyle/>
           <a:p>
-            <a:pPr indent="0" marL="0">
+            <a:pPr marL="0" indent="0">
               <a:buNone/>
             </a:pPr>
             <a:r>
@@ -23975,7 +23416,7 @@
           <a:bodyPr wrap="square" rtlCol="0" anchor="ctr"/>
           <a:lstStyle/>
           <a:p>
-            <a:pPr indent="0" marL="0">
+            <a:pPr marL="0" indent="0">
               <a:buNone/>
             </a:pPr>
             <a:r>
@@ -24039,7 +23480,7 @@
           <a:bodyPr wrap="square" lIns="0" tIns="0" rIns="0" bIns="0" rtlCol="0" anchor="ctr"/>
           <a:lstStyle/>
           <a:p>
-            <a:pPr indent="0" marL="0">
+            <a:pPr marL="0" indent="0">
               <a:buNone/>
             </a:pPr>
             <a:r>
@@ -24103,7 +23544,7 @@
           <a:bodyPr wrap="square" lIns="0" tIns="0" rIns="0" bIns="0" rtlCol="0" anchor="ctr"/>
           <a:lstStyle/>
           <a:p>
-            <a:pPr indent="0" marL="0">
+            <a:pPr marL="0" indent="0">
               <a:buNone/>
             </a:pPr>
             <a:r>
@@ -24167,7 +23608,7 @@
           <a:bodyPr wrap="square" lIns="0" tIns="0" rIns="0" bIns="0" rtlCol="0" anchor="ctr"/>
           <a:lstStyle/>
           <a:p>
-            <a:pPr indent="0" marL="0">
+            <a:pPr marL="0" indent="0">
               <a:buNone/>
             </a:pPr>
             <a:r>
@@ -24231,7 +23672,7 @@
           <a:bodyPr wrap="square" lIns="0" tIns="0" rIns="0" bIns="0" rtlCol="0" anchor="ctr"/>
           <a:lstStyle/>
           <a:p>
-            <a:pPr indent="0" marL="0">
+            <a:pPr marL="0" indent="0">
               <a:buNone/>
             </a:pPr>
             <a:r>
@@ -24295,7 +23736,7 @@
           <a:bodyPr wrap="square" lIns="0" tIns="0" rIns="0" bIns="0" rtlCol="0" anchor="ctr"/>
           <a:lstStyle/>
           <a:p>
-            <a:pPr indent="0" marL="0">
+            <a:pPr marL="0" indent="0">
               <a:buNone/>
             </a:pPr>
             <a:r>
@@ -24359,7 +23800,7 @@
           <a:bodyPr wrap="square" lIns="0" tIns="0" rIns="0" bIns="0" rtlCol="0" anchor="ctr"/>
           <a:lstStyle/>
           <a:p>
-            <a:pPr indent="0" marL="0">
+            <a:pPr marL="0" indent="0">
               <a:buNone/>
             </a:pPr>
             <a:r>
@@ -24423,7 +23864,7 @@
           <a:bodyPr wrap="square" lIns="0" tIns="0" rIns="0" bIns="0" rtlCol="0" anchor="ctr"/>
           <a:lstStyle/>
           <a:p>
-            <a:pPr indent="0" marL="0">
+            <a:pPr marL="0" indent="0">
               <a:buNone/>
             </a:pPr>
             <a:r>
@@ -24487,7 +23928,7 @@
           <a:bodyPr wrap="square" lIns="0" tIns="0" rIns="0" bIns="0" rtlCol="0" anchor="ctr"/>
           <a:lstStyle/>
           <a:p>
-            <a:pPr algn="ctr" indent="0" marL="0">
+            <a:pPr marL="0" indent="0" algn="ctr">
               <a:buNone/>
             </a:pPr>
             <a:r>
@@ -24521,6 +23962,7 @@
         <a:solidFill>
           <a:srgbClr val="F0FDF4"/>
         </a:solidFill>
+        <a:effectLst/>
       </p:bgPr>
     </p:bg>
     <p:spTree>
@@ -24608,7 +24050,7 @@
           <a:bodyPr wrap="square" lIns="0" tIns="0" rIns="0" bIns="0" rtlCol="0" anchor="ctr"/>
           <a:lstStyle/>
           <a:p>
-            <a:pPr indent="0" marL="0">
+            <a:pPr marL="0" indent="0">
               <a:buNone/>
             </a:pPr>
             <a:r>
@@ -24647,7 +24089,7 @@
           <a:bodyPr wrap="square" lIns="0" tIns="0" rIns="0" bIns="0" rtlCol="0" anchor="ctr"/>
           <a:lstStyle/>
           <a:p>
-            <a:pPr indent="0" marL="0">
+            <a:pPr marL="0" indent="0">
               <a:buNone/>
             </a:pPr>
             <a:r>
@@ -24661,9 +24103,6 @@
               </a:rPr>
               <a:t>◈ </a:t>
             </a:r>
-            <a:pPr indent="0" marL="0">
-              <a:buNone/>
-            </a:pPr>
             <a:r>
               <a:rPr lang="en-US" sz="1300" b="1" dirty="0">
                 <a:solidFill>
@@ -24700,7 +24139,7 @@
           <a:bodyPr wrap="square" lIns="0" tIns="0" rIns="0" bIns="0" rtlCol="0" anchor="ctr"/>
           <a:lstStyle/>
           <a:p>
-            <a:pPr indent="0" marL="0">
+            <a:pPr marL="0" indent="0">
               <a:buNone/>
             </a:pPr>
             <a:r>
@@ -24714,9 +24153,6 @@
               </a:rPr>
               <a:t>◈ </a:t>
             </a:r>
-            <a:pPr indent="0" marL="0">
-              <a:buNone/>
-            </a:pPr>
             <a:r>
               <a:rPr lang="en-US" sz="1300" b="1" dirty="0">
                 <a:solidFill>
@@ -24753,7 +24189,7 @@
           <a:bodyPr wrap="square" lIns="0" tIns="0" rIns="0" bIns="0" rtlCol="0" anchor="ctr"/>
           <a:lstStyle/>
           <a:p>
-            <a:pPr indent="0" marL="0">
+            <a:pPr marL="0" indent="0">
               <a:buNone/>
             </a:pPr>
             <a:r>
@@ -24792,7 +24228,7 @@
           <a:bodyPr wrap="square" lIns="0" tIns="0" rIns="0" bIns="0" rtlCol="0" anchor="ctr"/>
           <a:lstStyle/>
           <a:p>
-            <a:pPr indent="0" marL="0">
+            <a:pPr marL="0" indent="0">
               <a:buNone/>
             </a:pPr>
             <a:r>
@@ -24806,9 +24242,6 @@
               </a:rPr>
               <a:t>◈ </a:t>
             </a:r>
-            <a:pPr indent="0" marL="0">
-              <a:buNone/>
-            </a:pPr>
             <a:r>
               <a:rPr lang="en-US" sz="1300" b="1" dirty="0">
                 <a:solidFill>
@@ -24845,7 +24278,7 @@
           <a:bodyPr wrap="square" lIns="0" tIns="0" rIns="0" bIns="0" rtlCol="0" anchor="ctr"/>
           <a:lstStyle/>
           <a:p>
-            <a:pPr indent="0" marL="0">
+            <a:pPr marL="0" indent="0">
               <a:buNone/>
             </a:pPr>
             <a:r>
@@ -24884,7 +24317,7 @@
           <a:bodyPr wrap="square" lIns="0" tIns="0" rIns="0" bIns="0" rtlCol="0" anchor="ctr"/>
           <a:lstStyle/>
           <a:p>
-            <a:pPr indent="0" marL="0">
+            <a:pPr marL="0" indent="0">
               <a:buNone/>
             </a:pPr>
             <a:r>
@@ -24898,9 +24331,6 @@
               </a:rPr>
               <a:t>◈ </a:t>
             </a:r>
-            <a:pPr indent="0" marL="0">
-              <a:buNone/>
-            </a:pPr>
             <a:r>
               <a:rPr lang="en-US" sz="1300" b="1" dirty="0">
                 <a:solidFill>
@@ -24937,7 +24367,7 @@
           <a:bodyPr wrap="square" lIns="0" tIns="0" rIns="0" bIns="0" rtlCol="0" anchor="ctr"/>
           <a:lstStyle/>
           <a:p>
-            <a:pPr indent="0" marL="0">
+            <a:pPr marL="0" indent="0">
               <a:buNone/>
             </a:pPr>
             <a:r>
@@ -25003,7 +24433,7 @@
           <a:bodyPr wrap="square" lIns="0" tIns="0" rIns="0" bIns="0" rtlCol="0" anchor="ctr"/>
           <a:lstStyle/>
           <a:p>
-            <a:pPr indent="0" marL="0">
+            <a:pPr marL="0" indent="0">
               <a:buNone/>
             </a:pPr>
             <a:r>
@@ -25092,7 +24522,7 @@
           <a:bodyPr wrap="square" lIns="0" tIns="0" rIns="0" bIns="0" rtlCol="0" anchor="ctr"/>
           <a:lstStyle/>
           <a:p>
-            <a:pPr indent="0" marL="0">
+            <a:pPr marL="0" indent="0">
               <a:buNone/>
             </a:pPr>
             <a:r>
@@ -25126,6 +24556,7 @@
         <a:solidFill>
           <a:srgbClr val="F0FDF4"/>
         </a:solidFill>
+        <a:effectLst/>
       </p:bgPr>
     </p:bg>
     <p:spTree>
@@ -25213,7 +24644,7 @@
           <a:bodyPr wrap="square" lIns="0" tIns="0" rIns="0" bIns="0" rtlCol="0" anchor="ctr"/>
           <a:lstStyle/>
           <a:p>
-            <a:pPr indent="0" marL="0">
+            <a:pPr marL="0" indent="0">
               <a:buNone/>
             </a:pPr>
             <a:r>
@@ -25252,7 +24683,7 @@
           <a:bodyPr wrap="square" lIns="0" tIns="0" rIns="0" bIns="0" rtlCol="0" anchor="ctr"/>
           <a:lstStyle/>
           <a:p>
-            <a:pPr indent="0" marL="0">
+            <a:pPr marL="0" indent="0">
               <a:buNone/>
             </a:pPr>
             <a:r>
@@ -25266,9 +24697,6 @@
               </a:rPr>
               <a:t>◈ </a:t>
             </a:r>
-            <a:pPr indent="0" marL="0">
-              <a:buNone/>
-            </a:pPr>
             <a:r>
               <a:rPr lang="en-US" sz="1300" b="1" dirty="0">
                 <a:solidFill>
@@ -25305,7 +24733,7 @@
           <a:bodyPr wrap="square" lIns="0" tIns="0" rIns="0" bIns="0" rtlCol="0" anchor="ctr"/>
           <a:lstStyle/>
           <a:p>
-            <a:pPr indent="0" marL="0">
+            <a:pPr marL="0" indent="0">
               <a:buNone/>
             </a:pPr>
             <a:r>
@@ -25319,9 +24747,6 @@
               </a:rPr>
               <a:t>◈ </a:t>
             </a:r>
-            <a:pPr indent="0" marL="0">
-              <a:buNone/>
-            </a:pPr>
             <a:r>
               <a:rPr lang="en-US" sz="1300" dirty="0">
                 <a:solidFill>
@@ -25383,7 +24808,7 @@
           <a:bodyPr wrap="square" lIns="0" tIns="0" rIns="0" bIns="0" rtlCol="0" anchor="ctr"/>
           <a:lstStyle/>
           <a:p>
-            <a:pPr indent="0" marL="0">
+            <a:pPr marL="0" indent="0">
               <a:buNone/>
             </a:pPr>
             <a:r>
@@ -25447,7 +24872,7 @@
           <a:bodyPr wrap="square" lIns="0" tIns="0" rIns="0" bIns="0" rtlCol="0" anchor="ctr"/>
           <a:lstStyle/>
           <a:p>
-            <a:pPr indent="0" marL="0">
+            <a:pPr marL="0" indent="0">
               <a:buNone/>
             </a:pPr>
             <a:r>
@@ -25511,7 +24936,7 @@
           <a:bodyPr wrap="square" lIns="0" tIns="0" rIns="0" bIns="0" rtlCol="0" anchor="ctr"/>
           <a:lstStyle/>
           <a:p>
-            <a:pPr indent="0" marL="0">
+            <a:pPr marL="0" indent="0">
               <a:buNone/>
             </a:pPr>
             <a:r>
@@ -25550,7 +24975,7 @@
           <a:bodyPr wrap="square" lIns="0" tIns="0" rIns="0" bIns="0" rtlCol="0" anchor="ctr"/>
           <a:lstStyle/>
           <a:p>
-            <a:pPr indent="0" marL="0">
+            <a:pPr marL="0" indent="0">
               <a:buNone/>
             </a:pPr>
             <a:r>
@@ -25564,9 +24989,6 @@
               </a:rPr>
               <a:t>◈ </a:t>
             </a:r>
-            <a:pPr indent="0" marL="0">
-              <a:buNone/>
-            </a:pPr>
             <a:r>
               <a:rPr lang="en-US" sz="1300" dirty="0">
                 <a:solidFill>
@@ -25630,7 +25052,7 @@
           <a:bodyPr wrap="square" lIns="0" tIns="0" rIns="0" bIns="0" rtlCol="0" anchor="ctr"/>
           <a:lstStyle/>
           <a:p>
-            <a:pPr indent="0" marL="0">
+            <a:pPr marL="0" indent="0">
               <a:buNone/>
             </a:pPr>
             <a:r>
@@ -25719,7 +25141,7 @@
           <a:bodyPr wrap="square" lIns="0" tIns="0" rIns="0" bIns="0" rtlCol="0" anchor="ctr"/>
           <a:lstStyle/>
           <a:p>
-            <a:pPr indent="0" marL="0">
+            <a:pPr marL="0" indent="0">
               <a:buNone/>
             </a:pPr>
             <a:r>
@@ -25753,6 +25175,7 @@
         <a:solidFill>
           <a:srgbClr val="0C1A2E"/>
         </a:solidFill>
+        <a:effectLst/>
       </p:bgPr>
     </p:bg>
     <p:spTree>
@@ -25865,11 +25288,11 @@
           <a:bodyPr wrap="square" lIns="0" tIns="0" rIns="0" bIns="0" rtlCol="0" anchor="ctr"/>
           <a:lstStyle/>
           <a:p>
-            <a:pPr algn="ctr" indent="0" marL="0">
-              <a:buNone/>
-            </a:pPr>
-            <a:r>
-              <a:rPr lang="en-US" sz="1000" b="1" spc="200" kern="0" dirty="0">
+            <a:pPr marL="0" indent="0" algn="ctr">
+              <a:buNone/>
+            </a:pPr>
+            <a:r>
+              <a:rPr lang="en-US" sz="1000" b="1" kern="0" spc="200" dirty="0">
                 <a:solidFill>
                   <a:srgbClr val="FFFFFF"/>
                 </a:solidFill>
@@ -25904,7 +25327,7 @@
           <a:bodyPr wrap="square" lIns="0" tIns="0" rIns="0" bIns="0" rtlCol="0" anchor="ctr"/>
           <a:lstStyle/>
           <a:p>
-            <a:pPr indent="0" marL="0">
+            <a:pPr marL="0" indent="0">
               <a:buNone/>
             </a:pPr>
             <a:r>
@@ -25943,7 +25366,7 @@
           <a:bodyPr wrap="square" rtlCol="0" anchor="ctr"/>
           <a:lstStyle/>
           <a:p>
-            <a:pPr indent="0" marL="0">
+            <a:pPr marL="0" indent="0">
               <a:buNone/>
             </a:pPr>
             <a:r>
@@ -26009,7 +25432,7 @@
           <a:bodyPr wrap="square" lIns="0" tIns="0" rIns="0" bIns="0" rtlCol="0" anchor="ctr"/>
           <a:lstStyle/>
           <a:p>
-            <a:pPr indent="0" marL="0">
+            <a:pPr marL="0" indent="0">
               <a:buNone/>
             </a:pPr>
             <a:r>
@@ -26023,9 +25446,6 @@
               </a:rPr>
               <a:t>▶ </a:t>
             </a:r>
-            <a:pPr indent="0" marL="0">
-              <a:buNone/>
-            </a:pPr>
             <a:r>
               <a:rPr lang="en-US" sz="1250" b="1" dirty="0">
                 <a:solidFill>
@@ -26062,7 +25482,7 @@
           <a:bodyPr wrap="square" lIns="0" tIns="0" rIns="0" bIns="0" rtlCol="0" anchor="ctr"/>
           <a:lstStyle/>
           <a:p>
-            <a:pPr indent="0" marL="0">
+            <a:pPr marL="0" indent="0">
               <a:buNone/>
             </a:pPr>
             <a:r>
@@ -26076,9 +25496,6 @@
               </a:rPr>
               <a:t>▶ </a:t>
             </a:r>
-            <a:pPr indent="0" marL="0">
-              <a:buNone/>
-            </a:pPr>
             <a:r>
               <a:rPr lang="en-US" sz="1250" dirty="0">
                 <a:solidFill>
@@ -26140,7 +25557,7 @@
           <a:bodyPr wrap="square" lIns="0" tIns="0" rIns="0" bIns="0" rtlCol="0" anchor="ctr"/>
           <a:lstStyle/>
           <a:p>
-            <a:pPr indent="0" marL="0">
+            <a:pPr marL="0" indent="0">
               <a:buNone/>
             </a:pPr>
             <a:r>
@@ -26204,7 +25621,7 @@
           <a:bodyPr wrap="square" lIns="0" tIns="0" rIns="0" bIns="0" rtlCol="0" anchor="ctr"/>
           <a:lstStyle/>
           <a:p>
-            <a:pPr indent="0" marL="0">
+            <a:pPr marL="0" indent="0">
               <a:buNone/>
             </a:pPr>
             <a:r>
@@ -26270,7 +25687,7 @@
           <a:bodyPr wrap="square" lIns="0" tIns="0" rIns="0" bIns="0" rtlCol="0" anchor="ctr"/>
           <a:lstStyle/>
           <a:p>
-            <a:pPr indent="0" marL="0">
+            <a:pPr marL="0" indent="0">
               <a:buNone/>
             </a:pPr>
             <a:r>
@@ -26334,7 +25751,7 @@
           <a:bodyPr wrap="square" lIns="0" tIns="0" rIns="0" bIns="0" rtlCol="0" anchor="ctr"/>
           <a:lstStyle/>
           <a:p>
-            <a:pPr indent="0" marL="0">
+            <a:pPr marL="0" indent="0">
               <a:buNone/>
             </a:pPr>
             <a:r>
@@ -26368,6 +25785,7 @@
         <a:solidFill>
           <a:srgbClr val="0C1A2E"/>
         </a:solidFill>
+        <a:effectLst/>
       </p:bgPr>
     </p:bg>
     <p:spTree>
@@ -26480,11 +25898,11 @@
           <a:bodyPr wrap="square" lIns="0" tIns="0" rIns="0" bIns="0" rtlCol="0" anchor="ctr"/>
           <a:lstStyle/>
           <a:p>
-            <a:pPr algn="ctr" indent="0" marL="0">
-              <a:buNone/>
-            </a:pPr>
-            <a:r>
-              <a:rPr lang="en-US" sz="1000" b="1" spc="200" kern="0" dirty="0">
+            <a:pPr marL="0" indent="0" algn="ctr">
+              <a:buNone/>
+            </a:pPr>
+            <a:r>
+              <a:rPr lang="en-US" sz="1000" b="1" kern="0" spc="200" dirty="0">
                 <a:solidFill>
                   <a:srgbClr val="FFFFFF"/>
                 </a:solidFill>
@@ -26519,7 +25937,7 @@
           <a:bodyPr wrap="square" lIns="0" tIns="0" rIns="0" bIns="0" rtlCol="0" anchor="ctr"/>
           <a:lstStyle/>
           <a:p>
-            <a:pPr indent="0" marL="0">
+            <a:pPr marL="0" indent="0">
               <a:buNone/>
             </a:pPr>
             <a:r>
@@ -26558,7 +25976,7 @@
           <a:bodyPr wrap="square" rtlCol="0" anchor="ctr"/>
           <a:lstStyle/>
           <a:p>
-            <a:pPr indent="0" marL="0">
+            <a:pPr marL="0" indent="0">
               <a:buNone/>
             </a:pPr>
             <a:r>
@@ -26624,7 +26042,7 @@
           <a:bodyPr wrap="square" lIns="0" tIns="0" rIns="0" bIns="0" rtlCol="0" anchor="ctr"/>
           <a:lstStyle/>
           <a:p>
-            <a:pPr indent="0" marL="0">
+            <a:pPr marL="0" indent="0">
               <a:buNone/>
             </a:pPr>
             <a:r>
@@ -26638,9 +26056,6 @@
               </a:rPr>
               <a:t>▶ </a:t>
             </a:r>
-            <a:pPr indent="0" marL="0">
-              <a:buNone/>
-            </a:pPr>
             <a:r>
               <a:rPr lang="en-US" sz="1250" b="1" dirty="0">
                 <a:solidFill>
@@ -26677,7 +26092,7 @@
           <a:bodyPr wrap="square" lIns="0" tIns="0" rIns="0" bIns="0" rtlCol="0" anchor="ctr"/>
           <a:lstStyle/>
           <a:p>
-            <a:pPr indent="0" marL="0">
+            <a:pPr marL="0" indent="0">
               <a:buNone/>
             </a:pPr>
             <a:r>
@@ -26691,9 +26106,6 @@
               </a:rPr>
               <a:t>▶ </a:t>
             </a:r>
-            <a:pPr indent="0" marL="0">
-              <a:buNone/>
-            </a:pPr>
             <a:r>
               <a:rPr lang="en-US" sz="1250" dirty="0">
                 <a:solidFill>
@@ -26755,7 +26167,7 @@
           <a:bodyPr wrap="square" lIns="0" tIns="0" rIns="0" bIns="0" rtlCol="0" anchor="ctr"/>
           <a:lstStyle/>
           <a:p>
-            <a:pPr indent="0" marL="0">
+            <a:pPr marL="0" indent="0">
               <a:buNone/>
             </a:pPr>
             <a:r>
@@ -26819,7 +26231,7 @@
           <a:bodyPr wrap="square" lIns="0" tIns="0" rIns="0" bIns="0" rtlCol="0" anchor="ctr"/>
           <a:lstStyle/>
           <a:p>
-            <a:pPr indent="0" marL="0">
+            <a:pPr marL="0" indent="0">
               <a:buNone/>
             </a:pPr>
             <a:r>
@@ -26883,7 +26295,7 @@
           <a:bodyPr wrap="square" lIns="0" tIns="0" rIns="0" bIns="0" rtlCol="0" anchor="ctr"/>
           <a:lstStyle/>
           <a:p>
-            <a:pPr indent="0" marL="0">
+            <a:pPr marL="0" indent="0">
               <a:buNone/>
             </a:pPr>
             <a:r>
@@ -26949,7 +26361,7 @@
           <a:bodyPr wrap="square" lIns="0" tIns="0" rIns="0" bIns="0" rtlCol="0" anchor="ctr"/>
           <a:lstStyle/>
           <a:p>
-            <a:pPr indent="0" marL="0">
+            <a:pPr marL="0" indent="0">
               <a:buNone/>
             </a:pPr>
             <a:r>
@@ -27013,7 +26425,7 @@
           <a:bodyPr wrap="square" lIns="0" tIns="0" rIns="0" bIns="0" rtlCol="0" anchor="ctr"/>
           <a:lstStyle/>
           <a:p>
-            <a:pPr indent="0" marL="0">
+            <a:pPr marL="0" indent="0">
               <a:buNone/>
             </a:pPr>
             <a:r>
@@ -27047,6 +26459,7 @@
         <a:solidFill>
           <a:srgbClr val="0D2218"/>
         </a:solidFill>
+        <a:effectLst/>
       </p:bgPr>
     </p:bg>
     <p:spTree>
@@ -27136,7 +26549,7 @@
           <a:bodyPr wrap="square" rtlCol="0" anchor="ctr"/>
           <a:lstStyle/>
           <a:p>
-            <a:pPr indent="0" marL="0">
+            <a:pPr marL="0" indent="0">
               <a:buNone/>
             </a:pPr>
             <a:r>
@@ -27175,11 +26588,11 @@
           <a:bodyPr wrap="square" rtlCol="0" anchor="ctr"/>
           <a:lstStyle/>
           <a:p>
-            <a:pPr indent="0" marL="0">
-              <a:buNone/>
-            </a:pPr>
-            <a:r>
-              <a:rPr lang="en-US" sz="1100" b="1" spc="400" kern="0" dirty="0">
+            <a:pPr marL="0" indent="0">
+              <a:buNone/>
+            </a:pPr>
+            <a:r>
+              <a:rPr lang="en-US" sz="1100" b="1" kern="0" spc="400" dirty="0">
                 <a:solidFill>
                   <a:srgbClr val="86EFAC"/>
                 </a:solidFill>
@@ -27214,7 +26627,7 @@
           <a:bodyPr wrap="square" rtlCol="0" anchor="ctr"/>
           <a:lstStyle/>
           <a:p>
-            <a:pPr indent="0" marL="0">
+            <a:pPr marL="0" indent="0">
               <a:buNone/>
             </a:pPr>
             <a:r>
@@ -27253,7 +26666,7 @@
           <a:bodyPr wrap="square" rtlCol="0" anchor="ctr"/>
           <a:lstStyle/>
           <a:p>
-            <a:pPr indent="0" marL="0">
+            <a:pPr marL="0" indent="0">
               <a:buNone/>
             </a:pPr>
             <a:r>
@@ -27292,7 +26705,7 @@
           <a:bodyPr wrap="square" rtlCol="0" anchor="ctr"/>
           <a:lstStyle/>
           <a:p>
-            <a:pPr indent="0" marL="0">
+            <a:pPr marL="0" indent="0">
               <a:buNone/>
             </a:pPr>
             <a:r>
@@ -27326,6 +26739,7 @@
         <a:solidFill>
           <a:srgbClr val="F0FDF4"/>
         </a:solidFill>
+        <a:effectLst/>
       </p:bgPr>
     </p:bg>
     <p:spTree>
@@ -27413,7 +26827,7 @@
           <a:bodyPr wrap="square" lIns="0" tIns="0" rIns="0" bIns="0" rtlCol="0" anchor="ctr"/>
           <a:lstStyle/>
           <a:p>
-            <a:pPr indent="0" marL="0">
+            <a:pPr marL="0" indent="0">
               <a:buNone/>
             </a:pPr>
             <a:r>
@@ -27452,7 +26866,7 @@
           <a:bodyPr wrap="square" lIns="0" tIns="0" rIns="0" bIns="0" rtlCol="0" anchor="ctr"/>
           <a:lstStyle/>
           <a:p>
-            <a:pPr indent="0" marL="0">
+            <a:pPr marL="0" indent="0">
               <a:buNone/>
             </a:pPr>
             <a:r>
@@ -27466,9 +26880,6 @@
               </a:rPr>
               <a:t>◈ </a:t>
             </a:r>
-            <a:pPr indent="0" marL="0">
-              <a:buNone/>
-            </a:pPr>
             <a:r>
               <a:rPr lang="en-US" sz="1300" b="1" dirty="0">
                 <a:solidFill>
@@ -27530,7 +26941,7 @@
           <a:bodyPr wrap="square" lIns="0" tIns="0" rIns="0" bIns="0" rtlCol="0" anchor="ctr"/>
           <a:lstStyle/>
           <a:p>
-            <a:pPr indent="0" marL="0">
+            <a:pPr marL="0" indent="0">
               <a:buNone/>
             </a:pPr>
             <a:r>
@@ -27569,7 +26980,7 @@
           <a:bodyPr wrap="square" lIns="0" tIns="0" rIns="0" bIns="0" rtlCol="0" anchor="ctr"/>
           <a:lstStyle/>
           <a:p>
-            <a:pPr indent="0" marL="0">
+            <a:pPr marL="0" indent="0">
               <a:buNone/>
             </a:pPr>
             <a:r>
@@ -27583,9 +26994,6 @@
               </a:rPr>
               <a:t>◈ </a:t>
             </a:r>
-            <a:pPr indent="0" marL="0">
-              <a:buNone/>
-            </a:pPr>
             <a:r>
               <a:rPr lang="en-US" sz="1300" b="1" dirty="0">
                 <a:solidFill>
@@ -27647,7 +27055,7 @@
           <a:bodyPr wrap="square" lIns="0" tIns="0" rIns="0" bIns="0" rtlCol="0" anchor="ctr"/>
           <a:lstStyle/>
           <a:p>
-            <a:pPr indent="0" marL="0">
+            <a:pPr marL="0" indent="0">
               <a:buNone/>
             </a:pPr>
             <a:r>
@@ -27686,7 +27094,7 @@
           <a:bodyPr wrap="square" lIns="0" tIns="0" rIns="0" bIns="0" rtlCol="0" anchor="ctr"/>
           <a:lstStyle/>
           <a:p>
-            <a:pPr indent="0" marL="0">
+            <a:pPr marL="0" indent="0">
               <a:buNone/>
             </a:pPr>
             <a:r>
@@ -27700,9 +27108,6 @@
               </a:rPr>
               <a:t>◈ </a:t>
             </a:r>
-            <a:pPr indent="0" marL="0">
-              <a:buNone/>
-            </a:pPr>
             <a:r>
               <a:rPr lang="en-US" sz="1300" b="1" dirty="0">
                 <a:solidFill>
@@ -27764,7 +27169,7 @@
           <a:bodyPr wrap="square" lIns="0" tIns="0" rIns="0" bIns="0" rtlCol="0" anchor="ctr"/>
           <a:lstStyle/>
           <a:p>
-            <a:pPr indent="0" marL="0">
+            <a:pPr marL="0" indent="0">
               <a:buNone/>
             </a:pPr>
             <a:r>
@@ -27830,7 +27235,7 @@
           <a:bodyPr wrap="square" lIns="0" tIns="0" rIns="0" bIns="0" rtlCol="0" anchor="ctr"/>
           <a:lstStyle/>
           <a:p>
-            <a:pPr indent="0" marL="0">
+            <a:pPr marL="0" indent="0">
               <a:buNone/>
             </a:pPr>
             <a:r>
@@ -27919,7 +27324,7 @@
           <a:bodyPr wrap="square" lIns="0" tIns="0" rIns="0" bIns="0" rtlCol="0" anchor="ctr"/>
           <a:lstStyle/>
           <a:p>
-            <a:pPr indent="0" marL="0">
+            <a:pPr marL="0" indent="0">
               <a:buNone/>
             </a:pPr>
             <a:r>
@@ -28238,4 +27643,299 @@
     </a:ext>
   </a:extLst>
 </a:theme>
+</file>
+
+<file path=ppt/theme/theme2.xml><?xml version="1.0" encoding="utf-8"?>
+<a:theme xmlns:a="http://schemas.openxmlformats.org/drawingml/2006/main" name="Tema do Office">
+  <a:themeElements>
+    <a:clrScheme name="Office">
+      <a:dk1>
+        <a:sysClr val="windowText" lastClr="000000"/>
+      </a:dk1>
+      <a:lt1>
+        <a:sysClr val="window" lastClr="FFFFFF"/>
+      </a:lt1>
+      <a:dk2>
+        <a:srgbClr val="44546A"/>
+      </a:dk2>
+      <a:lt2>
+        <a:srgbClr val="E7E6E6"/>
+      </a:lt2>
+      <a:accent1>
+        <a:srgbClr val="4472C4"/>
+      </a:accent1>
+      <a:accent2>
+        <a:srgbClr val="ED7D31"/>
+      </a:accent2>
+      <a:accent3>
+        <a:srgbClr val="A5A5A5"/>
+      </a:accent3>
+      <a:accent4>
+        <a:srgbClr val="FFC000"/>
+      </a:accent4>
+      <a:accent5>
+        <a:srgbClr val="5B9BD5"/>
+      </a:accent5>
+      <a:accent6>
+        <a:srgbClr val="70AD47"/>
+      </a:accent6>
+      <a:hlink>
+        <a:srgbClr val="0563C1"/>
+      </a:hlink>
+      <a:folHlink>
+        <a:srgbClr val="954F72"/>
+      </a:folHlink>
+    </a:clrScheme>
+    <a:fontScheme name="Office">
+      <a:majorFont>
+        <a:latin typeface="Calibri Light" panose="020F0302020204030204"/>
+        <a:ea typeface=""/>
+        <a:cs typeface=""/>
+        <a:font script="Jpan" typeface="游ゴシック Light"/>
+        <a:font script="Hang" typeface="맑은 고딕"/>
+        <a:font script="Hans" typeface="等线 Light"/>
+        <a:font script="Hant" typeface="新細明體"/>
+        <a:font script="Arab" typeface="Times New Roman"/>
+        <a:font script="Hebr" typeface="Times New Roman"/>
+        <a:font script="Thai" typeface="Angsana New"/>
+        <a:font script="Ethi" typeface="Nyala"/>
+        <a:font script="Beng" typeface="Vrinda"/>
+        <a:font script="Gujr" typeface="Shruti"/>
+        <a:font script="Khmr" typeface="MoolBoran"/>
+        <a:font script="Knda" typeface="Tunga"/>
+        <a:font script="Guru" typeface="Raavi"/>
+        <a:font script="Cans" typeface="Euphemia"/>
+        <a:font script="Cher" typeface="Plantagenet Cherokee"/>
+        <a:font script="Yiii" typeface="Microsoft Yi Baiti"/>
+        <a:font script="Tibt" typeface="Microsoft Himalaya"/>
+        <a:font script="Thaa" typeface="MV Boli"/>
+        <a:font script="Deva" typeface="Mangal"/>
+        <a:font script="Telu" typeface="Gautami"/>
+        <a:font script="Taml" typeface="Latha"/>
+        <a:font script="Syrc" typeface="Estrangelo Edessa"/>
+        <a:font script="Orya" typeface="Kalinga"/>
+        <a:font script="Mlym" typeface="Kartika"/>
+        <a:font script="Laoo" typeface="DokChampa"/>
+        <a:font script="Sinh" typeface="Iskoola Pota"/>
+        <a:font script="Mong" typeface="Mongolian Baiti"/>
+        <a:font script="Viet" typeface="Times New Roman"/>
+        <a:font script="Uigh" typeface="Microsoft Uighur"/>
+        <a:font script="Geor" typeface="Sylfaen"/>
+        <a:font script="Armn" typeface="Arial"/>
+        <a:font script="Bugi" typeface="Leelawadee UI"/>
+        <a:font script="Bopo" typeface="Microsoft JhengHei"/>
+        <a:font script="Java" typeface="Javanese Text"/>
+        <a:font script="Lisu" typeface="Segoe UI"/>
+        <a:font script="Mymr" typeface="Myanmar Text"/>
+        <a:font script="Nkoo" typeface="Ebrima"/>
+        <a:font script="Olck" typeface="Nirmala UI"/>
+        <a:font script="Osma" typeface="Ebrima"/>
+        <a:font script="Phag" typeface="Phagspa"/>
+        <a:font script="Syrn" typeface="Estrangelo Edessa"/>
+        <a:font script="Syrj" typeface="Estrangelo Edessa"/>
+        <a:font script="Syre" typeface="Estrangelo Edessa"/>
+        <a:font script="Sora" typeface="Nirmala UI"/>
+        <a:font script="Tale" typeface="Microsoft Tai Le"/>
+        <a:font script="Talu" typeface="Microsoft New Tai Lue"/>
+        <a:font script="Tfng" typeface="Ebrima"/>
+      </a:majorFont>
+      <a:minorFont>
+        <a:latin typeface="Calibri" panose="020F0502020204030204"/>
+        <a:ea typeface=""/>
+        <a:cs typeface=""/>
+        <a:font script="Jpan" typeface="游ゴシック"/>
+        <a:font script="Hang" typeface="맑은 고딕"/>
+        <a:font script="Hans" typeface="等线"/>
+        <a:font script="Hant" typeface="新細明體"/>
+        <a:font script="Arab" typeface="Arial"/>
+        <a:font script="Hebr" typeface="Arial"/>
+        <a:font script="Thai" typeface="Cordia New"/>
+        <a:font script="Ethi" typeface="Nyala"/>
+        <a:font script="Beng" typeface="Vrinda"/>
+        <a:font script="Gujr" typeface="Shruti"/>
+        <a:font script="Khmr" typeface="DaunPenh"/>
+        <a:font script="Knda" typeface="Tunga"/>
+        <a:font script="Guru" typeface="Raavi"/>
+        <a:font script="Cans" typeface="Euphemia"/>
+        <a:font script="Cher" typeface="Plantagenet Cherokee"/>
+        <a:font script="Yiii" typeface="Microsoft Yi Baiti"/>
+        <a:font script="Tibt" typeface="Microsoft Himalaya"/>
+        <a:font script="Thaa" typeface="MV Boli"/>
+        <a:font script="Deva" typeface="Mangal"/>
+        <a:font script="Telu" typeface="Gautami"/>
+        <a:font script="Taml" typeface="Latha"/>
+        <a:font script="Syrc" typeface="Estrangelo Edessa"/>
+        <a:font script="Orya" typeface="Kalinga"/>
+        <a:font script="Mlym" typeface="Kartika"/>
+        <a:font script="Laoo" typeface="DokChampa"/>
+        <a:font script="Sinh" typeface="Iskoola Pota"/>
+        <a:font script="Mong" typeface="Mongolian Baiti"/>
+        <a:font script="Viet" typeface="Arial"/>
+        <a:font script="Uigh" typeface="Microsoft Uighur"/>
+        <a:font script="Geor" typeface="Sylfaen"/>
+        <a:font script="Armn" typeface="Arial"/>
+        <a:font script="Bugi" typeface="Leelawadee UI"/>
+        <a:font script="Bopo" typeface="Microsoft JhengHei"/>
+        <a:font script="Java" typeface="Javanese Text"/>
+        <a:font script="Lisu" typeface="Segoe UI"/>
+        <a:font script="Mymr" typeface="Myanmar Text"/>
+        <a:font script="Nkoo" typeface="Ebrima"/>
+        <a:font script="Olck" typeface="Nirmala UI"/>
+        <a:font script="Osma" typeface="Ebrima"/>
+        <a:font script="Phag" typeface="Phagspa"/>
+        <a:font script="Syrn" typeface="Estrangelo Edessa"/>
+        <a:font script="Syrj" typeface="Estrangelo Edessa"/>
+        <a:font script="Syre" typeface="Estrangelo Edessa"/>
+        <a:font script="Sora" typeface="Nirmala UI"/>
+        <a:font script="Tale" typeface="Microsoft Tai Le"/>
+        <a:font script="Talu" typeface="Microsoft New Tai Lue"/>
+        <a:font script="Tfng" typeface="Ebrima"/>
+      </a:minorFont>
+    </a:fontScheme>
+    <a:fmtScheme name="Office">
+      <a:fillStyleLst>
+        <a:solidFill>
+          <a:schemeClr val="phClr"/>
+        </a:solidFill>
+        <a:gradFill rotWithShape="1">
+          <a:gsLst>
+            <a:gs pos="0">
+              <a:schemeClr val="phClr">
+                <a:lumMod val="110000"/>
+                <a:satMod val="105000"/>
+                <a:tint val="67000"/>
+              </a:schemeClr>
+            </a:gs>
+            <a:gs pos="50000">
+              <a:schemeClr val="phClr">
+                <a:lumMod val="105000"/>
+                <a:satMod val="103000"/>
+                <a:tint val="73000"/>
+              </a:schemeClr>
+            </a:gs>
+            <a:gs pos="100000">
+              <a:schemeClr val="phClr">
+                <a:lumMod val="105000"/>
+                <a:satMod val="109000"/>
+                <a:tint val="81000"/>
+              </a:schemeClr>
+            </a:gs>
+          </a:gsLst>
+          <a:lin ang="5400000" scaled="0"/>
+        </a:gradFill>
+        <a:gradFill rotWithShape="1">
+          <a:gsLst>
+            <a:gs pos="0">
+              <a:schemeClr val="phClr">
+                <a:satMod val="103000"/>
+                <a:lumMod val="102000"/>
+                <a:tint val="94000"/>
+              </a:schemeClr>
+            </a:gs>
+            <a:gs pos="50000">
+              <a:schemeClr val="phClr">
+                <a:satMod val="110000"/>
+                <a:lumMod val="100000"/>
+                <a:shade val="100000"/>
+              </a:schemeClr>
+            </a:gs>
+            <a:gs pos="100000">
+              <a:schemeClr val="phClr">
+                <a:lumMod val="99000"/>
+                <a:satMod val="120000"/>
+                <a:shade val="78000"/>
+              </a:schemeClr>
+            </a:gs>
+          </a:gsLst>
+          <a:lin ang="5400000" scaled="0"/>
+        </a:gradFill>
+      </a:fillStyleLst>
+      <a:lnStyleLst>
+        <a:ln w="6350" cap="flat" cmpd="sng" algn="ctr">
+          <a:solidFill>
+            <a:schemeClr val="phClr"/>
+          </a:solidFill>
+          <a:prstDash val="solid"/>
+          <a:miter lim="800000"/>
+        </a:ln>
+        <a:ln w="12700" cap="flat" cmpd="sng" algn="ctr">
+          <a:solidFill>
+            <a:schemeClr val="phClr"/>
+          </a:solidFill>
+          <a:prstDash val="solid"/>
+          <a:miter lim="800000"/>
+        </a:ln>
+        <a:ln w="19050" cap="flat" cmpd="sng" algn="ctr">
+          <a:solidFill>
+            <a:schemeClr val="phClr"/>
+          </a:solidFill>
+          <a:prstDash val="solid"/>
+          <a:miter lim="800000"/>
+        </a:ln>
+      </a:lnStyleLst>
+      <a:effectStyleLst>
+        <a:effectStyle>
+          <a:effectLst/>
+        </a:effectStyle>
+        <a:effectStyle>
+          <a:effectLst/>
+        </a:effectStyle>
+        <a:effectStyle>
+          <a:effectLst>
+            <a:outerShdw blurRad="57150" dist="19050" dir="5400000" algn="ctr" rotWithShape="0">
+              <a:srgbClr val="000000">
+                <a:alpha val="63000"/>
+              </a:srgbClr>
+            </a:outerShdw>
+          </a:effectLst>
+        </a:effectStyle>
+      </a:effectStyleLst>
+      <a:bgFillStyleLst>
+        <a:solidFill>
+          <a:schemeClr val="phClr"/>
+        </a:solidFill>
+        <a:solidFill>
+          <a:schemeClr val="phClr">
+            <a:tint val="95000"/>
+            <a:satMod val="170000"/>
+          </a:schemeClr>
+        </a:solidFill>
+        <a:gradFill rotWithShape="1">
+          <a:gsLst>
+            <a:gs pos="0">
+              <a:schemeClr val="phClr">
+                <a:tint val="93000"/>
+                <a:satMod val="150000"/>
+                <a:shade val="98000"/>
+                <a:lumMod val="102000"/>
+              </a:schemeClr>
+            </a:gs>
+            <a:gs pos="50000">
+              <a:schemeClr val="phClr">
+                <a:tint val="98000"/>
+                <a:satMod val="130000"/>
+                <a:shade val="90000"/>
+                <a:lumMod val="103000"/>
+              </a:schemeClr>
+            </a:gs>
+            <a:gs pos="100000">
+              <a:schemeClr val="phClr">
+                <a:shade val="63000"/>
+                <a:satMod val="120000"/>
+              </a:schemeClr>
+            </a:gs>
+          </a:gsLst>
+          <a:lin ang="5400000" scaled="0"/>
+        </a:gradFill>
+      </a:bgFillStyleLst>
+    </a:fmtScheme>
+  </a:themeElements>
+  <a:objectDefaults/>
+  <a:extraClrSchemeLst/>
+  <a:extLst>
+    <a:ext uri="{05A4C25C-085E-4340-85A3-A5531E510DB2}">
+      <thm15:themeFamily xmlns:thm15="http://schemas.microsoft.com/office/thememl/2012/main" name="Office Theme" id="{62F939B6-93AF-4DB8-9C6B-D6C7DFDC589F}" vid="{4A3C46E8-61CC-4603-A589-7422A47A8E4A}"/>
+    </a:ext>
+  </a:extLst>
+</a:theme>
 </file>